--- a/Week-3/Day-2/Autonomous_AI_Data_Quality_Self_Healing_Pipelines.pptx
+++ b/Week-3/Day-2/Autonomous_AI_Data_Quality_Self_Healing_Pipelines.pptx
@@ -8,21 +8,47 @@
     <p:sldId id="256" r:id="rId2"/>
     <p:sldId id="257" r:id="rId3"/>
     <p:sldId id="258" r:id="rId4"/>
-    <p:sldId id="259" r:id="rId5"/>
-    <p:sldId id="260" r:id="rId6"/>
-    <p:sldId id="261" r:id="rId7"/>
-    <p:sldId id="262" r:id="rId8"/>
-    <p:sldId id="263" r:id="rId9"/>
-    <p:sldId id="264" r:id="rId10"/>
-    <p:sldId id="265" r:id="rId11"/>
-    <p:sldId id="266" r:id="rId12"/>
-    <p:sldId id="267" r:id="rId13"/>
-    <p:sldId id="268" r:id="rId14"/>
-    <p:sldId id="269" r:id="rId15"/>
-    <p:sldId id="270" r:id="rId16"/>
-    <p:sldId id="271" r:id="rId17"/>
-    <p:sldId id="272" r:id="rId18"/>
-    <p:sldId id="273" r:id="rId19"/>
+    <p:sldId id="274" r:id="rId5"/>
+    <p:sldId id="275" r:id="rId6"/>
+    <p:sldId id="291" r:id="rId7"/>
+    <p:sldId id="259" r:id="rId8"/>
+    <p:sldId id="276" r:id="rId9"/>
+    <p:sldId id="277" r:id="rId10"/>
+    <p:sldId id="278" r:id="rId11"/>
+    <p:sldId id="279" r:id="rId12"/>
+    <p:sldId id="260" r:id="rId13"/>
+    <p:sldId id="280" r:id="rId14"/>
+    <p:sldId id="281" r:id="rId15"/>
+    <p:sldId id="261" r:id="rId16"/>
+    <p:sldId id="292" r:id="rId17"/>
+    <p:sldId id="282" r:id="rId18"/>
+    <p:sldId id="283" r:id="rId19"/>
+    <p:sldId id="262" r:id="rId20"/>
+    <p:sldId id="293" r:id="rId21"/>
+    <p:sldId id="284" r:id="rId22"/>
+    <p:sldId id="263" r:id="rId23"/>
+    <p:sldId id="285" r:id="rId24"/>
+    <p:sldId id="286" r:id="rId25"/>
+    <p:sldId id="264" r:id="rId26"/>
+    <p:sldId id="294" r:id="rId27"/>
+    <p:sldId id="265" r:id="rId28"/>
+    <p:sldId id="287" r:id="rId29"/>
+    <p:sldId id="295" r:id="rId30"/>
+    <p:sldId id="266" r:id="rId31"/>
+    <p:sldId id="267" r:id="rId32"/>
+    <p:sldId id="288" r:id="rId33"/>
+    <p:sldId id="296" r:id="rId34"/>
+    <p:sldId id="268" r:id="rId35"/>
+    <p:sldId id="289" r:id="rId36"/>
+    <p:sldId id="297" r:id="rId37"/>
+    <p:sldId id="269" r:id="rId38"/>
+    <p:sldId id="298" r:id="rId39"/>
+    <p:sldId id="270" r:id="rId40"/>
+    <p:sldId id="271" r:id="rId41"/>
+    <p:sldId id="290" r:id="rId42"/>
+    <p:sldId id="272" r:id="rId43"/>
+    <p:sldId id="273" r:id="rId44"/>
+    <p:sldId id="299" r:id="rId45"/>
   </p:sldIdLst>
   <p:sldSz cx="9144000" cy="6858000" type="screen4x3"/>
   <p:notesSz cx="6858000" cy="9144000"/>
@@ -196,6 +222,13 @@
             <a:schemeClr val="lt1"/>
           </a:fontRef>
         </p:style>
+        <p:txBody>
+          <a:bodyPr/>
+          <a:lstStyle/>
+          <a:p>
+            <a:endParaRPr lang="en-IN"/>
+          </a:p>
+        </p:txBody>
       </p:sp>
       <p:sp>
         <p:nvSpPr>
@@ -6637,6 +6670,13 @@
             <a:schemeClr val="lt1"/>
           </a:fontRef>
         </p:style>
+        <p:txBody>
+          <a:bodyPr/>
+          <a:lstStyle/>
+          <a:p>
+            <a:endParaRPr lang="en-IN"/>
+          </a:p>
+        </p:txBody>
       </p:sp>
       <p:sp>
         <p:nvSpPr>
@@ -6773,7 +6813,7 @@
           <a:p>
             <a:fld id="{5BCAD085-E8A6-8845-BD4E-CB4CCA059FC4}" type="datetimeFigureOut">
               <a:rPr lang="en-US" smtClean="0"/>
-              <a:t>5/11/2026</a:t>
+              <a:t>5/12/2026</a:t>
             </a:fld>
             <a:endParaRPr lang="en-US"/>
           </a:p>
@@ -6980,7 +7020,7 @@
           <a:p>
             <a:fld id="{5BCAD085-E8A6-8845-BD4E-CB4CCA059FC4}" type="datetimeFigureOut">
               <a:rPr lang="en-US" smtClean="0"/>
-              <a:t>5/11/2026</a:t>
+              <a:t>5/12/2026</a:t>
             </a:fld>
             <a:endParaRPr lang="en-US"/>
           </a:p>
@@ -7160,7 +7200,7 @@
           <a:p>
             <a:fld id="{5BCAD085-E8A6-8845-BD4E-CB4CCA059FC4}" type="datetimeFigureOut">
               <a:rPr lang="en-US" smtClean="0"/>
-              <a:t>5/11/2026</a:t>
+              <a:t>5/12/2026</a:t>
             </a:fld>
             <a:endParaRPr lang="en-US"/>
           </a:p>
@@ -7365,7 +7405,7 @@
           <a:p>
             <a:fld id="{5BCAD085-E8A6-8845-BD4E-CB4CCA059FC4}" type="datetimeFigureOut">
               <a:rPr lang="en-US" smtClean="0"/>
-              <a:t>5/11/2026</a:t>
+              <a:t>5/12/2026</a:t>
             </a:fld>
             <a:endParaRPr lang="en-US"/>
           </a:p>
@@ -14103,7 +14143,7 @@
           <a:p>
             <a:fld id="{5BCAD085-E8A6-8845-BD4E-CB4CCA059FC4}" type="datetimeFigureOut">
               <a:rPr lang="en-US" smtClean="0"/>
-              <a:t>5/11/2026</a:t>
+              <a:t>5/12/2026</a:t>
             </a:fld>
             <a:endParaRPr lang="en-US"/>
           </a:p>
@@ -14377,7 +14417,7 @@
           <a:p>
             <a:fld id="{5BCAD085-E8A6-8845-BD4E-CB4CCA059FC4}" type="datetimeFigureOut">
               <a:rPr lang="en-US" smtClean="0"/>
-              <a:t>5/11/2026</a:t>
+              <a:t>5/12/2026</a:t>
             </a:fld>
             <a:endParaRPr lang="en-US"/>
           </a:p>
@@ -14780,7 +14820,7 @@
           <a:p>
             <a:fld id="{5BCAD085-E8A6-8845-BD4E-CB4CCA059FC4}" type="datetimeFigureOut">
               <a:rPr lang="en-US" smtClean="0"/>
-              <a:t>5/11/2026</a:t>
+              <a:t>5/12/2026</a:t>
             </a:fld>
             <a:endParaRPr lang="en-US"/>
           </a:p>
@@ -14898,7 +14938,7 @@
           <a:p>
             <a:fld id="{5BCAD085-E8A6-8845-BD4E-CB4CCA059FC4}" type="datetimeFigureOut">
               <a:rPr lang="en-US" smtClean="0"/>
-              <a:t>5/11/2026</a:t>
+              <a:t>5/12/2026</a:t>
             </a:fld>
             <a:endParaRPr lang="en-US"/>
           </a:p>
@@ -14993,7 +15033,7 @@
           <a:p>
             <a:fld id="{5BCAD085-E8A6-8845-BD4E-CB4CCA059FC4}" type="datetimeFigureOut">
               <a:rPr lang="en-US" smtClean="0"/>
-              <a:t>5/11/2026</a:t>
+              <a:t>5/12/2026</a:t>
             </a:fld>
             <a:endParaRPr lang="en-US"/>
           </a:p>
@@ -15285,7 +15325,7 @@
           <a:p>
             <a:fld id="{5BCAD085-E8A6-8845-BD4E-CB4CCA059FC4}" type="datetimeFigureOut">
               <a:rPr lang="en-US" smtClean="0"/>
-              <a:t>5/11/2026</a:t>
+              <a:t>5/12/2026</a:t>
             </a:fld>
             <a:endParaRPr lang="en-US"/>
           </a:p>
@@ -15565,7 +15605,7 @@
           <a:p>
             <a:fld id="{5BCAD085-E8A6-8845-BD4E-CB4CCA059FC4}" type="datetimeFigureOut">
               <a:rPr lang="en-US" smtClean="0"/>
-              <a:t>5/11/2026</a:t>
+              <a:t>5/12/2026</a:t>
             </a:fld>
             <a:endParaRPr lang="en-US"/>
           </a:p>
@@ -15815,7 +15855,7 @@
           <a:p>
             <a:fld id="{5BCAD085-E8A6-8845-BD4E-CB4CCA059FC4}" type="datetimeFigureOut">
               <a:rPr lang="en-US" smtClean="0"/>
-              <a:t>5/11/2026</a:t>
+              <a:t>5/12/2026</a:t>
             </a:fld>
             <a:endParaRPr lang="en-US"/>
           </a:p>
@@ -16390,7 +16430,13 @@
       </p:grpSpPr>
       <p:sp>
         <p:nvSpPr>
-          <p:cNvPr id="2" name="Title 1"/>
+          <p:cNvPr id="2" name="Title 1">
+            <a:extLst>
+              <a:ext uri="{FF2B5EF4-FFF2-40B4-BE49-F238E27FC236}">
+                <a16:creationId xmlns:a16="http://schemas.microsoft.com/office/drawing/2014/main" id="{0853BAFD-080F-B4EF-7C25-96F12E8DBC46}"/>
+              </a:ext>
+            </a:extLst>
+          </p:cNvPr>
           <p:cNvSpPr>
             <a:spLocks noGrp="1"/>
           </p:cNvSpPr>
@@ -16404,14 +16450,21 @@
           <a:lstStyle/>
           <a:p>
             <a:r>
-              <a:t>PII Detection and Classification</a:t>
+              <a:rPr lang="en-IN" dirty="0"/>
+              <a:t>AI-Driven Data Quality</a:t>
             </a:r>
           </a:p>
         </p:txBody>
       </p:sp>
       <p:sp>
         <p:nvSpPr>
-          <p:cNvPr id="3" name="Content Placeholder 2"/>
+          <p:cNvPr id="3" name="Content Placeholder 2">
+            <a:extLst>
+              <a:ext uri="{FF2B5EF4-FFF2-40B4-BE49-F238E27FC236}">
+                <a16:creationId xmlns:a16="http://schemas.microsoft.com/office/drawing/2014/main" id="{420BC1E1-9A9E-5396-DA49-29F6B030BEED}"/>
+              </a:ext>
+            </a:extLst>
+          </p:cNvPr>
           <p:cNvSpPr>
             <a:spLocks noGrp="1"/>
           </p:cNvSpPr>
@@ -16419,33 +16472,123 @@
             <p:ph idx="1"/>
           </p:nvPr>
         </p:nvSpPr>
-        <p:spPr/>
+        <p:spPr>
+          <a:xfrm>
+            <a:off x="768096" y="1924050"/>
+            <a:ext cx="7290055" cy="4800600"/>
+          </a:xfrm>
+        </p:spPr>
         <p:txBody>
-          <a:bodyPr/>
+          <a:bodyPr>
+            <a:normAutofit fontScale="92500" lnSpcReduction="20000"/>
+          </a:bodyPr>
           <a:lstStyle/>
           <a:p>
             <a:r>
-              <a:t>Detect emails and phone numbers</a:t>
-            </a:r>
-          </a:p>
-          <a:p>
-            <a:r>
-              <a:t>Identify sensitive financial data</a:t>
-            </a:r>
-          </a:p>
-          <a:p>
-            <a:r>
-              <a:t>Classify healthcare information</a:t>
-            </a:r>
-          </a:p>
-          <a:p>
-            <a:r>
-              <a:t>Apply governance labels</a:t>
-            </a:r>
+              <a:rPr lang="en-US" dirty="0"/>
+              <a:t>Traditional validation:</a:t>
+            </a:r>
+          </a:p>
+          <a:p>
+            <a:pPr lvl="1"/>
+            <a:r>
+              <a:rPr lang="en-US" dirty="0"/>
+              <a:t>Static rules </a:t>
+            </a:r>
+          </a:p>
+          <a:p>
+            <a:pPr lvl="1"/>
+            <a:r>
+              <a:rPr lang="en-US" dirty="0"/>
+              <a:t>Manual coding </a:t>
+            </a:r>
+          </a:p>
+          <a:p>
+            <a:r>
+              <a:rPr lang="en-US" dirty="0"/>
+              <a:t>AI-driven validation:</a:t>
+            </a:r>
+          </a:p>
+          <a:p>
+            <a:pPr lvl="1"/>
+            <a:r>
+              <a:rPr lang="en-US" dirty="0"/>
+              <a:t>Learns automatically </a:t>
+            </a:r>
+          </a:p>
+          <a:p>
+            <a:r>
+              <a:rPr lang="en-US" b="1" dirty="0"/>
+              <a:t>Dynamic Rule Generation</a:t>
+            </a:r>
+          </a:p>
+          <a:p>
+            <a:r>
+              <a:rPr lang="en-US" dirty="0"/>
+              <a:t>AI studies datasets and creates rules like:</a:t>
+            </a:r>
+          </a:p>
+          <a:p>
+            <a:pPr lvl="1"/>
+            <a:r>
+              <a:rPr lang="en-US" dirty="0"/>
+              <a:t>Age should be between 0–100 </a:t>
+            </a:r>
+          </a:p>
+          <a:p>
+            <a:pPr lvl="1"/>
+            <a:r>
+              <a:rPr lang="en-US" dirty="0"/>
+              <a:t>Order amount should not be negative </a:t>
+            </a:r>
+          </a:p>
+          <a:p>
+            <a:r>
+              <a:rPr lang="en-US" b="1" dirty="0"/>
+              <a:t>Metadata-Aware Validation</a:t>
+            </a:r>
+          </a:p>
+          <a:p>
+            <a:r>
+              <a:rPr lang="en-US" dirty="0"/>
+              <a:t>AI uses metadata:</a:t>
+            </a:r>
+          </a:p>
+          <a:p>
+            <a:pPr lvl="1"/>
+            <a:r>
+              <a:rPr lang="en-US" dirty="0"/>
+              <a:t>Column names </a:t>
+            </a:r>
+          </a:p>
+          <a:p>
+            <a:pPr lvl="1"/>
+            <a:r>
+              <a:rPr lang="en-US" dirty="0"/>
+              <a:t>Business glossary </a:t>
+            </a:r>
+          </a:p>
+          <a:p>
+            <a:pPr lvl="1"/>
+            <a:r>
+              <a:rPr lang="en-US" dirty="0"/>
+              <a:t>Tags </a:t>
+            </a:r>
+          </a:p>
+          <a:p>
+            <a:br>
+              <a:rPr lang="en-US" dirty="0"/>
+            </a:br>
+            <a:endParaRPr lang="en-US" dirty="0"/>
           </a:p>
         </p:txBody>
       </p:sp>
     </p:spTree>
+    <p:extLst>
+      <p:ext uri="{BB962C8B-B14F-4D97-AF65-F5344CB8AC3E}">
+        <p14:creationId xmlns:p14="http://schemas.microsoft.com/office/powerpoint/2010/main" val="1411210577"/>
+      </p:ext>
+    </p:extLst>
   </p:cSld>
   <p:clrMapOvr>
     <a:masterClrMapping/>
@@ -16472,28 +16615,13 @@
       </p:grpSpPr>
       <p:sp>
         <p:nvSpPr>
-          <p:cNvPr id="2" name="Title 1"/>
-          <p:cNvSpPr>
-            <a:spLocks noGrp="1"/>
-          </p:cNvSpPr>
-          <p:nvPr>
-            <p:ph type="title"/>
-          </p:nvPr>
-        </p:nvSpPr>
-        <p:spPr/>
-        <p:txBody>
-          <a:bodyPr/>
-          <a:lstStyle/>
-          <a:p>
-            <a:r>
-              <a:t>Self-Healing Pipeline Overview</a:t>
-            </a:r>
-          </a:p>
-        </p:txBody>
-      </p:sp>
-      <p:sp>
-        <p:nvSpPr>
-          <p:cNvPr id="3" name="Content Placeholder 2"/>
+          <p:cNvPr id="3" name="Content Placeholder 2">
+            <a:extLst>
+              <a:ext uri="{FF2B5EF4-FFF2-40B4-BE49-F238E27FC236}">
+                <a16:creationId xmlns:a16="http://schemas.microsoft.com/office/drawing/2014/main" id="{FBCDEF9B-E2EE-125E-04DD-A157D386B61F}"/>
+              </a:ext>
+            </a:extLst>
+          </p:cNvPr>
           <p:cNvSpPr>
             <a:spLocks noGrp="1"/>
           </p:cNvSpPr>
@@ -16501,38 +16629,127 @@
             <p:ph idx="1"/>
           </p:nvPr>
         </p:nvSpPr>
-        <p:spPr/>
+        <p:spPr>
+          <a:xfrm>
+            <a:off x="768096" y="542925"/>
+            <a:ext cx="7290055" cy="5766435"/>
+          </a:xfrm>
+        </p:spPr>
         <p:txBody>
-          <a:bodyPr/>
+          <a:bodyPr>
+            <a:normAutofit fontScale="92500" lnSpcReduction="10000"/>
+          </a:bodyPr>
           <a:lstStyle/>
           <a:p>
             <a:r>
-              <a:t>Detect failures</a:t>
-            </a:r>
-          </a:p>
-          <a:p>
-            <a:r>
-              <a:t>Diagnose issues</a:t>
-            </a:r>
-          </a:p>
-          <a:p>
-            <a:r>
-              <a:t>Apply fixes</a:t>
-            </a:r>
-          </a:p>
-          <a:p>
-            <a:r>
-              <a:t>Re-run pipelines</a:t>
-            </a:r>
-          </a:p>
-          <a:p>
-            <a:r>
-              <a:t>Generate alerts</a:t>
-            </a:r>
+              <a:rPr lang="en-US" dirty="0"/>
+              <a:t>Example:</a:t>
+            </a:r>
+            <a:br>
+              <a:rPr lang="en-US" dirty="0"/>
+            </a:br>
+            <a:r>
+              <a:rPr lang="en-US" dirty="0"/>
+              <a:t>Column name:</a:t>
+            </a:r>
+            <a:br>
+              <a:rPr lang="en-US" dirty="0"/>
+            </a:br>
+            <a:r>
+              <a:rPr lang="en-US" dirty="0" err="1"/>
+              <a:t>email_address</a:t>
+            </a:r>
+            <a:endParaRPr lang="en-US" dirty="0"/>
+          </a:p>
+          <a:p>
+            <a:r>
+              <a:rPr lang="en-US" dirty="0"/>
+              <a:t>AI automatically creates:</a:t>
+            </a:r>
+          </a:p>
+          <a:p>
+            <a:pPr lvl="1"/>
+            <a:r>
+              <a:rPr lang="en-US" dirty="0"/>
+              <a:t>Email regex validation</a:t>
+            </a:r>
+            <a:endParaRPr lang="en-US" b="1" dirty="0"/>
+          </a:p>
+          <a:p>
+            <a:r>
+              <a:rPr lang="en-US" b="1" dirty="0"/>
+              <a:t>Historical Pattern Analysis</a:t>
+            </a:r>
+          </a:p>
+          <a:p>
+            <a:r>
+              <a:rPr lang="en-US" dirty="0"/>
+              <a:t>AI studies previous datasets.</a:t>
+            </a:r>
+          </a:p>
+          <a:p>
+            <a:r>
+              <a:rPr lang="en-US" dirty="0"/>
+              <a:t>Example:</a:t>
+            </a:r>
+            <a:br>
+              <a:rPr lang="en-US" dirty="0"/>
+            </a:br>
+            <a:r>
+              <a:rPr lang="en-US" dirty="0"/>
+              <a:t>If average sales are around 1000 and suddenly become 5 million:</a:t>
+            </a:r>
+          </a:p>
+          <a:p>
+            <a:r>
+              <a:rPr lang="en-US" dirty="0"/>
+              <a:t>AI flags anomaly </a:t>
+            </a:r>
+          </a:p>
+          <a:p>
+            <a:r>
+              <a:rPr lang="en-US" b="1" dirty="0"/>
+              <a:t>Automated Expectation Generation</a:t>
+            </a:r>
+          </a:p>
+          <a:p>
+            <a:r>
+              <a:rPr lang="en-US" dirty="0"/>
+              <a:t>AI creates expectations dynamically.</a:t>
+            </a:r>
+          </a:p>
+          <a:p>
+            <a:r>
+              <a:rPr lang="en-US" dirty="0"/>
+              <a:t>Example:</a:t>
+            </a:r>
+          </a:p>
+          <a:p>
+            <a:r>
+              <a:rPr lang="en-US" dirty="0"/>
+              <a:t>95% values should not be null </a:t>
+            </a:r>
+          </a:p>
+          <a:p>
+            <a:r>
+              <a:rPr lang="en-US" dirty="0"/>
+              <a:t>Timestamp must be recent</a:t>
+            </a:r>
+          </a:p>
+          <a:p>
+            <a:endParaRPr lang="en-IN" dirty="0"/>
+          </a:p>
+          <a:p>
+            <a:endParaRPr lang="en-IN" dirty="0"/>
           </a:p>
         </p:txBody>
       </p:sp>
     </p:spTree>
+    <p:extLst>
+      <p:ext uri="{BB962C8B-B14F-4D97-AF65-F5344CB8AC3E}">
+        <p14:creationId xmlns:p14="http://schemas.microsoft.com/office/powerpoint/2010/main" val="2171977779"/>
+      </p:ext>
+    </p:extLst>
   </p:cSld>
   <p:clrMapOvr>
     <a:masterClrMapping/>
@@ -16573,7 +16790,8 @@
           <a:lstStyle/>
           <a:p>
             <a:r>
-              <a:t>AI Diagnosis Engine</a:t>
+              <a:rPr dirty="0"/>
+              <a:t>AI-Driven Data Quality</a:t>
             </a:r>
           </a:p>
         </p:txBody>
@@ -16594,22 +16812,22 @@
           <a:lstStyle/>
           <a:p>
             <a:r>
-              <a:t>Analyze root causes</a:t>
-            </a:r>
-          </a:p>
-          <a:p>
-            <a:r>
-              <a:t>Summarize incidents</a:t>
-            </a:r>
-          </a:p>
-          <a:p>
-            <a:r>
-              <a:t>Recommend remediation</a:t>
-            </a:r>
-          </a:p>
-          <a:p>
-            <a:r>
-              <a:t>Prioritize failures</a:t>
+              <a:t>Dynamic rule generation</a:t>
+            </a:r>
+          </a:p>
+          <a:p>
+            <a:r>
+              <a:t>Metadata-aware validation</a:t>
+            </a:r>
+          </a:p>
+          <a:p>
+            <a:r>
+              <a:t>Historical pattern analysis</a:t>
+            </a:r>
+          </a:p>
+          <a:p>
+            <a:r>
+              <a:t>Automated expectation generation</a:t>
             </a:r>
           </a:p>
         </p:txBody>
@@ -16641,7 +16859,13 @@
       </p:grpSpPr>
       <p:sp>
         <p:nvSpPr>
-          <p:cNvPr id="2" name="Title 1"/>
+          <p:cNvPr id="2" name="Title 1">
+            <a:extLst>
+              <a:ext uri="{FF2B5EF4-FFF2-40B4-BE49-F238E27FC236}">
+                <a16:creationId xmlns:a16="http://schemas.microsoft.com/office/drawing/2014/main" id="{2769BCD4-1AE4-F20C-587A-A4E5E10E68E0}"/>
+              </a:ext>
+            </a:extLst>
+          </p:cNvPr>
           <p:cNvSpPr>
             <a:spLocks noGrp="1"/>
           </p:cNvSpPr>
@@ -16655,14 +16879,21 @@
           <a:lstStyle/>
           <a:p>
             <a:r>
-              <a:t>LangGraph for Self-Healing</a:t>
+              <a:rPr lang="en-IN" dirty="0"/>
+              <a:t>Great Expectations + LLM</a:t>
             </a:r>
           </a:p>
         </p:txBody>
       </p:sp>
       <p:sp>
         <p:nvSpPr>
-          <p:cNvPr id="3" name="Content Placeholder 2"/>
+          <p:cNvPr id="3" name="Content Placeholder 2">
+            <a:extLst>
+              <a:ext uri="{FF2B5EF4-FFF2-40B4-BE49-F238E27FC236}">
+                <a16:creationId xmlns:a16="http://schemas.microsoft.com/office/drawing/2014/main" id="{C486FF71-C39D-5DAA-0BFF-BF1F8340CAC6}"/>
+              </a:ext>
+            </a:extLst>
+          </p:cNvPr>
           <p:cNvSpPr>
             <a:spLocks noGrp="1"/>
           </p:cNvSpPr>
@@ -16672,31 +16903,106 @@
         </p:nvSpPr>
         <p:spPr/>
         <p:txBody>
-          <a:bodyPr/>
+          <a:bodyPr>
+            <a:normAutofit fontScale="85000" lnSpcReduction="20000"/>
+          </a:bodyPr>
           <a:lstStyle/>
           <a:p>
             <a:r>
-              <a:t>Stateful workflows</a:t>
-            </a:r>
-          </a:p>
-          <a:p>
-            <a:r>
-              <a:t>Retry logic</a:t>
-            </a:r>
-          </a:p>
-          <a:p>
-            <a:r>
-              <a:t>Decision branching</a:t>
-            </a:r>
-          </a:p>
-          <a:p>
-            <a:r>
-              <a:t>Persistent workflow memory</a:t>
-            </a:r>
+              <a:rPr lang="en-IN" b="1" dirty="0"/>
+              <a:t>Great Expectations</a:t>
+            </a:r>
+          </a:p>
+          <a:p>
+            <a:r>
+              <a:rPr lang="en-IN" dirty="0"/>
+              <a:t>A data validation framework.</a:t>
+            </a:r>
+          </a:p>
+          <a:p>
+            <a:r>
+              <a:rPr lang="en-IN" dirty="0"/>
+              <a:t>Normally engineers manually write:</a:t>
+            </a:r>
+          </a:p>
+          <a:p>
+            <a:r>
+              <a:rPr lang="en-IN" dirty="0" err="1"/>
+              <a:t>expect_column_values_to_not_be_null</a:t>
+            </a:r>
+            <a:r>
+              <a:rPr lang="en-IN" dirty="0"/>
+              <a:t>()</a:t>
+            </a:r>
+            <a:br>
+              <a:rPr lang="en-IN" dirty="0"/>
+            </a:br>
+            <a:endParaRPr lang="en-IN" dirty="0"/>
+          </a:p>
+          <a:p>
+            <a:r>
+              <a:rPr lang="en-IN" b="1" dirty="0"/>
+              <a:t>LLM Integration</a:t>
+            </a:r>
+          </a:p>
+          <a:p>
+            <a:r>
+              <a:rPr lang="en-IN" dirty="0"/>
+              <a:t>LLM reads:</a:t>
+            </a:r>
+          </a:p>
+          <a:p>
+            <a:pPr lvl="1"/>
+            <a:r>
+              <a:rPr lang="en-IN" dirty="0"/>
+              <a:t>Dataset </a:t>
+            </a:r>
+          </a:p>
+          <a:p>
+            <a:pPr lvl="1"/>
+            <a:r>
+              <a:rPr lang="en-IN" dirty="0"/>
+              <a:t>Metadata </a:t>
+            </a:r>
+          </a:p>
+          <a:p>
+            <a:pPr lvl="1"/>
+            <a:r>
+              <a:rPr lang="en-IN" dirty="0"/>
+              <a:t>Sample rows </a:t>
+            </a:r>
+          </a:p>
+          <a:p>
+            <a:r>
+              <a:rPr lang="en-IN" dirty="0"/>
+              <a:t>And automatically generates:</a:t>
+            </a:r>
+          </a:p>
+          <a:p>
+            <a:pPr lvl="1"/>
+            <a:r>
+              <a:rPr lang="en-IN" dirty="0"/>
+              <a:t>Expectation suites </a:t>
+            </a:r>
+          </a:p>
+          <a:p>
+            <a:pPr lvl="1"/>
+            <a:r>
+              <a:rPr lang="en-IN" dirty="0"/>
+              <a:t>Validation logic </a:t>
+            </a:r>
+          </a:p>
+          <a:p>
+            <a:endParaRPr lang="en-IN" dirty="0"/>
           </a:p>
         </p:txBody>
       </p:sp>
     </p:spTree>
+    <p:extLst>
+      <p:ext uri="{BB962C8B-B14F-4D97-AF65-F5344CB8AC3E}">
+        <p14:creationId xmlns:p14="http://schemas.microsoft.com/office/powerpoint/2010/main" val="4042118154"/>
+      </p:ext>
+    </p:extLst>
   </p:cSld>
   <p:clrMapOvr>
     <a:masterClrMapping/>
@@ -16723,7 +17029,13 @@
       </p:grpSpPr>
       <p:sp>
         <p:nvSpPr>
-          <p:cNvPr id="2" name="Title 1"/>
+          <p:cNvPr id="2" name="Title 1">
+            <a:extLst>
+              <a:ext uri="{FF2B5EF4-FFF2-40B4-BE49-F238E27FC236}">
+                <a16:creationId xmlns:a16="http://schemas.microsoft.com/office/drawing/2014/main" id="{C07C0B81-AF7B-1978-A9EE-C1034A15A9CD}"/>
+              </a:ext>
+            </a:extLst>
+          </p:cNvPr>
           <p:cNvSpPr>
             <a:spLocks noGrp="1"/>
           </p:cNvSpPr>
@@ -16731,20 +17043,34 @@
             <p:ph type="title"/>
           </p:nvPr>
         </p:nvSpPr>
-        <p:spPr/>
+        <p:spPr>
+          <a:xfrm>
+            <a:off x="768096" y="585215"/>
+            <a:ext cx="7290054" cy="1291209"/>
+          </a:xfrm>
+        </p:spPr>
         <p:txBody>
-          <a:bodyPr/>
+          <a:bodyPr>
+            <a:normAutofit/>
+          </a:bodyPr>
           <a:lstStyle/>
           <a:p>
             <a:r>
-              <a:t>Snowflake Cortex Integration</a:t>
+              <a:rPr lang="en-IN" dirty="0"/>
+              <a:t>Workflow</a:t>
             </a:r>
           </a:p>
         </p:txBody>
       </p:sp>
       <p:sp>
         <p:nvSpPr>
-          <p:cNvPr id="3" name="Content Placeholder 2"/>
+          <p:cNvPr id="3" name="Content Placeholder 2">
+            <a:extLst>
+              <a:ext uri="{FF2B5EF4-FFF2-40B4-BE49-F238E27FC236}">
+                <a16:creationId xmlns:a16="http://schemas.microsoft.com/office/drawing/2014/main" id="{CDF504B1-C291-E620-EE83-D052B7A1D539}"/>
+              </a:ext>
+            </a:extLst>
+          </p:cNvPr>
           <p:cNvSpPr>
             <a:spLocks noGrp="1"/>
           </p:cNvSpPr>
@@ -16754,31 +17080,97 @@
         </p:nvSpPr>
         <p:spPr/>
         <p:txBody>
-          <a:bodyPr/>
+          <a:bodyPr>
+            <a:normAutofit fontScale="70000" lnSpcReduction="20000"/>
+          </a:bodyPr>
           <a:lstStyle/>
           <a:p>
             <a:r>
-              <a:t>AI-powered analytics</a:t>
-            </a:r>
-          </a:p>
-          <a:p>
-            <a:r>
-              <a:t>Root-cause summarization</a:t>
-            </a:r>
-          </a:p>
-          <a:p>
-            <a:r>
-              <a:t>Natural language insights</a:t>
-            </a:r>
-          </a:p>
-          <a:p>
-            <a:r>
-              <a:t>Intelligent monitoring</a:t>
-            </a:r>
+              <a:rPr lang="en-IN" b="1" dirty="0"/>
+              <a:t>Step 1 - AI Reads Dataset</a:t>
+            </a:r>
+          </a:p>
+          <a:p>
+            <a:r>
+              <a:rPr lang="en-IN" dirty="0"/>
+              <a:t>AI understands patterns.</a:t>
+            </a:r>
+          </a:p>
+          <a:p>
+            <a:r>
+              <a:rPr lang="en-IN" b="1" dirty="0"/>
+              <a:t>Step 2 - Generate Rules</a:t>
+            </a:r>
+          </a:p>
+          <a:p>
+            <a:r>
+              <a:rPr lang="en-IN" dirty="0"/>
+              <a:t>Example:</a:t>
+            </a:r>
+          </a:p>
+          <a:p>
+            <a:r>
+              <a:rPr lang="en-IN" dirty="0" err="1"/>
+              <a:t>expect_column_values_to_match_regex</a:t>
+            </a:r>
+            <a:r>
+              <a:rPr lang="en-IN" dirty="0"/>
+              <a:t>()</a:t>
+            </a:r>
+          </a:p>
+          <a:p>
+            <a:r>
+              <a:rPr lang="en-IN" b="1" dirty="0"/>
+              <a:t>Step 3 - Validate Data</a:t>
+            </a:r>
+          </a:p>
+          <a:p>
+            <a:r>
+              <a:rPr lang="en-IN" dirty="0"/>
+              <a:t>Rules execute dynamically.</a:t>
+            </a:r>
+          </a:p>
+          <a:p>
+            <a:r>
+              <a:rPr lang="en-IN" b="1" dirty="0"/>
+              <a:t>Step 4 - Generate Reports</a:t>
+            </a:r>
+          </a:p>
+          <a:p>
+            <a:r>
+              <a:rPr lang="en-IN" dirty="0"/>
+              <a:t>AI summarizes:</a:t>
+            </a:r>
+          </a:p>
+          <a:p>
+            <a:r>
+              <a:rPr lang="en-IN" dirty="0"/>
+              <a:t>Passed validations </a:t>
+            </a:r>
+          </a:p>
+          <a:p>
+            <a:r>
+              <a:rPr lang="en-IN" dirty="0"/>
+              <a:t>Failed checks </a:t>
+            </a:r>
+          </a:p>
+          <a:p>
+            <a:r>
+              <a:rPr lang="en-IN" dirty="0"/>
+              <a:t>Risk severity</a:t>
+            </a:r>
+          </a:p>
+          <a:p>
+            <a:endParaRPr lang="en-IN" dirty="0"/>
           </a:p>
         </p:txBody>
       </p:sp>
     </p:spTree>
+    <p:extLst>
+      <p:ext uri="{BB962C8B-B14F-4D97-AF65-F5344CB8AC3E}">
+        <p14:creationId xmlns:p14="http://schemas.microsoft.com/office/powerpoint/2010/main" val="4196613482"/>
+      </p:ext>
+    </p:extLst>
   </p:cSld>
   <p:clrMapOvr>
     <a:masterClrMapping/>
@@ -16819,7 +17211,8 @@
           <a:lstStyle/>
           <a:p>
             <a:r>
-              <a:t>Benefits of Autonomous Data Engineering</a:t>
+              <a:rPr dirty="0"/>
+              <a:t>Great Expectations + LLM</a:t>
             </a:r>
           </a:p>
         </p:txBody>
@@ -16840,27 +17233,22 @@
           <a:lstStyle/>
           <a:p>
             <a:r>
-              <a:t>Reduced downtime</a:t>
-            </a:r>
-          </a:p>
-          <a:p>
-            <a:r>
-              <a:t>Improved reliability</a:t>
-            </a:r>
-          </a:p>
-          <a:p>
-            <a:r>
-              <a:t>Lower operational cost</a:t>
-            </a:r>
-          </a:p>
-          <a:p>
-            <a:r>
-              <a:t>Enhanced governance</a:t>
-            </a:r>
-          </a:p>
-          <a:p>
-            <a:r>
-              <a:t>Scalable AI operations</a:t>
+              <a:t>Generate validation rules automatically</a:t>
+            </a:r>
+          </a:p>
+          <a:p>
+            <a:r>
+              <a:t>Build expectation suites</a:t>
+            </a:r>
+          </a:p>
+          <a:p>
+            <a:r>
+              <a:t>Validate datasets dynamically</a:t>
+            </a:r>
+          </a:p>
+          <a:p>
+            <a:r>
+              <a:t>Generate reports and alerts</a:t>
             </a:r>
           </a:p>
         </p:txBody>
@@ -16874,6 +17262,403 @@
 </file>
 
 <file path=ppt/slides/slide16.xml><?xml version="1.0" encoding="utf-8"?>
+<p:sld xmlns:a="http://schemas.openxmlformats.org/drawingml/2006/main" xmlns:r="http://schemas.openxmlformats.org/officeDocument/2006/relationships" xmlns:p="http://schemas.openxmlformats.org/presentationml/2006/main">
+  <p:cSld>
+    <p:spTree>
+      <p:nvGrpSpPr>
+        <p:cNvPr id="1" name=""/>
+        <p:cNvGrpSpPr/>
+        <p:nvPr/>
+      </p:nvGrpSpPr>
+      <p:grpSpPr>
+        <a:xfrm>
+          <a:off x="0" y="0"/>
+          <a:ext cx="0" cy="0"/>
+          <a:chOff x="0" y="0"/>
+          <a:chExt cx="0" cy="0"/>
+        </a:xfrm>
+      </p:grpSpPr>
+      <p:sp>
+        <p:nvSpPr>
+          <p:cNvPr id="3" name="Content Placeholder 2">
+            <a:extLst>
+              <a:ext uri="{FF2B5EF4-FFF2-40B4-BE49-F238E27FC236}">
+                <a16:creationId xmlns:a16="http://schemas.microsoft.com/office/drawing/2014/main" id="{D416A7C0-C825-F8F6-B79E-63A8EAA20892}"/>
+              </a:ext>
+            </a:extLst>
+          </p:cNvPr>
+          <p:cNvSpPr>
+            <a:spLocks noGrp="1"/>
+          </p:cNvSpPr>
+          <p:nvPr>
+            <p:ph idx="1"/>
+          </p:nvPr>
+        </p:nvSpPr>
+        <p:spPr/>
+        <p:txBody>
+          <a:bodyPr>
+            <a:normAutofit/>
+          </a:bodyPr>
+          <a:lstStyle/>
+          <a:p>
+            <a:pPr algn="ctr"/>
+            <a:endParaRPr lang="en-US" sz="3600" dirty="0"/>
+          </a:p>
+          <a:p>
+            <a:pPr algn="ctr"/>
+            <a:endParaRPr lang="en-US" sz="3600" dirty="0"/>
+          </a:p>
+          <a:p>
+            <a:pPr algn="ctr"/>
+            <a:endParaRPr lang="en-US" sz="3600" dirty="0"/>
+          </a:p>
+          <a:p>
+            <a:pPr algn="ctr"/>
+            <a:r>
+              <a:rPr lang="en-US" sz="3600" dirty="0"/>
+              <a:t>Perform LAB-2</a:t>
+            </a:r>
+            <a:endParaRPr lang="en-IN" sz="3600" dirty="0"/>
+          </a:p>
+          <a:p>
+            <a:pPr algn="ctr"/>
+            <a:endParaRPr lang="en-IN" sz="3600" dirty="0"/>
+          </a:p>
+        </p:txBody>
+      </p:sp>
+    </p:spTree>
+    <p:extLst>
+      <p:ext uri="{BB962C8B-B14F-4D97-AF65-F5344CB8AC3E}">
+        <p14:creationId xmlns:p14="http://schemas.microsoft.com/office/powerpoint/2010/main" val="3922672102"/>
+      </p:ext>
+    </p:extLst>
+  </p:cSld>
+  <p:clrMapOvr>
+    <a:masterClrMapping/>
+  </p:clrMapOvr>
+</p:sld>
+</file>
+
+<file path=ppt/slides/slide17.xml><?xml version="1.0" encoding="utf-8"?>
+<p:sld xmlns:a="http://schemas.openxmlformats.org/drawingml/2006/main" xmlns:r="http://schemas.openxmlformats.org/officeDocument/2006/relationships" xmlns:p="http://schemas.openxmlformats.org/presentationml/2006/main">
+  <p:cSld>
+    <p:spTree>
+      <p:nvGrpSpPr>
+        <p:cNvPr id="1" name=""/>
+        <p:cNvGrpSpPr/>
+        <p:nvPr/>
+      </p:nvGrpSpPr>
+      <p:grpSpPr>
+        <a:xfrm>
+          <a:off x="0" y="0"/>
+          <a:ext cx="0" cy="0"/>
+          <a:chOff x="0" y="0"/>
+          <a:chExt cx="0" cy="0"/>
+        </a:xfrm>
+      </p:grpSpPr>
+      <p:sp>
+        <p:nvSpPr>
+          <p:cNvPr id="2" name="Title 1">
+            <a:extLst>
+              <a:ext uri="{FF2B5EF4-FFF2-40B4-BE49-F238E27FC236}">
+                <a16:creationId xmlns:a16="http://schemas.microsoft.com/office/drawing/2014/main" id="{3C7D4689-92FE-3048-3BD6-B624A7DEC196}"/>
+              </a:ext>
+            </a:extLst>
+          </p:cNvPr>
+          <p:cNvSpPr>
+            <a:spLocks noGrp="1"/>
+          </p:cNvSpPr>
+          <p:nvPr>
+            <p:ph type="title"/>
+          </p:nvPr>
+        </p:nvSpPr>
+        <p:spPr/>
+        <p:txBody>
+          <a:bodyPr/>
+          <a:lstStyle/>
+          <a:p>
+            <a:r>
+              <a:rPr lang="en-IN" dirty="0"/>
+              <a:t>Anomaly Detection Agents</a:t>
+            </a:r>
+          </a:p>
+        </p:txBody>
+      </p:sp>
+      <p:sp>
+        <p:nvSpPr>
+          <p:cNvPr id="3" name="Content Placeholder 2">
+            <a:extLst>
+              <a:ext uri="{FF2B5EF4-FFF2-40B4-BE49-F238E27FC236}">
+                <a16:creationId xmlns:a16="http://schemas.microsoft.com/office/drawing/2014/main" id="{73BE6884-5BED-46B6-66DA-494CAE15F323}"/>
+              </a:ext>
+            </a:extLst>
+          </p:cNvPr>
+          <p:cNvSpPr>
+            <a:spLocks noGrp="1"/>
+          </p:cNvSpPr>
+          <p:nvPr>
+            <p:ph idx="1"/>
+          </p:nvPr>
+        </p:nvSpPr>
+        <p:spPr>
+          <a:xfrm>
+            <a:off x="768096" y="2084831"/>
+            <a:ext cx="7290055" cy="4592193"/>
+          </a:xfrm>
+        </p:spPr>
+        <p:txBody>
+          <a:bodyPr>
+            <a:normAutofit fontScale="70000" lnSpcReduction="20000"/>
+          </a:bodyPr>
+          <a:lstStyle/>
+          <a:p>
+            <a:r>
+              <a:rPr lang="en-IN" dirty="0"/>
+              <a:t>These agents continuously monitor pipelines.</a:t>
+            </a:r>
+          </a:p>
+          <a:p>
+            <a:r>
+              <a:rPr lang="en-IN" b="1" dirty="0"/>
+              <a:t>Detect Unusual Patterns</a:t>
+            </a:r>
+          </a:p>
+          <a:p>
+            <a:pPr lvl="1"/>
+            <a:r>
+              <a:rPr lang="en-IN" dirty="0"/>
+              <a:t>AI learns normal behaviours.</a:t>
+            </a:r>
+          </a:p>
+          <a:p>
+            <a:pPr lvl="1"/>
+            <a:r>
+              <a:rPr lang="en-IN" dirty="0"/>
+              <a:t>Anything abnormal becomes anomaly.</a:t>
+            </a:r>
+          </a:p>
+          <a:p>
+            <a:r>
+              <a:rPr lang="en-IN" b="1" dirty="0"/>
+              <a:t>Monitor Metrics</a:t>
+            </a:r>
+          </a:p>
+          <a:p>
+            <a:r>
+              <a:rPr lang="en-IN" dirty="0"/>
+              <a:t>Examples:</a:t>
+            </a:r>
+          </a:p>
+          <a:p>
+            <a:pPr lvl="1"/>
+            <a:r>
+              <a:rPr lang="en-IN" dirty="0"/>
+              <a:t>Row count </a:t>
+            </a:r>
+          </a:p>
+          <a:p>
+            <a:pPr lvl="1"/>
+            <a:r>
+              <a:rPr lang="en-IN" dirty="0"/>
+              <a:t>CPU usage </a:t>
+            </a:r>
+          </a:p>
+          <a:p>
+            <a:pPr lvl="1"/>
+            <a:r>
+              <a:rPr lang="en-IN" dirty="0"/>
+              <a:t>Pipeline execution time </a:t>
+            </a:r>
+          </a:p>
+          <a:p>
+            <a:pPr lvl="1"/>
+            <a:r>
+              <a:rPr lang="en-IN" dirty="0"/>
+              <a:t>Null percentages </a:t>
+            </a:r>
+          </a:p>
+          <a:p>
+            <a:r>
+              <a:rPr lang="en-IN" b="1" dirty="0"/>
+              <a:t>Identify Spikes and Drops</a:t>
+            </a:r>
+          </a:p>
+          <a:p>
+            <a:r>
+              <a:rPr lang="en-IN" dirty="0"/>
+              <a:t>Example:</a:t>
+            </a:r>
+            <a:br>
+              <a:rPr lang="en-IN" dirty="0"/>
+            </a:br>
+            <a:r>
+              <a:rPr lang="en-IN" dirty="0"/>
+              <a:t>Normally:</a:t>
+            </a:r>
+          </a:p>
+          <a:p>
+            <a:r>
+              <a:rPr lang="en-IN" dirty="0"/>
+              <a:t>10,000 rows/day</a:t>
+            </a:r>
+          </a:p>
+          <a:p>
+            <a:r>
+              <a:rPr lang="en-IN" dirty="0"/>
+              <a:t>Today:</a:t>
+            </a:r>
+          </a:p>
+          <a:p>
+            <a:r>
+              <a:rPr lang="en-IN" dirty="0"/>
+              <a:t>500 rows</a:t>
+            </a:r>
+          </a:p>
+          <a:p>
+            <a:r>
+              <a:rPr lang="en-IN" dirty="0"/>
+              <a:t>AI identifies abnormal drop.</a:t>
+            </a:r>
+          </a:p>
+        </p:txBody>
+      </p:sp>
+    </p:spTree>
+    <p:extLst>
+      <p:ext uri="{BB962C8B-B14F-4D97-AF65-F5344CB8AC3E}">
+        <p14:creationId xmlns:p14="http://schemas.microsoft.com/office/powerpoint/2010/main" val="645348804"/>
+      </p:ext>
+    </p:extLst>
+  </p:cSld>
+  <p:clrMapOvr>
+    <a:masterClrMapping/>
+  </p:clrMapOvr>
+</p:sld>
+</file>
+
+<file path=ppt/slides/slide18.xml><?xml version="1.0" encoding="utf-8"?>
+<p:sld xmlns:a="http://schemas.openxmlformats.org/drawingml/2006/main" xmlns:r="http://schemas.openxmlformats.org/officeDocument/2006/relationships" xmlns:p="http://schemas.openxmlformats.org/presentationml/2006/main">
+  <p:cSld>
+    <p:spTree>
+      <p:nvGrpSpPr>
+        <p:cNvPr id="1" name=""/>
+        <p:cNvGrpSpPr/>
+        <p:nvPr/>
+      </p:nvGrpSpPr>
+      <p:grpSpPr>
+        <a:xfrm>
+          <a:off x="0" y="0"/>
+          <a:ext cx="0" cy="0"/>
+          <a:chOff x="0" y="0"/>
+          <a:chExt cx="0" cy="0"/>
+        </a:xfrm>
+      </p:grpSpPr>
+      <p:sp>
+        <p:nvSpPr>
+          <p:cNvPr id="2" name="Title 1">
+            <a:extLst>
+              <a:ext uri="{FF2B5EF4-FFF2-40B4-BE49-F238E27FC236}">
+                <a16:creationId xmlns:a16="http://schemas.microsoft.com/office/drawing/2014/main" id="{C51693E8-1E78-BCD7-2CDD-B1DD17845456}"/>
+              </a:ext>
+            </a:extLst>
+          </p:cNvPr>
+          <p:cNvSpPr>
+            <a:spLocks noGrp="1"/>
+          </p:cNvSpPr>
+          <p:nvPr>
+            <p:ph type="title"/>
+          </p:nvPr>
+        </p:nvSpPr>
+        <p:spPr/>
+        <p:txBody>
+          <a:bodyPr/>
+          <a:lstStyle/>
+          <a:p>
+            <a:r>
+              <a:rPr lang="en-US" dirty="0"/>
+              <a:t>CONTD</a:t>
+            </a:r>
+            <a:endParaRPr lang="en-IN" dirty="0"/>
+          </a:p>
+        </p:txBody>
+      </p:sp>
+      <p:sp>
+        <p:nvSpPr>
+          <p:cNvPr id="3" name="Content Placeholder 2">
+            <a:extLst>
+              <a:ext uri="{FF2B5EF4-FFF2-40B4-BE49-F238E27FC236}">
+                <a16:creationId xmlns:a16="http://schemas.microsoft.com/office/drawing/2014/main" id="{CC04034F-FB10-1DD6-704A-FCF7A50B162E}"/>
+              </a:ext>
+            </a:extLst>
+          </p:cNvPr>
+          <p:cNvSpPr>
+            <a:spLocks noGrp="1"/>
+          </p:cNvSpPr>
+          <p:nvPr>
+            <p:ph idx="1"/>
+          </p:nvPr>
+        </p:nvSpPr>
+        <p:spPr/>
+        <p:txBody>
+          <a:bodyPr/>
+          <a:lstStyle/>
+          <a:p>
+            <a:r>
+              <a:rPr lang="en-IN" b="1" dirty="0"/>
+              <a:t>Trigger Automated Actions</a:t>
+            </a:r>
+          </a:p>
+          <a:p>
+            <a:r>
+              <a:rPr lang="en-IN" dirty="0"/>
+              <a:t>Possible actions:</a:t>
+            </a:r>
+          </a:p>
+          <a:p>
+            <a:r>
+              <a:rPr lang="en-IN" dirty="0"/>
+              <a:t>Restart pipeline </a:t>
+            </a:r>
+          </a:p>
+          <a:p>
+            <a:r>
+              <a:rPr lang="en-IN" dirty="0"/>
+              <a:t>Scale cluster </a:t>
+            </a:r>
+          </a:p>
+          <a:p>
+            <a:r>
+              <a:rPr lang="en-IN" dirty="0"/>
+              <a:t>Notify team </a:t>
+            </a:r>
+          </a:p>
+          <a:p>
+            <a:r>
+              <a:rPr lang="en-IN" dirty="0"/>
+              <a:t>Quarantine records</a:t>
+            </a:r>
+          </a:p>
+          <a:p>
+            <a:endParaRPr lang="en-IN" dirty="0"/>
+          </a:p>
+          <a:p>
+            <a:endParaRPr lang="en-IN" dirty="0"/>
+          </a:p>
+        </p:txBody>
+      </p:sp>
+    </p:spTree>
+    <p:extLst>
+      <p:ext uri="{BB962C8B-B14F-4D97-AF65-F5344CB8AC3E}">
+        <p14:creationId xmlns:p14="http://schemas.microsoft.com/office/powerpoint/2010/main" val="2897483889"/>
+      </p:ext>
+    </p:extLst>
+  </p:cSld>
+  <p:clrMapOvr>
+    <a:masterClrMapping/>
+  </p:clrMapOvr>
+</p:sld>
+</file>
+
+<file path=ppt/slides/slide19.xml><?xml version="1.0" encoding="utf-8"?>
 <p:sld xmlns:a="http://schemas.openxmlformats.org/drawingml/2006/main" xmlns:r="http://schemas.openxmlformats.org/officeDocument/2006/relationships" xmlns:p="http://schemas.openxmlformats.org/presentationml/2006/main">
   <p:cSld>
     <p:spTree>
@@ -16906,7 +17691,8 @@
           <a:lstStyle/>
           <a:p>
             <a:r>
-              <a:t>Best Practices</a:t>
+              <a:rPr dirty="0"/>
+              <a:t>Anomaly Detection Agents</a:t>
             </a:r>
           </a:p>
         </p:txBody>
@@ -16927,191 +17713,22 @@
           <a:lstStyle/>
           <a:p>
             <a:r>
-              <a:t>Human approval for critical fixes</a:t>
-            </a:r>
-          </a:p>
-          <a:p>
-            <a:r>
-              <a:t>Audit logging</a:t>
-            </a:r>
-          </a:p>
-          <a:p>
-            <a:r>
-              <a:t>RBAC enforcement</a:t>
-            </a:r>
-          </a:p>
-          <a:p>
-            <a:r>
-              <a:t>Continuous AI monitoring</a:t>
-            </a:r>
-          </a:p>
-          <a:p>
-            <a:r>
-              <a:t>Validation checkpoints</a:t>
-            </a:r>
-          </a:p>
-        </p:txBody>
-      </p:sp>
-    </p:spTree>
-  </p:cSld>
-  <p:clrMapOvr>
-    <a:masterClrMapping/>
-  </p:clrMapOvr>
-</p:sld>
-</file>
-
-<file path=ppt/slides/slide17.xml><?xml version="1.0" encoding="utf-8"?>
-<p:sld xmlns:a="http://schemas.openxmlformats.org/drawingml/2006/main" xmlns:r="http://schemas.openxmlformats.org/officeDocument/2006/relationships" xmlns:p="http://schemas.openxmlformats.org/presentationml/2006/main">
-  <p:cSld>
-    <p:spTree>
-      <p:nvGrpSpPr>
-        <p:cNvPr id="1" name=""/>
-        <p:cNvGrpSpPr/>
-        <p:nvPr/>
-      </p:nvGrpSpPr>
-      <p:grpSpPr>
-        <a:xfrm>
-          <a:off x="0" y="0"/>
-          <a:ext cx="0" cy="0"/>
-          <a:chOff x="0" y="0"/>
-          <a:chExt cx="0" cy="0"/>
-        </a:xfrm>
-      </p:grpSpPr>
-      <p:sp>
-        <p:nvSpPr>
-          <p:cNvPr id="2" name="Title 1"/>
-          <p:cNvSpPr>
-            <a:spLocks noGrp="1"/>
-          </p:cNvSpPr>
-          <p:nvPr>
-            <p:ph type="title"/>
-          </p:nvPr>
-        </p:nvSpPr>
-        <p:spPr/>
-        <p:txBody>
-          <a:bodyPr/>
-          <a:lstStyle/>
-          <a:p>
-            <a:r>
-              <a:t>Enterprise Use Cases</a:t>
-            </a:r>
-          </a:p>
-        </p:txBody>
-      </p:sp>
-      <p:sp>
-        <p:nvSpPr>
-          <p:cNvPr id="3" name="Content Placeholder 2"/>
-          <p:cNvSpPr>
-            <a:spLocks noGrp="1"/>
-          </p:cNvSpPr>
-          <p:nvPr>
-            <p:ph idx="1"/>
-          </p:nvPr>
-        </p:nvSpPr>
-        <p:spPr/>
-        <p:txBody>
-          <a:bodyPr/>
-          <a:lstStyle/>
-          <a:p>
-            <a:r>
-              <a:t>Banking fraud detection</a:t>
-            </a:r>
-          </a:p>
-          <a:p>
-            <a:r>
-              <a:t>Healthcare PHI monitoring</a:t>
-            </a:r>
-          </a:p>
-          <a:p>
-            <a:r>
-              <a:t>Retail anomaly detection</a:t>
-            </a:r>
-          </a:p>
-          <a:p>
-            <a:r>
-              <a:t>Insurance claim validation</a:t>
-            </a:r>
-          </a:p>
-        </p:txBody>
-      </p:sp>
-    </p:spTree>
-  </p:cSld>
-  <p:clrMapOvr>
-    <a:masterClrMapping/>
-  </p:clrMapOvr>
-</p:sld>
-</file>
-
-<file path=ppt/slides/slide18.xml><?xml version="1.0" encoding="utf-8"?>
-<p:sld xmlns:a="http://schemas.openxmlformats.org/drawingml/2006/main" xmlns:r="http://schemas.openxmlformats.org/officeDocument/2006/relationships" xmlns:p="http://schemas.openxmlformats.org/presentationml/2006/main">
-  <p:cSld>
-    <p:spTree>
-      <p:nvGrpSpPr>
-        <p:cNvPr id="1" name=""/>
-        <p:cNvGrpSpPr/>
-        <p:nvPr/>
-      </p:nvGrpSpPr>
-      <p:grpSpPr>
-        <a:xfrm>
-          <a:off x="0" y="0"/>
-          <a:ext cx="0" cy="0"/>
-          <a:chOff x="0" y="0"/>
-          <a:chExt cx="0" cy="0"/>
-        </a:xfrm>
-      </p:grpSpPr>
-      <p:sp>
-        <p:nvSpPr>
-          <p:cNvPr id="2" name="Title 1"/>
-          <p:cNvSpPr>
-            <a:spLocks noGrp="1"/>
-          </p:cNvSpPr>
-          <p:nvPr>
-            <p:ph type="title"/>
-          </p:nvPr>
-        </p:nvSpPr>
-        <p:spPr/>
-        <p:txBody>
-          <a:bodyPr/>
-          <a:lstStyle/>
-          <a:p>
-            <a:r>
-              <a:t>Future of Autonomous Data Platforms</a:t>
-            </a:r>
-          </a:p>
-        </p:txBody>
-      </p:sp>
-      <p:sp>
-        <p:nvSpPr>
-          <p:cNvPr id="3" name="Content Placeholder 2"/>
-          <p:cNvSpPr>
-            <a:spLocks noGrp="1"/>
-          </p:cNvSpPr>
-          <p:nvPr>
-            <p:ph idx="1"/>
-          </p:nvPr>
-        </p:nvSpPr>
-        <p:spPr/>
-        <p:txBody>
-          <a:bodyPr/>
-          <a:lstStyle/>
-          <a:p>
-            <a:r>
-              <a:t>AI-native data engineering</a:t>
-            </a:r>
-          </a:p>
-          <a:p>
-            <a:r>
-              <a:t>Self-healing lakehouses</a:t>
-            </a:r>
-          </a:p>
-          <a:p>
-            <a:r>
-              <a:t>Autonomous governance</a:t>
-            </a:r>
-          </a:p>
-          <a:p>
-            <a:r>
-              <a:t>Intelligent observability</a:t>
+              <a:t>Detect unusual patterns</a:t>
+            </a:r>
+          </a:p>
+          <a:p>
+            <a:r>
+              <a:t>Monitor metrics and pipelines</a:t>
+            </a:r>
+          </a:p>
+          <a:p>
+            <a:r>
+              <a:t>Identify spikes and drops</a:t>
+            </a:r>
+          </a:p>
+          <a:p>
+            <a:r>
+              <a:t>Trigger automated actions</a:t>
             </a:r>
           </a:p>
         </p:txBody>
@@ -17211,6 +17828,1206 @@
 </p:sld>
 </file>
 
+<file path=ppt/slides/slide20.xml><?xml version="1.0" encoding="utf-8"?>
+<p:sld xmlns:a="http://schemas.openxmlformats.org/drawingml/2006/main" xmlns:r="http://schemas.openxmlformats.org/officeDocument/2006/relationships" xmlns:p="http://schemas.openxmlformats.org/presentationml/2006/main">
+  <p:cSld>
+    <p:spTree>
+      <p:nvGrpSpPr>
+        <p:cNvPr id="1" name=""/>
+        <p:cNvGrpSpPr/>
+        <p:nvPr/>
+      </p:nvGrpSpPr>
+      <p:grpSpPr>
+        <a:xfrm>
+          <a:off x="0" y="0"/>
+          <a:ext cx="0" cy="0"/>
+          <a:chOff x="0" y="0"/>
+          <a:chExt cx="0" cy="0"/>
+        </a:xfrm>
+      </p:grpSpPr>
+      <p:sp>
+        <p:nvSpPr>
+          <p:cNvPr id="3" name="Content Placeholder 2">
+            <a:extLst>
+              <a:ext uri="{FF2B5EF4-FFF2-40B4-BE49-F238E27FC236}">
+                <a16:creationId xmlns:a16="http://schemas.microsoft.com/office/drawing/2014/main" id="{9ABD81BF-9276-9F8F-414E-E0A2B6423347}"/>
+              </a:ext>
+            </a:extLst>
+          </p:cNvPr>
+          <p:cNvSpPr>
+            <a:spLocks noGrp="1"/>
+          </p:cNvSpPr>
+          <p:nvPr>
+            <p:ph idx="1"/>
+          </p:nvPr>
+        </p:nvSpPr>
+        <p:spPr/>
+        <p:txBody>
+          <a:bodyPr/>
+          <a:lstStyle/>
+          <a:p>
+            <a:endParaRPr lang="en-US" dirty="0"/>
+          </a:p>
+          <a:p>
+            <a:endParaRPr lang="en-US" dirty="0"/>
+          </a:p>
+          <a:p>
+            <a:endParaRPr lang="en-US" dirty="0"/>
+          </a:p>
+          <a:p>
+            <a:pPr algn="ctr"/>
+            <a:r>
+              <a:rPr lang="en-US" sz="4800" dirty="0"/>
+              <a:t>Complete LAB-3,4,5</a:t>
+            </a:r>
+            <a:endParaRPr lang="en-IN" dirty="0"/>
+          </a:p>
+        </p:txBody>
+      </p:sp>
+    </p:spTree>
+    <p:extLst>
+      <p:ext uri="{BB962C8B-B14F-4D97-AF65-F5344CB8AC3E}">
+        <p14:creationId xmlns:p14="http://schemas.microsoft.com/office/powerpoint/2010/main" val="1078765955"/>
+      </p:ext>
+    </p:extLst>
+  </p:cSld>
+  <p:clrMapOvr>
+    <a:masterClrMapping/>
+  </p:clrMapOvr>
+</p:sld>
+</file>
+
+<file path=ppt/slides/slide21.xml><?xml version="1.0" encoding="utf-8"?>
+<p:sld xmlns:a="http://schemas.openxmlformats.org/drawingml/2006/main" xmlns:r="http://schemas.openxmlformats.org/officeDocument/2006/relationships" xmlns:p="http://schemas.openxmlformats.org/presentationml/2006/main">
+  <p:cSld>
+    <p:spTree>
+      <p:nvGrpSpPr>
+        <p:cNvPr id="1" name=""/>
+        <p:cNvGrpSpPr/>
+        <p:nvPr/>
+      </p:nvGrpSpPr>
+      <p:grpSpPr>
+        <a:xfrm>
+          <a:off x="0" y="0"/>
+          <a:ext cx="0" cy="0"/>
+          <a:chOff x="0" y="0"/>
+          <a:chExt cx="0" cy="0"/>
+        </a:xfrm>
+      </p:grpSpPr>
+      <p:sp>
+        <p:nvSpPr>
+          <p:cNvPr id="2" name="Title 1">
+            <a:extLst>
+              <a:ext uri="{FF2B5EF4-FFF2-40B4-BE49-F238E27FC236}">
+                <a16:creationId xmlns:a16="http://schemas.microsoft.com/office/drawing/2014/main" id="{1DAF4937-6E39-A861-3879-EEBC742A0E5E}"/>
+              </a:ext>
+            </a:extLst>
+          </p:cNvPr>
+          <p:cNvSpPr>
+            <a:spLocks noGrp="1"/>
+          </p:cNvSpPr>
+          <p:nvPr>
+            <p:ph type="title"/>
+          </p:nvPr>
+        </p:nvSpPr>
+        <p:spPr/>
+        <p:txBody>
+          <a:bodyPr/>
+          <a:lstStyle/>
+          <a:p>
+            <a:r>
+              <a:rPr lang="en-IN" dirty="0"/>
+              <a:t>Auto-Quarantine Workflow</a:t>
+            </a:r>
+          </a:p>
+        </p:txBody>
+      </p:sp>
+      <p:sp>
+        <p:nvSpPr>
+          <p:cNvPr id="3" name="Content Placeholder 2">
+            <a:extLst>
+              <a:ext uri="{FF2B5EF4-FFF2-40B4-BE49-F238E27FC236}">
+                <a16:creationId xmlns:a16="http://schemas.microsoft.com/office/drawing/2014/main" id="{6FB27C5F-A674-1304-7091-949C12F4A8BF}"/>
+              </a:ext>
+            </a:extLst>
+          </p:cNvPr>
+          <p:cNvSpPr>
+            <a:spLocks noGrp="1"/>
+          </p:cNvSpPr>
+          <p:nvPr>
+            <p:ph idx="1"/>
+          </p:nvPr>
+        </p:nvSpPr>
+        <p:spPr>
+          <a:xfrm>
+            <a:off x="768096" y="2084832"/>
+            <a:ext cx="7290055" cy="4582668"/>
+          </a:xfrm>
+        </p:spPr>
+        <p:txBody>
+          <a:bodyPr>
+            <a:normAutofit fontScale="62500" lnSpcReduction="20000"/>
+          </a:bodyPr>
+          <a:lstStyle/>
+          <a:p>
+            <a:r>
+              <a:rPr lang="en-IN" dirty="0"/>
+              <a:t>Instead of failing entire pipelines:</a:t>
+            </a:r>
+            <a:br>
+              <a:rPr lang="en-IN" dirty="0"/>
+            </a:br>
+            <a:r>
+              <a:rPr lang="en-IN" dirty="0"/>
+              <a:t>AI isolates bad data.</a:t>
+            </a:r>
+          </a:p>
+          <a:p>
+            <a:r>
+              <a:rPr lang="en-IN" b="1" dirty="0"/>
+              <a:t>Steps</a:t>
+            </a:r>
+          </a:p>
+          <a:p>
+            <a:r>
+              <a:rPr lang="en-IN" b="1" dirty="0"/>
+              <a:t>Detect Bad Records</a:t>
+            </a:r>
+          </a:p>
+          <a:p>
+            <a:r>
+              <a:rPr lang="en-IN" dirty="0"/>
+              <a:t>Example:</a:t>
+            </a:r>
+            <a:br>
+              <a:rPr lang="en-IN" dirty="0"/>
+            </a:br>
+            <a:r>
+              <a:rPr lang="en-IN" dirty="0"/>
+              <a:t>Invalid email format.</a:t>
+            </a:r>
+          </a:p>
+          <a:p>
+            <a:r>
+              <a:rPr lang="en-IN" b="1" dirty="0"/>
+              <a:t>Isolate Suspicious Data</a:t>
+            </a:r>
+          </a:p>
+          <a:p>
+            <a:r>
+              <a:rPr lang="en-IN" dirty="0"/>
+              <a:t>Move records into:</a:t>
+            </a:r>
+          </a:p>
+          <a:p>
+            <a:pPr lvl="1"/>
+            <a:r>
+              <a:rPr lang="en-IN" dirty="0"/>
+              <a:t>Quarantine table </a:t>
+            </a:r>
+          </a:p>
+          <a:p>
+            <a:pPr lvl="1"/>
+            <a:r>
+              <a:rPr lang="en-IN" dirty="0"/>
+              <a:t>Error bucket </a:t>
+            </a:r>
+          </a:p>
+          <a:p>
+            <a:pPr lvl="1"/>
+            <a:r>
+              <a:rPr lang="en-IN" dirty="0"/>
+              <a:t>Delta quarantine layer </a:t>
+            </a:r>
+          </a:p>
+          <a:p>
+            <a:r>
+              <a:rPr lang="en-IN" b="1" dirty="0"/>
+              <a:t>Store Quarantined Records</a:t>
+            </a:r>
+          </a:p>
+          <a:p>
+            <a:r>
+              <a:rPr lang="en-IN" dirty="0"/>
+              <a:t>Useful for:</a:t>
+            </a:r>
+          </a:p>
+          <a:p>
+            <a:pPr lvl="1"/>
+            <a:r>
+              <a:rPr lang="en-IN" dirty="0"/>
+              <a:t>Audit </a:t>
+            </a:r>
+          </a:p>
+          <a:p>
+            <a:pPr lvl="1"/>
+            <a:r>
+              <a:rPr lang="en-IN" dirty="0"/>
+              <a:t>Reprocessing </a:t>
+            </a:r>
+          </a:p>
+          <a:p>
+            <a:pPr lvl="1"/>
+            <a:r>
+              <a:rPr lang="en-IN" dirty="0"/>
+              <a:t>Investigation </a:t>
+            </a:r>
+          </a:p>
+          <a:p>
+            <a:r>
+              <a:rPr lang="en-IN" b="1" dirty="0"/>
+              <a:t>Trigger Remediation Workflow</a:t>
+            </a:r>
+          </a:p>
+          <a:p>
+            <a:r>
+              <a:rPr lang="en-IN" dirty="0"/>
+              <a:t>AI attempts automatic repair.</a:t>
+            </a:r>
+          </a:p>
+          <a:p>
+            <a:endParaRPr lang="en-IN" dirty="0"/>
+          </a:p>
+        </p:txBody>
+      </p:sp>
+    </p:spTree>
+    <p:extLst>
+      <p:ext uri="{BB962C8B-B14F-4D97-AF65-F5344CB8AC3E}">
+        <p14:creationId xmlns:p14="http://schemas.microsoft.com/office/powerpoint/2010/main" val="4208827032"/>
+      </p:ext>
+    </p:extLst>
+  </p:cSld>
+  <p:clrMapOvr>
+    <a:masterClrMapping/>
+  </p:clrMapOvr>
+</p:sld>
+</file>
+
+<file path=ppt/slides/slide22.xml><?xml version="1.0" encoding="utf-8"?>
+<p:sld xmlns:a="http://schemas.openxmlformats.org/drawingml/2006/main" xmlns:r="http://schemas.openxmlformats.org/officeDocument/2006/relationships" xmlns:p="http://schemas.openxmlformats.org/presentationml/2006/main">
+  <p:cSld>
+    <p:spTree>
+      <p:nvGrpSpPr>
+        <p:cNvPr id="1" name=""/>
+        <p:cNvGrpSpPr/>
+        <p:nvPr/>
+      </p:nvGrpSpPr>
+      <p:grpSpPr>
+        <a:xfrm>
+          <a:off x="0" y="0"/>
+          <a:ext cx="0" cy="0"/>
+          <a:chOff x="0" y="0"/>
+          <a:chExt cx="0" cy="0"/>
+        </a:xfrm>
+      </p:grpSpPr>
+      <p:sp>
+        <p:nvSpPr>
+          <p:cNvPr id="2" name="Title 1"/>
+          <p:cNvSpPr>
+            <a:spLocks noGrp="1"/>
+          </p:cNvSpPr>
+          <p:nvPr>
+            <p:ph type="title"/>
+          </p:nvPr>
+        </p:nvSpPr>
+        <p:spPr/>
+        <p:txBody>
+          <a:bodyPr/>
+          <a:lstStyle/>
+          <a:p>
+            <a:r>
+              <a:rPr dirty="0"/>
+              <a:t>Auto-Quarantine Workflow</a:t>
+            </a:r>
+          </a:p>
+        </p:txBody>
+      </p:sp>
+      <p:sp>
+        <p:nvSpPr>
+          <p:cNvPr id="3" name="Content Placeholder 2"/>
+          <p:cNvSpPr>
+            <a:spLocks noGrp="1"/>
+          </p:cNvSpPr>
+          <p:nvPr>
+            <p:ph idx="1"/>
+          </p:nvPr>
+        </p:nvSpPr>
+        <p:spPr/>
+        <p:txBody>
+          <a:bodyPr/>
+          <a:lstStyle/>
+          <a:p>
+            <a:r>
+              <a:t>Detect bad records</a:t>
+            </a:r>
+          </a:p>
+          <a:p>
+            <a:r>
+              <a:t>Isolate suspicious data</a:t>
+            </a:r>
+          </a:p>
+          <a:p>
+            <a:r>
+              <a:t>Store quarantined records</a:t>
+            </a:r>
+          </a:p>
+          <a:p>
+            <a:r>
+              <a:t>Trigger remediation workflows</a:t>
+            </a:r>
+          </a:p>
+        </p:txBody>
+      </p:sp>
+    </p:spTree>
+  </p:cSld>
+  <p:clrMapOvr>
+    <a:masterClrMapping/>
+  </p:clrMapOvr>
+</p:sld>
+</file>
+
+<file path=ppt/slides/slide23.xml><?xml version="1.0" encoding="utf-8"?>
+<p:sld xmlns:a="http://schemas.openxmlformats.org/drawingml/2006/main" xmlns:r="http://schemas.openxmlformats.org/officeDocument/2006/relationships" xmlns:p="http://schemas.openxmlformats.org/presentationml/2006/main">
+  <p:cSld>
+    <p:spTree>
+      <p:nvGrpSpPr>
+        <p:cNvPr id="1" name=""/>
+        <p:cNvGrpSpPr/>
+        <p:nvPr/>
+      </p:nvGrpSpPr>
+      <p:grpSpPr>
+        <a:xfrm>
+          <a:off x="0" y="0"/>
+          <a:ext cx="0" cy="0"/>
+          <a:chOff x="0" y="0"/>
+          <a:chExt cx="0" cy="0"/>
+        </a:xfrm>
+      </p:grpSpPr>
+      <p:sp>
+        <p:nvSpPr>
+          <p:cNvPr id="2" name="Title 1">
+            <a:extLst>
+              <a:ext uri="{FF2B5EF4-FFF2-40B4-BE49-F238E27FC236}">
+                <a16:creationId xmlns:a16="http://schemas.microsoft.com/office/drawing/2014/main" id="{4C102F53-306D-4D8E-CF04-12612AE3DAD3}"/>
+              </a:ext>
+            </a:extLst>
+          </p:cNvPr>
+          <p:cNvSpPr>
+            <a:spLocks noGrp="1"/>
+          </p:cNvSpPr>
+          <p:nvPr>
+            <p:ph type="title"/>
+          </p:nvPr>
+        </p:nvSpPr>
+        <p:spPr/>
+        <p:txBody>
+          <a:bodyPr/>
+          <a:lstStyle/>
+          <a:p>
+            <a:r>
+              <a:rPr lang="en-IN" dirty="0"/>
+              <a:t>Automated Remediation</a:t>
+            </a:r>
+          </a:p>
+        </p:txBody>
+      </p:sp>
+      <p:sp>
+        <p:nvSpPr>
+          <p:cNvPr id="3" name="Content Placeholder 2">
+            <a:extLst>
+              <a:ext uri="{FF2B5EF4-FFF2-40B4-BE49-F238E27FC236}">
+                <a16:creationId xmlns:a16="http://schemas.microsoft.com/office/drawing/2014/main" id="{64B52543-E7D0-469C-7203-A9D81B84AB6F}"/>
+              </a:ext>
+            </a:extLst>
+          </p:cNvPr>
+          <p:cNvSpPr>
+            <a:spLocks noGrp="1"/>
+          </p:cNvSpPr>
+          <p:nvPr>
+            <p:ph idx="1"/>
+          </p:nvPr>
+        </p:nvSpPr>
+        <p:spPr>
+          <a:xfrm>
+            <a:off x="768096" y="1924051"/>
+            <a:ext cx="7290055" cy="4810124"/>
+          </a:xfrm>
+        </p:spPr>
+        <p:txBody>
+          <a:bodyPr>
+            <a:normAutofit/>
+          </a:bodyPr>
+          <a:lstStyle/>
+          <a:p>
+            <a:r>
+              <a:rPr lang="en-US" dirty="0"/>
+              <a:t>This is one of the most powerful concepts.</a:t>
+            </a:r>
+          </a:p>
+          <a:p>
+            <a:r>
+              <a:rPr lang="en-US" b="1" dirty="0"/>
+              <a:t>Fix Formatting Issues</a:t>
+            </a:r>
+          </a:p>
+          <a:p>
+            <a:r>
+              <a:rPr lang="en-US" dirty="0"/>
+              <a:t>Example:</a:t>
+            </a:r>
+          </a:p>
+          <a:p>
+            <a:r>
+              <a:rPr lang="en-US" dirty="0"/>
+              <a:t>01-12-25</a:t>
+            </a:r>
+          </a:p>
+          <a:p>
+            <a:r>
+              <a:rPr lang="en-US" dirty="0"/>
+              <a:t>Convert into:</a:t>
+            </a:r>
+          </a:p>
+          <a:p>
+            <a:r>
+              <a:rPr lang="en-US" dirty="0"/>
+              <a:t>2025-12-01</a:t>
+            </a:r>
+          </a:p>
+          <a:p>
+            <a:r>
+              <a:rPr lang="en-US" b="1" dirty="0"/>
+              <a:t>Correct Mappings</a:t>
+            </a:r>
+          </a:p>
+          <a:p>
+            <a:r>
+              <a:rPr lang="en-US" dirty="0"/>
+              <a:t>Example:</a:t>
+            </a:r>
+          </a:p>
+          <a:p>
+            <a:r>
+              <a:rPr lang="en-US" dirty="0"/>
+              <a:t>Male → M</a:t>
+            </a:r>
+            <a:br>
+              <a:rPr lang="en-US" dirty="0"/>
+            </a:br>
+            <a:r>
+              <a:rPr lang="en-US" dirty="0"/>
+              <a:t>Female → F</a:t>
+            </a:r>
+          </a:p>
+          <a:p>
+            <a:endParaRPr lang="en-US" dirty="0"/>
+          </a:p>
+        </p:txBody>
+      </p:sp>
+    </p:spTree>
+    <p:extLst>
+      <p:ext uri="{BB962C8B-B14F-4D97-AF65-F5344CB8AC3E}">
+        <p14:creationId xmlns:p14="http://schemas.microsoft.com/office/powerpoint/2010/main" val="4273050286"/>
+      </p:ext>
+    </p:extLst>
+  </p:cSld>
+  <p:clrMapOvr>
+    <a:masterClrMapping/>
+  </p:clrMapOvr>
+</p:sld>
+</file>
+
+<file path=ppt/slides/slide24.xml><?xml version="1.0" encoding="utf-8"?>
+<p:sld xmlns:a="http://schemas.openxmlformats.org/drawingml/2006/main" xmlns:r="http://schemas.openxmlformats.org/officeDocument/2006/relationships" xmlns:p="http://schemas.openxmlformats.org/presentationml/2006/main">
+  <p:cSld>
+    <p:spTree>
+      <p:nvGrpSpPr>
+        <p:cNvPr id="1" name=""/>
+        <p:cNvGrpSpPr/>
+        <p:nvPr/>
+      </p:nvGrpSpPr>
+      <p:grpSpPr>
+        <a:xfrm>
+          <a:off x="0" y="0"/>
+          <a:ext cx="0" cy="0"/>
+          <a:chOff x="0" y="0"/>
+          <a:chExt cx="0" cy="0"/>
+        </a:xfrm>
+      </p:grpSpPr>
+      <p:sp>
+        <p:nvSpPr>
+          <p:cNvPr id="2" name="Title 1">
+            <a:extLst>
+              <a:ext uri="{FF2B5EF4-FFF2-40B4-BE49-F238E27FC236}">
+                <a16:creationId xmlns:a16="http://schemas.microsoft.com/office/drawing/2014/main" id="{C482BD4D-22C8-8E50-A46A-5363D5D98B74}"/>
+              </a:ext>
+            </a:extLst>
+          </p:cNvPr>
+          <p:cNvSpPr>
+            <a:spLocks noGrp="1"/>
+          </p:cNvSpPr>
+          <p:nvPr>
+            <p:ph type="title"/>
+          </p:nvPr>
+        </p:nvSpPr>
+        <p:spPr/>
+        <p:txBody>
+          <a:bodyPr/>
+          <a:lstStyle/>
+          <a:p>
+            <a:r>
+              <a:rPr lang="en-US" dirty="0"/>
+              <a:t>CONTD</a:t>
+            </a:r>
+            <a:endParaRPr lang="en-IN" dirty="0"/>
+          </a:p>
+        </p:txBody>
+      </p:sp>
+      <p:sp>
+        <p:nvSpPr>
+          <p:cNvPr id="3" name="Content Placeholder 2">
+            <a:extLst>
+              <a:ext uri="{FF2B5EF4-FFF2-40B4-BE49-F238E27FC236}">
+                <a16:creationId xmlns:a16="http://schemas.microsoft.com/office/drawing/2014/main" id="{CFA808AE-21E1-94E8-3318-5DCA3950C897}"/>
+              </a:ext>
+            </a:extLst>
+          </p:cNvPr>
+          <p:cNvSpPr>
+            <a:spLocks noGrp="1"/>
+          </p:cNvSpPr>
+          <p:nvPr>
+            <p:ph idx="1"/>
+          </p:nvPr>
+        </p:nvSpPr>
+        <p:spPr/>
+        <p:txBody>
+          <a:bodyPr/>
+          <a:lstStyle/>
+          <a:p>
+            <a:r>
+              <a:rPr lang="en-US" b="1" dirty="0"/>
+              <a:t>Fill Missing Values</a:t>
+            </a:r>
+          </a:p>
+          <a:p>
+            <a:r>
+              <a:rPr lang="en-US" dirty="0"/>
+              <a:t>Using:</a:t>
+            </a:r>
+          </a:p>
+          <a:p>
+            <a:pPr lvl="1"/>
+            <a:r>
+              <a:rPr lang="en-US" dirty="0"/>
+              <a:t>Historical averages </a:t>
+            </a:r>
+          </a:p>
+          <a:p>
+            <a:pPr lvl="1"/>
+            <a:r>
+              <a:rPr lang="en-US" dirty="0"/>
+              <a:t>ML prediction </a:t>
+            </a:r>
+          </a:p>
+          <a:p>
+            <a:pPr lvl="1"/>
+            <a:r>
+              <a:rPr lang="en-US" dirty="0"/>
+              <a:t>Default business logic </a:t>
+            </a:r>
+          </a:p>
+          <a:p>
+            <a:r>
+              <a:rPr lang="en-US" b="1" dirty="0"/>
+              <a:t>Reprocess Failed Records</a:t>
+            </a:r>
+          </a:p>
+          <a:p>
+            <a:r>
+              <a:rPr lang="en-US" dirty="0"/>
+              <a:t>Once fixed:</a:t>
+            </a:r>
+          </a:p>
+          <a:p>
+            <a:pPr lvl="1"/>
+            <a:r>
+              <a:rPr lang="en-US" dirty="0"/>
+              <a:t>Pipeline reruns automatically </a:t>
+            </a:r>
+          </a:p>
+          <a:p>
+            <a:r>
+              <a:rPr lang="en-US" dirty="0"/>
+              <a:t>This reduces operational effort.</a:t>
+            </a:r>
+            <a:endParaRPr lang="en-IN" dirty="0"/>
+          </a:p>
+        </p:txBody>
+      </p:sp>
+    </p:spTree>
+    <p:extLst>
+      <p:ext uri="{BB962C8B-B14F-4D97-AF65-F5344CB8AC3E}">
+        <p14:creationId xmlns:p14="http://schemas.microsoft.com/office/powerpoint/2010/main" val="2942531187"/>
+      </p:ext>
+    </p:extLst>
+  </p:cSld>
+  <p:clrMapOvr>
+    <a:masterClrMapping/>
+  </p:clrMapOvr>
+</p:sld>
+</file>
+
+<file path=ppt/slides/slide25.xml><?xml version="1.0" encoding="utf-8"?>
+<p:sld xmlns:a="http://schemas.openxmlformats.org/drawingml/2006/main" xmlns:r="http://schemas.openxmlformats.org/officeDocument/2006/relationships" xmlns:p="http://schemas.openxmlformats.org/presentationml/2006/main">
+  <p:cSld>
+    <p:spTree>
+      <p:nvGrpSpPr>
+        <p:cNvPr id="1" name=""/>
+        <p:cNvGrpSpPr/>
+        <p:nvPr/>
+      </p:nvGrpSpPr>
+      <p:grpSpPr>
+        <a:xfrm>
+          <a:off x="0" y="0"/>
+          <a:ext cx="0" cy="0"/>
+          <a:chOff x="0" y="0"/>
+          <a:chExt cx="0" cy="0"/>
+        </a:xfrm>
+      </p:grpSpPr>
+      <p:sp>
+        <p:nvSpPr>
+          <p:cNvPr id="2" name="Title 1"/>
+          <p:cNvSpPr>
+            <a:spLocks noGrp="1"/>
+          </p:cNvSpPr>
+          <p:nvPr>
+            <p:ph type="title"/>
+          </p:nvPr>
+        </p:nvSpPr>
+        <p:spPr/>
+        <p:txBody>
+          <a:bodyPr/>
+          <a:lstStyle/>
+          <a:p>
+            <a:r>
+              <a:rPr dirty="0"/>
+              <a:t>Automated Remediation</a:t>
+            </a:r>
+          </a:p>
+        </p:txBody>
+      </p:sp>
+      <p:sp>
+        <p:nvSpPr>
+          <p:cNvPr id="3" name="Content Placeholder 2"/>
+          <p:cNvSpPr>
+            <a:spLocks noGrp="1"/>
+          </p:cNvSpPr>
+          <p:nvPr>
+            <p:ph idx="1"/>
+          </p:nvPr>
+        </p:nvSpPr>
+        <p:spPr/>
+        <p:txBody>
+          <a:bodyPr/>
+          <a:lstStyle/>
+          <a:p>
+            <a:r>
+              <a:t>Fix formatting issues</a:t>
+            </a:r>
+          </a:p>
+          <a:p>
+            <a:r>
+              <a:t>Correct mappings</a:t>
+            </a:r>
+          </a:p>
+          <a:p>
+            <a:r>
+              <a:t>Fill missing values</a:t>
+            </a:r>
+          </a:p>
+          <a:p>
+            <a:r>
+              <a:t>Reprocess failed records</a:t>
+            </a:r>
+          </a:p>
+        </p:txBody>
+      </p:sp>
+    </p:spTree>
+  </p:cSld>
+  <p:clrMapOvr>
+    <a:masterClrMapping/>
+  </p:clrMapOvr>
+</p:sld>
+</file>
+
+<file path=ppt/slides/slide26.xml><?xml version="1.0" encoding="utf-8"?>
+<p:sld xmlns:a="http://schemas.openxmlformats.org/drawingml/2006/main" xmlns:r="http://schemas.openxmlformats.org/officeDocument/2006/relationships" xmlns:p="http://schemas.openxmlformats.org/presentationml/2006/main">
+  <p:cSld>
+    <p:spTree>
+      <p:nvGrpSpPr>
+        <p:cNvPr id="1" name=""/>
+        <p:cNvGrpSpPr/>
+        <p:nvPr/>
+      </p:nvGrpSpPr>
+      <p:grpSpPr>
+        <a:xfrm>
+          <a:off x="0" y="0"/>
+          <a:ext cx="0" cy="0"/>
+          <a:chOff x="0" y="0"/>
+          <a:chExt cx="0" cy="0"/>
+        </a:xfrm>
+      </p:grpSpPr>
+      <p:sp>
+        <p:nvSpPr>
+          <p:cNvPr id="3" name="Content Placeholder 2">
+            <a:extLst>
+              <a:ext uri="{FF2B5EF4-FFF2-40B4-BE49-F238E27FC236}">
+                <a16:creationId xmlns:a16="http://schemas.microsoft.com/office/drawing/2014/main" id="{BA4FD353-7D0C-803C-9C65-4261EE895043}"/>
+              </a:ext>
+            </a:extLst>
+          </p:cNvPr>
+          <p:cNvSpPr>
+            <a:spLocks noGrp="1"/>
+          </p:cNvSpPr>
+          <p:nvPr>
+            <p:ph idx="1"/>
+          </p:nvPr>
+        </p:nvSpPr>
+        <p:spPr/>
+        <p:txBody>
+          <a:bodyPr/>
+          <a:lstStyle/>
+          <a:p>
+            <a:pPr algn="ctr"/>
+            <a:endParaRPr lang="en-US" sz="4000" dirty="0"/>
+          </a:p>
+          <a:p>
+            <a:pPr algn="ctr"/>
+            <a:endParaRPr lang="en-US" sz="4000" dirty="0"/>
+          </a:p>
+          <a:p>
+            <a:pPr algn="ctr"/>
+            <a:r>
+              <a:rPr lang="en-US" sz="4000" dirty="0"/>
+              <a:t>COMPLETE LAB-6,7,8</a:t>
+            </a:r>
+            <a:endParaRPr lang="en-IN" dirty="0"/>
+          </a:p>
+        </p:txBody>
+      </p:sp>
+    </p:spTree>
+    <p:extLst>
+      <p:ext uri="{BB962C8B-B14F-4D97-AF65-F5344CB8AC3E}">
+        <p14:creationId xmlns:p14="http://schemas.microsoft.com/office/powerpoint/2010/main" val="955051030"/>
+      </p:ext>
+    </p:extLst>
+  </p:cSld>
+  <p:clrMapOvr>
+    <a:masterClrMapping/>
+  </p:clrMapOvr>
+</p:sld>
+</file>
+
+<file path=ppt/slides/slide27.xml><?xml version="1.0" encoding="utf-8"?>
+<p:sld xmlns:a="http://schemas.openxmlformats.org/drawingml/2006/main" xmlns:r="http://schemas.openxmlformats.org/officeDocument/2006/relationships" xmlns:p="http://schemas.openxmlformats.org/presentationml/2006/main">
+  <p:cSld>
+    <p:spTree>
+      <p:nvGrpSpPr>
+        <p:cNvPr id="1" name=""/>
+        <p:cNvGrpSpPr/>
+        <p:nvPr/>
+      </p:nvGrpSpPr>
+      <p:grpSpPr>
+        <a:xfrm>
+          <a:off x="0" y="0"/>
+          <a:ext cx="0" cy="0"/>
+          <a:chOff x="0" y="0"/>
+          <a:chExt cx="0" cy="0"/>
+        </a:xfrm>
+      </p:grpSpPr>
+      <p:sp>
+        <p:nvSpPr>
+          <p:cNvPr id="2" name="Title 1"/>
+          <p:cNvSpPr>
+            <a:spLocks noGrp="1"/>
+          </p:cNvSpPr>
+          <p:nvPr>
+            <p:ph type="title"/>
+          </p:nvPr>
+        </p:nvSpPr>
+        <p:spPr/>
+        <p:txBody>
+          <a:bodyPr/>
+          <a:lstStyle/>
+          <a:p>
+            <a:r>
+              <a:t>PII Detection and Classification</a:t>
+            </a:r>
+          </a:p>
+        </p:txBody>
+      </p:sp>
+      <p:sp>
+        <p:nvSpPr>
+          <p:cNvPr id="3" name="Content Placeholder 2"/>
+          <p:cNvSpPr>
+            <a:spLocks noGrp="1"/>
+          </p:cNvSpPr>
+          <p:nvPr>
+            <p:ph idx="1"/>
+          </p:nvPr>
+        </p:nvSpPr>
+        <p:spPr/>
+        <p:txBody>
+          <a:bodyPr>
+            <a:normAutofit/>
+          </a:bodyPr>
+          <a:lstStyle/>
+          <a:p>
+            <a:r>
+              <a:rPr lang="en-IN" dirty="0"/>
+              <a:t>Critical for governance.</a:t>
+            </a:r>
+            <a:endParaRPr lang="en-US" dirty="0"/>
+          </a:p>
+          <a:p>
+            <a:r>
+              <a:rPr dirty="0"/>
+              <a:t>Detect emails and phone numbers</a:t>
+            </a:r>
+            <a:endParaRPr lang="en-US" dirty="0"/>
+          </a:p>
+          <a:p>
+            <a:r>
+              <a:rPr lang="it-IT" dirty="0"/>
+              <a:t>Using:</a:t>
+            </a:r>
+          </a:p>
+          <a:p>
+            <a:pPr lvl="1"/>
+            <a:r>
+              <a:rPr lang="it-IT" dirty="0"/>
+              <a:t>Regex </a:t>
+            </a:r>
+          </a:p>
+          <a:p>
+            <a:pPr lvl="1"/>
+            <a:r>
+              <a:rPr lang="it-IT" dirty="0"/>
+              <a:t>NLP </a:t>
+            </a:r>
+          </a:p>
+          <a:p>
+            <a:pPr lvl="1"/>
+            <a:r>
+              <a:rPr lang="it-IT" dirty="0"/>
+              <a:t>AI classification</a:t>
+            </a:r>
+            <a:endParaRPr dirty="0"/>
+          </a:p>
+          <a:p>
+            <a:r>
+              <a:rPr dirty="0"/>
+              <a:t>Identify sensitive financial data</a:t>
+            </a:r>
+            <a:endParaRPr lang="en-US" dirty="0"/>
+          </a:p>
+          <a:p>
+            <a:r>
+              <a:rPr lang="en-US" dirty="0"/>
+              <a:t>Examples:</a:t>
+            </a:r>
+          </a:p>
+          <a:p>
+            <a:pPr lvl="1"/>
+            <a:r>
+              <a:rPr lang="en-US" dirty="0"/>
+              <a:t>Credit card numbers </a:t>
+            </a:r>
+          </a:p>
+          <a:p>
+            <a:pPr lvl="1"/>
+            <a:r>
+              <a:rPr lang="en-US" dirty="0"/>
+              <a:t>PAN </a:t>
+            </a:r>
+          </a:p>
+          <a:p>
+            <a:pPr lvl="1"/>
+            <a:r>
+              <a:rPr lang="en-US" dirty="0"/>
+              <a:t>Bank account details</a:t>
+            </a:r>
+            <a:endParaRPr dirty="0"/>
+          </a:p>
+          <a:p>
+            <a:endParaRPr dirty="0"/>
+          </a:p>
+        </p:txBody>
+      </p:sp>
+    </p:spTree>
+  </p:cSld>
+  <p:clrMapOvr>
+    <a:masterClrMapping/>
+  </p:clrMapOvr>
+</p:sld>
+</file>
+
+<file path=ppt/slides/slide28.xml><?xml version="1.0" encoding="utf-8"?>
+<p:sld xmlns:a="http://schemas.openxmlformats.org/drawingml/2006/main" xmlns:r="http://schemas.openxmlformats.org/officeDocument/2006/relationships" xmlns:p="http://schemas.openxmlformats.org/presentationml/2006/main">
+  <p:cSld>
+    <p:spTree>
+      <p:nvGrpSpPr>
+        <p:cNvPr id="1" name=""/>
+        <p:cNvGrpSpPr/>
+        <p:nvPr/>
+      </p:nvGrpSpPr>
+      <p:grpSpPr>
+        <a:xfrm>
+          <a:off x="0" y="0"/>
+          <a:ext cx="0" cy="0"/>
+          <a:chOff x="0" y="0"/>
+          <a:chExt cx="0" cy="0"/>
+        </a:xfrm>
+      </p:grpSpPr>
+      <p:sp>
+        <p:nvSpPr>
+          <p:cNvPr id="2" name="Title 1">
+            <a:extLst>
+              <a:ext uri="{FF2B5EF4-FFF2-40B4-BE49-F238E27FC236}">
+                <a16:creationId xmlns:a16="http://schemas.microsoft.com/office/drawing/2014/main" id="{5732AF8C-CA18-16C0-B5DE-EE3C13622469}"/>
+              </a:ext>
+            </a:extLst>
+          </p:cNvPr>
+          <p:cNvSpPr>
+            <a:spLocks noGrp="1"/>
+          </p:cNvSpPr>
+          <p:nvPr>
+            <p:ph type="title"/>
+          </p:nvPr>
+        </p:nvSpPr>
+        <p:spPr/>
+        <p:txBody>
+          <a:bodyPr/>
+          <a:lstStyle/>
+          <a:p>
+            <a:r>
+              <a:rPr lang="en-US" dirty="0"/>
+              <a:t>CONTD</a:t>
+            </a:r>
+            <a:endParaRPr lang="en-IN" dirty="0"/>
+          </a:p>
+        </p:txBody>
+      </p:sp>
+      <p:sp>
+        <p:nvSpPr>
+          <p:cNvPr id="3" name="Content Placeholder 2">
+            <a:extLst>
+              <a:ext uri="{FF2B5EF4-FFF2-40B4-BE49-F238E27FC236}">
+                <a16:creationId xmlns:a16="http://schemas.microsoft.com/office/drawing/2014/main" id="{6C8445FA-5B8F-DD64-F68E-D368C9B9565D}"/>
+              </a:ext>
+            </a:extLst>
+          </p:cNvPr>
+          <p:cNvSpPr>
+            <a:spLocks noGrp="1"/>
+          </p:cNvSpPr>
+          <p:nvPr>
+            <p:ph idx="1"/>
+          </p:nvPr>
+        </p:nvSpPr>
+        <p:spPr/>
+        <p:txBody>
+          <a:bodyPr>
+            <a:normAutofit fontScale="85000" lnSpcReduction="20000"/>
+          </a:bodyPr>
+          <a:lstStyle/>
+          <a:p>
+            <a:r>
+              <a:rPr lang="en-US" dirty="0"/>
+              <a:t>Classify healthcare information</a:t>
+            </a:r>
+          </a:p>
+          <a:p>
+            <a:r>
+              <a:rPr lang="en-IN" dirty="0"/>
+              <a:t>Detect:</a:t>
+            </a:r>
+          </a:p>
+          <a:p>
+            <a:pPr lvl="1"/>
+            <a:r>
+              <a:rPr lang="en-IN" dirty="0"/>
+              <a:t>Patient IDs </a:t>
+            </a:r>
+          </a:p>
+          <a:p>
+            <a:pPr lvl="1"/>
+            <a:r>
+              <a:rPr lang="en-IN" dirty="0"/>
+              <a:t>Diagnoses </a:t>
+            </a:r>
+          </a:p>
+          <a:p>
+            <a:pPr lvl="1"/>
+            <a:r>
+              <a:rPr lang="en-IN" dirty="0"/>
+              <a:t>Medical history </a:t>
+            </a:r>
+          </a:p>
+          <a:p>
+            <a:pPr lvl="1"/>
+            <a:r>
+              <a:rPr lang="en-IN" dirty="0"/>
+              <a:t>Important for HIPAA compliance.</a:t>
+            </a:r>
+            <a:endParaRPr lang="en-US" dirty="0"/>
+          </a:p>
+          <a:p>
+            <a:r>
+              <a:rPr lang="en-US" dirty="0"/>
+              <a:t>Apply governance labels</a:t>
+            </a:r>
+          </a:p>
+          <a:p>
+            <a:r>
+              <a:rPr lang="en-US" dirty="0"/>
+              <a:t>AI automatically tags:</a:t>
+            </a:r>
+          </a:p>
+          <a:p>
+            <a:pPr lvl="1"/>
+            <a:r>
+              <a:rPr lang="en-US" dirty="0"/>
+              <a:t>Confidential </a:t>
+            </a:r>
+          </a:p>
+          <a:p>
+            <a:pPr lvl="1"/>
+            <a:r>
+              <a:rPr lang="en-US" dirty="0"/>
+              <a:t>Restricted </a:t>
+            </a:r>
+          </a:p>
+          <a:p>
+            <a:pPr lvl="1"/>
+            <a:r>
+              <a:rPr lang="en-US" dirty="0"/>
+              <a:t>Public </a:t>
+            </a:r>
+          </a:p>
+          <a:p>
+            <a:r>
+              <a:rPr lang="en-US" dirty="0"/>
+              <a:t>Useful in:</a:t>
+            </a:r>
+          </a:p>
+          <a:p>
+            <a:pPr lvl="1"/>
+            <a:r>
+              <a:rPr lang="en-US" dirty="0"/>
+              <a:t>Microsoft Purview </a:t>
+            </a:r>
+          </a:p>
+          <a:p>
+            <a:pPr lvl="1"/>
+            <a:r>
+              <a:rPr lang="en-US" dirty="0"/>
+              <a:t>Unity Catalog </a:t>
+            </a:r>
+          </a:p>
+          <a:p>
+            <a:pPr lvl="1"/>
+            <a:r>
+              <a:rPr lang="en-US" dirty="0"/>
+              <a:t>Data catalogs </a:t>
+            </a:r>
+          </a:p>
+          <a:p>
+            <a:endParaRPr lang="en-IN" dirty="0"/>
+          </a:p>
+        </p:txBody>
+      </p:sp>
+    </p:spTree>
+    <p:extLst>
+      <p:ext uri="{BB962C8B-B14F-4D97-AF65-F5344CB8AC3E}">
+        <p14:creationId xmlns:p14="http://schemas.microsoft.com/office/powerpoint/2010/main" val="200381589"/>
+      </p:ext>
+    </p:extLst>
+  </p:cSld>
+  <p:clrMapOvr>
+    <a:masterClrMapping/>
+  </p:clrMapOvr>
+</p:sld>
+</file>
+
+<file path=ppt/slides/slide29.xml><?xml version="1.0" encoding="utf-8"?>
+<p:sld xmlns:a="http://schemas.openxmlformats.org/drawingml/2006/main" xmlns:r="http://schemas.openxmlformats.org/officeDocument/2006/relationships" xmlns:p="http://schemas.openxmlformats.org/presentationml/2006/main">
+  <p:cSld>
+    <p:spTree>
+      <p:nvGrpSpPr>
+        <p:cNvPr id="1" name=""/>
+        <p:cNvGrpSpPr/>
+        <p:nvPr/>
+      </p:nvGrpSpPr>
+      <p:grpSpPr>
+        <a:xfrm>
+          <a:off x="0" y="0"/>
+          <a:ext cx="0" cy="0"/>
+          <a:chOff x="0" y="0"/>
+          <a:chExt cx="0" cy="0"/>
+        </a:xfrm>
+      </p:grpSpPr>
+      <p:sp>
+        <p:nvSpPr>
+          <p:cNvPr id="3" name="Content Placeholder 2">
+            <a:extLst>
+              <a:ext uri="{FF2B5EF4-FFF2-40B4-BE49-F238E27FC236}">
+                <a16:creationId xmlns:a16="http://schemas.microsoft.com/office/drawing/2014/main" id="{E8F05E00-52A0-CAD5-CF7A-E29A7C337B57}"/>
+              </a:ext>
+            </a:extLst>
+          </p:cNvPr>
+          <p:cNvSpPr>
+            <a:spLocks noGrp="1"/>
+          </p:cNvSpPr>
+          <p:nvPr>
+            <p:ph idx="1"/>
+          </p:nvPr>
+        </p:nvSpPr>
+        <p:spPr/>
+        <p:txBody>
+          <a:bodyPr/>
+          <a:lstStyle/>
+          <a:p>
+            <a:endParaRPr lang="en-US" dirty="0"/>
+          </a:p>
+          <a:p>
+            <a:endParaRPr lang="en-US" dirty="0"/>
+          </a:p>
+          <a:p>
+            <a:endParaRPr lang="en-US" dirty="0"/>
+          </a:p>
+          <a:p>
+            <a:pPr algn="ctr"/>
+            <a:r>
+              <a:rPr lang="en-US" sz="4400" dirty="0"/>
+              <a:t>PERFORM LAB-9</a:t>
+            </a:r>
+            <a:endParaRPr lang="en-IN" dirty="0"/>
+          </a:p>
+        </p:txBody>
+      </p:sp>
+    </p:spTree>
+    <p:extLst>
+      <p:ext uri="{BB962C8B-B14F-4D97-AF65-F5344CB8AC3E}">
+        <p14:creationId xmlns:p14="http://schemas.microsoft.com/office/powerpoint/2010/main" val="4165980489"/>
+      </p:ext>
+    </p:extLst>
+  </p:cSld>
+  <p:clrMapOvr>
+    <a:masterClrMapping/>
+  </p:clrMapOvr>
+</p:sld>
+</file>
+
 <file path=ppt/slides/slide3.xml><?xml version="1.0" encoding="utf-8"?>
 <p:sld xmlns:a="http://schemas.openxmlformats.org/drawingml/2006/main" xmlns:r="http://schemas.openxmlformats.org/officeDocument/2006/relationships" xmlns:p="http://schemas.openxmlformats.org/presentationml/2006/main">
   <p:cSld>
@@ -17265,26 +19082,38 @@
           <a:lstStyle/>
           <a:p>
             <a:r>
+              <a:rPr lang="en-IN" b="1" dirty="0"/>
+              <a:t>Components</a:t>
+            </a:r>
+            <a:endParaRPr lang="en-US" b="1" dirty="0"/>
+          </a:p>
+          <a:p>
+            <a:r>
+              <a:rPr dirty="0"/>
               <a:t>Schema detection</a:t>
             </a:r>
           </a:p>
           <a:p>
             <a:r>
+              <a:rPr dirty="0"/>
               <a:t>Data ingestion</a:t>
             </a:r>
           </a:p>
           <a:p>
             <a:r>
+              <a:rPr dirty="0"/>
               <a:t>Validation</a:t>
             </a:r>
           </a:p>
           <a:p>
             <a:r>
+              <a:rPr dirty="0"/>
               <a:t>Quarantine handling</a:t>
             </a:r>
           </a:p>
           <a:p>
             <a:r>
+              <a:rPr dirty="0"/>
               <a:t>Automated remediation</a:t>
             </a:r>
           </a:p>
@@ -17298,7 +19127,7 @@
 </p:sld>
 </file>
 
-<file path=ppt/slides/slide4.xml><?xml version="1.0" encoding="utf-8"?>
+<file path=ppt/slides/slide30.xml><?xml version="1.0" encoding="utf-8"?>
 <p:sld xmlns:a="http://schemas.openxmlformats.org/drawingml/2006/main" xmlns:r="http://schemas.openxmlformats.org/officeDocument/2006/relationships" xmlns:p="http://schemas.openxmlformats.org/presentationml/2006/main">
   <p:cSld>
     <p:spTree>
@@ -17331,7 +19160,7 @@
           <a:lstStyle/>
           <a:p>
             <a:r>
-              <a:t>Schema Detection Engine</a:t>
+              <a:t>Self-Healing Pipeline Overview</a:t>
             </a:r>
           </a:p>
         </p:txBody>
@@ -17346,29 +19175,127 @@
             <p:ph idx="1"/>
           </p:nvPr>
         </p:nvSpPr>
-        <p:spPr/>
+        <p:spPr>
+          <a:xfrm>
+            <a:off x="768096" y="2285999"/>
+            <a:ext cx="7290055" cy="4371975"/>
+          </a:xfrm>
+        </p:spPr>
         <p:txBody>
-          <a:bodyPr/>
+          <a:bodyPr>
+            <a:normAutofit fontScale="92500" lnSpcReduction="20000"/>
+          </a:bodyPr>
           <a:lstStyle/>
           <a:p>
             <a:r>
-              <a:t>Automatically detect columns and data types</a:t>
-            </a:r>
-          </a:p>
-          <a:p>
-            <a:r>
-              <a:t>Handle structured and semi-structured data</a:t>
-            </a:r>
-          </a:p>
-          <a:p>
-            <a:r>
-              <a:t>Detect schema drift</a:t>
-            </a:r>
-          </a:p>
-          <a:p>
-            <a:r>
-              <a:t>Support CSV, JSON, Parquet and Avro</a:t>
-            </a:r>
+              <a:rPr lang="en-IN" dirty="0"/>
+              <a:t>Workflow:</a:t>
+            </a:r>
+            <a:endParaRPr lang="en-US" dirty="0"/>
+          </a:p>
+          <a:p>
+            <a:r>
+              <a:rPr dirty="0"/>
+              <a:t>Detect failures</a:t>
+            </a:r>
+            <a:endParaRPr lang="en-US" dirty="0"/>
+          </a:p>
+          <a:p>
+            <a:pPr lvl="1"/>
+            <a:r>
+              <a:rPr lang="en-IN" dirty="0"/>
+              <a:t>Pipeline crashes or validation fails.</a:t>
+            </a:r>
+            <a:endParaRPr dirty="0"/>
+          </a:p>
+          <a:p>
+            <a:r>
+              <a:rPr dirty="0"/>
+              <a:t>Diagnose issues</a:t>
+            </a:r>
+            <a:endParaRPr lang="en-US" dirty="0"/>
+          </a:p>
+          <a:p>
+            <a:pPr lvl="1"/>
+            <a:r>
+              <a:rPr lang="en-US" dirty="0"/>
+              <a:t>AI identifies:</a:t>
+            </a:r>
+          </a:p>
+          <a:p>
+            <a:pPr lvl="2"/>
+            <a:r>
+              <a:rPr lang="en-US" dirty="0"/>
+              <a:t>Root cause </a:t>
+            </a:r>
+          </a:p>
+          <a:p>
+            <a:pPr lvl="2"/>
+            <a:r>
+              <a:rPr lang="en-US" dirty="0"/>
+              <a:t>Impact </a:t>
+            </a:r>
+          </a:p>
+          <a:p>
+            <a:pPr lvl="2"/>
+            <a:r>
+              <a:rPr lang="en-US" dirty="0"/>
+              <a:t>Severity</a:t>
+            </a:r>
+            <a:endParaRPr dirty="0"/>
+          </a:p>
+          <a:p>
+            <a:r>
+              <a:rPr dirty="0"/>
+              <a:t>Apply fixes</a:t>
+            </a:r>
+            <a:endParaRPr lang="en-US" dirty="0"/>
+          </a:p>
+          <a:p>
+            <a:pPr lvl="1"/>
+            <a:r>
+              <a:rPr lang="en-IN" dirty="0"/>
+              <a:t>AI attempts repair automatically.</a:t>
+            </a:r>
+            <a:endParaRPr dirty="0"/>
+          </a:p>
+          <a:p>
+            <a:r>
+              <a:rPr dirty="0"/>
+              <a:t>Re-run pipelines</a:t>
+            </a:r>
+            <a:endParaRPr lang="en-US" dirty="0"/>
+          </a:p>
+          <a:p>
+            <a:pPr lvl="1"/>
+            <a:r>
+              <a:rPr lang="en-IN" dirty="0"/>
+              <a:t>Pipeline restarts after correction.</a:t>
+            </a:r>
+          </a:p>
+          <a:p>
+            <a:r>
+              <a:rPr dirty="0"/>
+              <a:t>Generate alerts</a:t>
+            </a:r>
+            <a:endParaRPr lang="en-US" dirty="0"/>
+          </a:p>
+          <a:p>
+            <a:pPr lvl="1"/>
+            <a:r>
+              <a:rPr lang="en-US" dirty="0"/>
+              <a:t>Only escalate when unresolved.</a:t>
+            </a:r>
+          </a:p>
+          <a:p>
+            <a:pPr lvl="1"/>
+            <a:r>
+              <a:rPr lang="en-US" dirty="0"/>
+              <a:t>This dramatically reduces downtime.</a:t>
+            </a:r>
+          </a:p>
+          <a:p>
+            <a:endParaRPr dirty="0"/>
           </a:p>
         </p:txBody>
       </p:sp>
@@ -17380,7 +19307,7 @@
 </p:sld>
 </file>
 
-<file path=ppt/slides/slide5.xml><?xml version="1.0" encoding="utf-8"?>
+<file path=ppt/slides/slide31.xml><?xml version="1.0" encoding="utf-8"?>
 <p:sld xmlns:a="http://schemas.openxmlformats.org/drawingml/2006/main" xmlns:r="http://schemas.openxmlformats.org/officeDocument/2006/relationships" xmlns:p="http://schemas.openxmlformats.org/presentationml/2006/main">
   <p:cSld>
     <p:spTree>
@@ -17413,7 +19340,7 @@
           <a:lstStyle/>
           <a:p>
             <a:r>
-              <a:t>AI-Driven Data Quality</a:t>
+              <a:t>AI Diagnosis Engine</a:t>
             </a:r>
           </a:p>
         </p:txBody>
@@ -17430,27 +19357,91 @@
         </p:nvSpPr>
         <p:spPr/>
         <p:txBody>
-          <a:bodyPr/>
+          <a:bodyPr>
+            <a:normAutofit/>
+          </a:bodyPr>
           <a:lstStyle/>
           <a:p>
             <a:r>
-              <a:t>Dynamic rule generation</a:t>
-            </a:r>
-          </a:p>
-          <a:p>
-            <a:r>
-              <a:t>Metadata-aware validation</a:t>
-            </a:r>
-          </a:p>
-          <a:p>
-            <a:r>
-              <a:t>Historical pattern analysis</a:t>
-            </a:r>
-          </a:p>
-          <a:p>
-            <a:r>
-              <a:t>Automated expectation generation</a:t>
-            </a:r>
+              <a:rPr lang="en-US" dirty="0"/>
+              <a:t>This is the “brain” of self-healing systems.</a:t>
+            </a:r>
+          </a:p>
+          <a:p>
+            <a:endParaRPr lang="en-IN" dirty="0"/>
+          </a:p>
+          <a:p>
+            <a:r>
+              <a:rPr dirty="0"/>
+              <a:t>Analyze root causes</a:t>
+            </a:r>
+            <a:endParaRPr lang="en-US" dirty="0"/>
+          </a:p>
+          <a:p>
+            <a:pPr lvl="1"/>
+            <a:r>
+              <a:rPr lang="en-IN" dirty="0"/>
+              <a:t>AI studies:</a:t>
+            </a:r>
+          </a:p>
+          <a:p>
+            <a:pPr lvl="2"/>
+            <a:r>
+              <a:rPr lang="en-IN" dirty="0"/>
+              <a:t>Logs </a:t>
+            </a:r>
+          </a:p>
+          <a:p>
+            <a:pPr lvl="2"/>
+            <a:r>
+              <a:rPr lang="en-IN" dirty="0"/>
+              <a:t>Errors </a:t>
+            </a:r>
+          </a:p>
+          <a:p>
+            <a:pPr lvl="2"/>
+            <a:r>
+              <a:rPr lang="en-IN" dirty="0"/>
+              <a:t>Metadata </a:t>
+            </a:r>
+          </a:p>
+          <a:p>
+            <a:pPr lvl="2"/>
+            <a:r>
+              <a:rPr lang="en-IN" dirty="0"/>
+              <a:t>Historical incidents</a:t>
+            </a:r>
+            <a:endParaRPr dirty="0"/>
+          </a:p>
+          <a:p>
+            <a:r>
+              <a:rPr dirty="0"/>
+              <a:t>Summarize incidents</a:t>
+            </a:r>
+            <a:endParaRPr lang="en-US" dirty="0"/>
+          </a:p>
+          <a:p>
+            <a:r>
+              <a:rPr lang="en-US" dirty="0"/>
+              <a:t>Example:</a:t>
+            </a:r>
+          </a:p>
+          <a:p>
+            <a:r>
+              <a:rPr lang="en-US" dirty="0"/>
+              <a:t>Failure caused by schema mismatch in </a:t>
+            </a:r>
+            <a:r>
+              <a:rPr lang="en-US" dirty="0" err="1"/>
+              <a:t>customer_id</a:t>
+            </a:r>
+            <a:r>
+              <a:rPr lang="en-US" dirty="0"/>
+              <a:t> column.</a:t>
+            </a:r>
+          </a:p>
+          <a:p>
+            <a:endParaRPr dirty="0"/>
           </a:p>
         </p:txBody>
       </p:sp>
@@ -17462,7 +19453,209 @@
 </p:sld>
 </file>
 
-<file path=ppt/slides/slide6.xml><?xml version="1.0" encoding="utf-8"?>
+<file path=ppt/slides/slide32.xml><?xml version="1.0" encoding="utf-8"?>
+<p:sld xmlns:a="http://schemas.openxmlformats.org/drawingml/2006/main" xmlns:r="http://schemas.openxmlformats.org/officeDocument/2006/relationships" xmlns:p="http://schemas.openxmlformats.org/presentationml/2006/main">
+  <p:cSld>
+    <p:spTree>
+      <p:nvGrpSpPr>
+        <p:cNvPr id="1" name=""/>
+        <p:cNvGrpSpPr/>
+        <p:nvPr/>
+      </p:nvGrpSpPr>
+      <p:grpSpPr>
+        <a:xfrm>
+          <a:off x="0" y="0"/>
+          <a:ext cx="0" cy="0"/>
+          <a:chOff x="0" y="0"/>
+          <a:chExt cx="0" cy="0"/>
+        </a:xfrm>
+      </p:grpSpPr>
+      <p:sp>
+        <p:nvSpPr>
+          <p:cNvPr id="2" name="Title 1">
+            <a:extLst>
+              <a:ext uri="{FF2B5EF4-FFF2-40B4-BE49-F238E27FC236}">
+                <a16:creationId xmlns:a16="http://schemas.microsoft.com/office/drawing/2014/main" id="{61B3ED66-8B3E-E06E-BFBE-8D4191159E3E}"/>
+              </a:ext>
+            </a:extLst>
+          </p:cNvPr>
+          <p:cNvSpPr>
+            <a:spLocks noGrp="1"/>
+          </p:cNvSpPr>
+          <p:nvPr>
+            <p:ph type="title"/>
+          </p:nvPr>
+        </p:nvSpPr>
+        <p:spPr/>
+        <p:txBody>
+          <a:bodyPr/>
+          <a:lstStyle/>
+          <a:p>
+            <a:r>
+              <a:rPr lang="en-US" dirty="0"/>
+              <a:t>CONTD</a:t>
+            </a:r>
+            <a:endParaRPr lang="en-IN" dirty="0"/>
+          </a:p>
+        </p:txBody>
+      </p:sp>
+      <p:sp>
+        <p:nvSpPr>
+          <p:cNvPr id="3" name="Content Placeholder 2">
+            <a:extLst>
+              <a:ext uri="{FF2B5EF4-FFF2-40B4-BE49-F238E27FC236}">
+                <a16:creationId xmlns:a16="http://schemas.microsoft.com/office/drawing/2014/main" id="{96726424-6020-7395-DEBD-224539925777}"/>
+              </a:ext>
+            </a:extLst>
+          </p:cNvPr>
+          <p:cNvSpPr>
+            <a:spLocks noGrp="1"/>
+          </p:cNvSpPr>
+          <p:nvPr>
+            <p:ph idx="1"/>
+          </p:nvPr>
+        </p:nvSpPr>
+        <p:spPr/>
+        <p:txBody>
+          <a:bodyPr/>
+          <a:lstStyle/>
+          <a:p>
+            <a:endParaRPr lang="en-IN" dirty="0"/>
+          </a:p>
+          <a:p>
+            <a:r>
+              <a:rPr lang="en-IN" dirty="0"/>
+              <a:t>Recommend remediation</a:t>
+            </a:r>
+          </a:p>
+          <a:p>
+            <a:pPr lvl="1"/>
+            <a:r>
+              <a:rPr lang="en-US" dirty="0"/>
+              <a:t>AI suggests:</a:t>
+            </a:r>
+          </a:p>
+          <a:p>
+            <a:pPr lvl="2"/>
+            <a:r>
+              <a:rPr lang="en-US" dirty="0"/>
+              <a:t>Type conversion </a:t>
+            </a:r>
+          </a:p>
+          <a:p>
+            <a:pPr lvl="2"/>
+            <a:r>
+              <a:rPr lang="en-US" dirty="0"/>
+              <a:t>Retry </a:t>
+            </a:r>
+          </a:p>
+          <a:p>
+            <a:pPr lvl="2"/>
+            <a:r>
+              <a:rPr lang="en-US" dirty="0"/>
+              <a:t>Resource scaling </a:t>
+            </a:r>
+            <a:endParaRPr lang="en-IN" dirty="0"/>
+          </a:p>
+          <a:p>
+            <a:r>
+              <a:rPr lang="en-IN" dirty="0"/>
+              <a:t>Prioritize failures</a:t>
+            </a:r>
+          </a:p>
+          <a:p>
+            <a:r>
+              <a:rPr lang="en-US" dirty="0"/>
+              <a:t>Critical pipelines receive higher priority.</a:t>
+            </a:r>
+            <a:endParaRPr lang="en-IN" dirty="0"/>
+          </a:p>
+        </p:txBody>
+      </p:sp>
+    </p:spTree>
+    <p:extLst>
+      <p:ext uri="{BB962C8B-B14F-4D97-AF65-F5344CB8AC3E}">
+        <p14:creationId xmlns:p14="http://schemas.microsoft.com/office/powerpoint/2010/main" val="2693421146"/>
+      </p:ext>
+    </p:extLst>
+  </p:cSld>
+  <p:clrMapOvr>
+    <a:masterClrMapping/>
+  </p:clrMapOvr>
+</p:sld>
+</file>
+
+<file path=ppt/slides/slide33.xml><?xml version="1.0" encoding="utf-8"?>
+<p:sld xmlns:a="http://schemas.openxmlformats.org/drawingml/2006/main" xmlns:r="http://schemas.openxmlformats.org/officeDocument/2006/relationships" xmlns:p="http://schemas.openxmlformats.org/presentationml/2006/main">
+  <p:cSld>
+    <p:spTree>
+      <p:nvGrpSpPr>
+        <p:cNvPr id="1" name=""/>
+        <p:cNvGrpSpPr/>
+        <p:nvPr/>
+      </p:nvGrpSpPr>
+      <p:grpSpPr>
+        <a:xfrm>
+          <a:off x="0" y="0"/>
+          <a:ext cx="0" cy="0"/>
+          <a:chOff x="0" y="0"/>
+          <a:chExt cx="0" cy="0"/>
+        </a:xfrm>
+      </p:grpSpPr>
+      <p:sp>
+        <p:nvSpPr>
+          <p:cNvPr id="3" name="Content Placeholder 2">
+            <a:extLst>
+              <a:ext uri="{FF2B5EF4-FFF2-40B4-BE49-F238E27FC236}">
+                <a16:creationId xmlns:a16="http://schemas.microsoft.com/office/drawing/2014/main" id="{2E851C6A-5214-E5B7-7AB4-E7F21ECE3DAE}"/>
+              </a:ext>
+            </a:extLst>
+          </p:cNvPr>
+          <p:cNvSpPr>
+            <a:spLocks noGrp="1"/>
+          </p:cNvSpPr>
+          <p:nvPr>
+            <p:ph idx="1"/>
+          </p:nvPr>
+        </p:nvSpPr>
+        <p:spPr/>
+        <p:txBody>
+          <a:bodyPr>
+            <a:normAutofit/>
+          </a:bodyPr>
+          <a:lstStyle/>
+          <a:p>
+            <a:pPr algn="ctr"/>
+            <a:endParaRPr lang="en-US" sz="3600" dirty="0"/>
+          </a:p>
+          <a:p>
+            <a:pPr algn="ctr"/>
+            <a:endParaRPr lang="en-US" sz="3600" dirty="0"/>
+          </a:p>
+          <a:p>
+            <a:pPr algn="ctr"/>
+            <a:r>
+              <a:rPr lang="en-US" sz="3600" dirty="0"/>
+              <a:t>LAB-10</a:t>
+            </a:r>
+            <a:endParaRPr lang="en-IN" sz="3600" dirty="0"/>
+          </a:p>
+        </p:txBody>
+      </p:sp>
+    </p:spTree>
+    <p:extLst>
+      <p:ext uri="{BB962C8B-B14F-4D97-AF65-F5344CB8AC3E}">
+        <p14:creationId xmlns:p14="http://schemas.microsoft.com/office/powerpoint/2010/main" val="456969570"/>
+      </p:ext>
+    </p:extLst>
+  </p:cSld>
+  <p:clrMapOvr>
+    <a:masterClrMapping/>
+  </p:clrMapOvr>
+</p:sld>
+</file>
+
+<file path=ppt/slides/slide34.xml><?xml version="1.0" encoding="utf-8"?>
 <p:sld xmlns:a="http://schemas.openxmlformats.org/drawingml/2006/main" xmlns:r="http://schemas.openxmlformats.org/officeDocument/2006/relationships" xmlns:p="http://schemas.openxmlformats.org/presentationml/2006/main">
   <p:cSld>
     <p:spTree>
@@ -17495,7 +19688,358 @@
           <a:lstStyle/>
           <a:p>
             <a:r>
-              <a:t>Great Expectations + LLM</a:t>
+              <a:t>LangGraph for Self-Healing</a:t>
+            </a:r>
+          </a:p>
+        </p:txBody>
+      </p:sp>
+      <p:sp>
+        <p:nvSpPr>
+          <p:cNvPr id="3" name="Content Placeholder 2"/>
+          <p:cNvSpPr>
+            <a:spLocks noGrp="1"/>
+          </p:cNvSpPr>
+          <p:nvPr>
+            <p:ph idx="1"/>
+          </p:nvPr>
+        </p:nvSpPr>
+        <p:spPr/>
+        <p:txBody>
+          <a:bodyPr>
+            <a:normAutofit lnSpcReduction="10000"/>
+          </a:bodyPr>
+          <a:lstStyle/>
+          <a:p>
+            <a:r>
+              <a:rPr lang="en-US" dirty="0" err="1"/>
+              <a:t>LangGraph</a:t>
+            </a:r>
+            <a:r>
+              <a:rPr lang="en-US" dirty="0"/>
+              <a:t> helps build intelligent workflows using agents.</a:t>
+            </a:r>
+          </a:p>
+          <a:p>
+            <a:endParaRPr lang="en-IN" dirty="0"/>
+          </a:p>
+          <a:p>
+            <a:r>
+              <a:rPr b="1" dirty="0"/>
+              <a:t>Stateful workflows</a:t>
+            </a:r>
+            <a:endParaRPr lang="en-US" b="1" dirty="0"/>
+          </a:p>
+          <a:p>
+            <a:r>
+              <a:rPr lang="en-US" dirty="0"/>
+              <a:t>The workflow remembers:</a:t>
+            </a:r>
+          </a:p>
+          <a:p>
+            <a:pPr lvl="1"/>
+            <a:r>
+              <a:rPr lang="en-US" dirty="0"/>
+              <a:t>Previous attempts </a:t>
+            </a:r>
+          </a:p>
+          <a:p>
+            <a:pPr lvl="1"/>
+            <a:r>
+              <a:rPr lang="en-US" dirty="0"/>
+              <a:t>Failure history </a:t>
+            </a:r>
+          </a:p>
+          <a:p>
+            <a:pPr lvl="1"/>
+            <a:r>
+              <a:rPr lang="en-US" dirty="0"/>
+              <a:t>Recovery actions</a:t>
+            </a:r>
+            <a:endParaRPr dirty="0"/>
+          </a:p>
+          <a:p>
+            <a:r>
+              <a:rPr b="1" dirty="0"/>
+              <a:t>Retry logic</a:t>
+            </a:r>
+            <a:endParaRPr lang="en-US" b="1" dirty="0"/>
+          </a:p>
+          <a:p>
+            <a:r>
+              <a:rPr lang="en-US" dirty="0"/>
+              <a:t>If failure occurs:</a:t>
+            </a:r>
+          </a:p>
+          <a:p>
+            <a:pPr lvl="1"/>
+            <a:r>
+              <a:rPr lang="en-US" dirty="0"/>
+              <a:t>Retry intelligently </a:t>
+            </a:r>
+          </a:p>
+          <a:p>
+            <a:pPr lvl="1"/>
+            <a:r>
+              <a:rPr lang="en-US" dirty="0"/>
+              <a:t>Use exponential backoff</a:t>
+            </a:r>
+            <a:endParaRPr dirty="0"/>
+          </a:p>
+          <a:p>
+            <a:endParaRPr dirty="0"/>
+          </a:p>
+        </p:txBody>
+      </p:sp>
+    </p:spTree>
+  </p:cSld>
+  <p:clrMapOvr>
+    <a:masterClrMapping/>
+  </p:clrMapOvr>
+</p:sld>
+</file>
+
+<file path=ppt/slides/slide35.xml><?xml version="1.0" encoding="utf-8"?>
+<p:sld xmlns:a="http://schemas.openxmlformats.org/drawingml/2006/main" xmlns:r="http://schemas.openxmlformats.org/officeDocument/2006/relationships" xmlns:p="http://schemas.openxmlformats.org/presentationml/2006/main">
+  <p:cSld>
+    <p:spTree>
+      <p:nvGrpSpPr>
+        <p:cNvPr id="1" name=""/>
+        <p:cNvGrpSpPr/>
+        <p:nvPr/>
+      </p:nvGrpSpPr>
+      <p:grpSpPr>
+        <a:xfrm>
+          <a:off x="0" y="0"/>
+          <a:ext cx="0" cy="0"/>
+          <a:chOff x="0" y="0"/>
+          <a:chExt cx="0" cy="0"/>
+        </a:xfrm>
+      </p:grpSpPr>
+      <p:sp>
+        <p:nvSpPr>
+          <p:cNvPr id="2" name="Title 1">
+            <a:extLst>
+              <a:ext uri="{FF2B5EF4-FFF2-40B4-BE49-F238E27FC236}">
+                <a16:creationId xmlns:a16="http://schemas.microsoft.com/office/drawing/2014/main" id="{EB0A04FC-8E48-302E-6D83-DC0DC3983FFC}"/>
+              </a:ext>
+            </a:extLst>
+          </p:cNvPr>
+          <p:cNvSpPr>
+            <a:spLocks noGrp="1"/>
+          </p:cNvSpPr>
+          <p:nvPr>
+            <p:ph type="title"/>
+          </p:nvPr>
+        </p:nvSpPr>
+        <p:spPr/>
+        <p:txBody>
+          <a:bodyPr/>
+          <a:lstStyle/>
+          <a:p>
+            <a:r>
+              <a:rPr lang="en-US" dirty="0"/>
+              <a:t>CONTD</a:t>
+            </a:r>
+            <a:endParaRPr lang="en-IN" dirty="0"/>
+          </a:p>
+        </p:txBody>
+      </p:sp>
+      <p:sp>
+        <p:nvSpPr>
+          <p:cNvPr id="3" name="Content Placeholder 2">
+            <a:extLst>
+              <a:ext uri="{FF2B5EF4-FFF2-40B4-BE49-F238E27FC236}">
+                <a16:creationId xmlns:a16="http://schemas.microsoft.com/office/drawing/2014/main" id="{2F9055BB-1CC4-1313-B0DA-2B9C17ED4850}"/>
+              </a:ext>
+            </a:extLst>
+          </p:cNvPr>
+          <p:cNvSpPr>
+            <a:spLocks noGrp="1"/>
+          </p:cNvSpPr>
+          <p:nvPr>
+            <p:ph idx="1"/>
+          </p:nvPr>
+        </p:nvSpPr>
+        <p:spPr/>
+        <p:txBody>
+          <a:bodyPr/>
+          <a:lstStyle/>
+          <a:p>
+            <a:r>
+              <a:rPr lang="en-US" b="1" dirty="0"/>
+              <a:t>Decision branching</a:t>
+            </a:r>
+          </a:p>
+          <a:p>
+            <a:r>
+              <a:rPr lang="en-US" dirty="0"/>
+              <a:t>AI chooses different paths.</a:t>
+            </a:r>
+          </a:p>
+          <a:p>
+            <a:r>
+              <a:rPr lang="en-US" dirty="0"/>
+              <a:t>Example:</a:t>
+            </a:r>
+          </a:p>
+          <a:p>
+            <a:r>
+              <a:rPr lang="en-US" dirty="0"/>
+              <a:t>If schema error → apply schema fix</a:t>
+            </a:r>
+            <a:br>
+              <a:rPr lang="en-US" dirty="0"/>
+            </a:br>
+            <a:r>
+              <a:rPr lang="en-US" dirty="0"/>
+              <a:t>Else if timeout → retry job</a:t>
+            </a:r>
+          </a:p>
+          <a:p>
+            <a:r>
+              <a:rPr lang="en-US" b="1" dirty="0"/>
+              <a:t>Persistent workflow memory</a:t>
+            </a:r>
+          </a:p>
+          <a:p>
+            <a:r>
+              <a:rPr lang="en-US" dirty="0"/>
+              <a:t>Memory enables:</a:t>
+            </a:r>
+          </a:p>
+          <a:p>
+            <a:pPr lvl="1"/>
+            <a:r>
+              <a:rPr lang="en-US" dirty="0"/>
+              <a:t>Long-running autonomous systems </a:t>
+            </a:r>
+          </a:p>
+          <a:p>
+            <a:pPr lvl="1"/>
+            <a:r>
+              <a:rPr lang="en-US" dirty="0"/>
+              <a:t>Multi-step recovery</a:t>
+            </a:r>
+          </a:p>
+        </p:txBody>
+      </p:sp>
+    </p:spTree>
+    <p:extLst>
+      <p:ext uri="{BB962C8B-B14F-4D97-AF65-F5344CB8AC3E}">
+        <p14:creationId xmlns:p14="http://schemas.microsoft.com/office/powerpoint/2010/main" val="3335942004"/>
+      </p:ext>
+    </p:extLst>
+  </p:cSld>
+  <p:clrMapOvr>
+    <a:masterClrMapping/>
+  </p:clrMapOvr>
+</p:sld>
+</file>
+
+<file path=ppt/slides/slide36.xml><?xml version="1.0" encoding="utf-8"?>
+<p:sld xmlns:a="http://schemas.openxmlformats.org/drawingml/2006/main" xmlns:r="http://schemas.openxmlformats.org/officeDocument/2006/relationships" xmlns:p="http://schemas.openxmlformats.org/presentationml/2006/main">
+  <p:cSld>
+    <p:spTree>
+      <p:nvGrpSpPr>
+        <p:cNvPr id="1" name=""/>
+        <p:cNvGrpSpPr/>
+        <p:nvPr/>
+      </p:nvGrpSpPr>
+      <p:grpSpPr>
+        <a:xfrm>
+          <a:off x="0" y="0"/>
+          <a:ext cx="0" cy="0"/>
+          <a:chOff x="0" y="0"/>
+          <a:chExt cx="0" cy="0"/>
+        </a:xfrm>
+      </p:grpSpPr>
+      <p:sp>
+        <p:nvSpPr>
+          <p:cNvPr id="3" name="Content Placeholder 2">
+            <a:extLst>
+              <a:ext uri="{FF2B5EF4-FFF2-40B4-BE49-F238E27FC236}">
+                <a16:creationId xmlns:a16="http://schemas.microsoft.com/office/drawing/2014/main" id="{5714BFD6-5BD3-75DE-D051-066026A4B3ED}"/>
+              </a:ext>
+            </a:extLst>
+          </p:cNvPr>
+          <p:cNvSpPr>
+            <a:spLocks noGrp="1"/>
+          </p:cNvSpPr>
+          <p:nvPr>
+            <p:ph idx="1"/>
+          </p:nvPr>
+        </p:nvSpPr>
+        <p:spPr/>
+        <p:txBody>
+          <a:bodyPr>
+            <a:normAutofit/>
+          </a:bodyPr>
+          <a:lstStyle/>
+          <a:p>
+            <a:pPr algn="ctr"/>
+            <a:endParaRPr lang="en-US" sz="3200" dirty="0"/>
+          </a:p>
+          <a:p>
+            <a:pPr algn="ctr"/>
+            <a:endParaRPr lang="en-US" sz="3200" dirty="0"/>
+          </a:p>
+          <a:p>
+            <a:pPr algn="ctr"/>
+            <a:r>
+              <a:rPr lang="en-US" sz="3200" dirty="0"/>
+              <a:t>PERFORM LAB-11</a:t>
+            </a:r>
+            <a:endParaRPr lang="en-IN" sz="3200" dirty="0"/>
+          </a:p>
+        </p:txBody>
+      </p:sp>
+    </p:spTree>
+    <p:extLst>
+      <p:ext uri="{BB962C8B-B14F-4D97-AF65-F5344CB8AC3E}">
+        <p14:creationId xmlns:p14="http://schemas.microsoft.com/office/powerpoint/2010/main" val="2904743537"/>
+      </p:ext>
+    </p:extLst>
+  </p:cSld>
+  <p:clrMapOvr>
+    <a:masterClrMapping/>
+  </p:clrMapOvr>
+</p:sld>
+</file>
+
+<file path=ppt/slides/slide37.xml><?xml version="1.0" encoding="utf-8"?>
+<p:sld xmlns:a="http://schemas.openxmlformats.org/drawingml/2006/main" xmlns:r="http://schemas.openxmlformats.org/officeDocument/2006/relationships" xmlns:p="http://schemas.openxmlformats.org/presentationml/2006/main">
+  <p:cSld>
+    <p:spTree>
+      <p:nvGrpSpPr>
+        <p:cNvPr id="1" name=""/>
+        <p:cNvGrpSpPr/>
+        <p:nvPr/>
+      </p:nvGrpSpPr>
+      <p:grpSpPr>
+        <a:xfrm>
+          <a:off x="0" y="0"/>
+          <a:ext cx="0" cy="0"/>
+          <a:chOff x="0" y="0"/>
+          <a:chExt cx="0" cy="0"/>
+        </a:xfrm>
+      </p:grpSpPr>
+      <p:sp>
+        <p:nvSpPr>
+          <p:cNvPr id="2" name="Title 1"/>
+          <p:cNvSpPr>
+            <a:spLocks noGrp="1"/>
+          </p:cNvSpPr>
+          <p:nvPr>
+            <p:ph type="title"/>
+          </p:nvPr>
+        </p:nvSpPr>
+        <p:spPr/>
+        <p:txBody>
+          <a:bodyPr/>
+          <a:lstStyle/>
+          <a:p>
+            <a:r>
+              <a:t>Snowflake Cortex Integration</a:t>
             </a:r>
           </a:p>
         </p:txBody>
@@ -17516,27 +20060,1344 @@
           <a:lstStyle/>
           <a:p>
             <a:r>
-              <a:t>Generate validation rules automatically</a:t>
-            </a:r>
-          </a:p>
-          <a:p>
-            <a:r>
-              <a:t>Build expectation suites</a:t>
-            </a:r>
-          </a:p>
-          <a:p>
-            <a:r>
-              <a:t>Validate datasets dynamically</a:t>
-            </a:r>
-          </a:p>
-          <a:p>
-            <a:r>
-              <a:t>Generate reports and alerts</a:t>
-            </a:r>
+              <a:rPr dirty="0"/>
+              <a:t>AI-powered analytics</a:t>
+            </a:r>
+            <a:endParaRPr lang="en-US" dirty="0"/>
+          </a:p>
+          <a:p>
+            <a:pPr lvl="1"/>
+            <a:r>
+              <a:rPr lang="en-US" dirty="0"/>
+              <a:t>Natural language analysis on warehouse data.</a:t>
+            </a:r>
+            <a:endParaRPr dirty="0"/>
+          </a:p>
+          <a:p>
+            <a:r>
+              <a:rPr dirty="0"/>
+              <a:t>Root-cause summarization</a:t>
+            </a:r>
+            <a:endParaRPr lang="en-US" dirty="0"/>
+          </a:p>
+          <a:p>
+            <a:pPr lvl="1"/>
+            <a:r>
+              <a:rPr lang="en-IN" dirty="0"/>
+              <a:t>AI summarizes incidents automatically.</a:t>
+            </a:r>
+            <a:endParaRPr dirty="0"/>
+          </a:p>
+          <a:p>
+            <a:r>
+              <a:rPr dirty="0"/>
+              <a:t>Natural language insights</a:t>
+            </a:r>
+            <a:endParaRPr lang="en-US" dirty="0"/>
+          </a:p>
+          <a:p>
+            <a:r>
+              <a:rPr lang="en-US" dirty="0"/>
+              <a:t>Example:</a:t>
+            </a:r>
+          </a:p>
+          <a:p>
+            <a:r>
+              <a:rPr lang="en-US" dirty="0"/>
+              <a:t>“Sales dropped 35% due to ingestion delays.”</a:t>
+            </a:r>
+            <a:endParaRPr dirty="0"/>
+          </a:p>
+          <a:p>
+            <a:r>
+              <a:rPr dirty="0"/>
+              <a:t>Intelligent monitoring</a:t>
+            </a:r>
+            <a:endParaRPr lang="en-US" dirty="0"/>
+          </a:p>
+          <a:p>
+            <a:pPr lvl="1"/>
+            <a:r>
+              <a:rPr lang="en-US" dirty="0"/>
+              <a:t>AI continuously analyzes warehouse behavior.</a:t>
+            </a:r>
+            <a:endParaRPr dirty="0"/>
           </a:p>
         </p:txBody>
       </p:sp>
     </p:spTree>
+  </p:cSld>
+  <p:clrMapOvr>
+    <a:masterClrMapping/>
+  </p:clrMapOvr>
+</p:sld>
+</file>
+
+<file path=ppt/slides/slide38.xml><?xml version="1.0" encoding="utf-8"?>
+<p:sld xmlns:a="http://schemas.openxmlformats.org/drawingml/2006/main" xmlns:r="http://schemas.openxmlformats.org/officeDocument/2006/relationships" xmlns:p="http://schemas.openxmlformats.org/presentationml/2006/main">
+  <p:cSld>
+    <p:spTree>
+      <p:nvGrpSpPr>
+        <p:cNvPr id="1" name=""/>
+        <p:cNvGrpSpPr/>
+        <p:nvPr/>
+      </p:nvGrpSpPr>
+      <p:grpSpPr>
+        <a:xfrm>
+          <a:off x="0" y="0"/>
+          <a:ext cx="0" cy="0"/>
+          <a:chOff x="0" y="0"/>
+          <a:chExt cx="0" cy="0"/>
+        </a:xfrm>
+      </p:grpSpPr>
+      <p:sp>
+        <p:nvSpPr>
+          <p:cNvPr id="3" name="Content Placeholder 2">
+            <a:extLst>
+              <a:ext uri="{FF2B5EF4-FFF2-40B4-BE49-F238E27FC236}">
+                <a16:creationId xmlns:a16="http://schemas.microsoft.com/office/drawing/2014/main" id="{C1911BB0-4074-AD78-2622-089FE2C5C5E0}"/>
+              </a:ext>
+            </a:extLst>
+          </p:cNvPr>
+          <p:cNvSpPr>
+            <a:spLocks noGrp="1"/>
+          </p:cNvSpPr>
+          <p:nvPr>
+            <p:ph idx="1"/>
+          </p:nvPr>
+        </p:nvSpPr>
+        <p:spPr/>
+        <p:txBody>
+          <a:bodyPr/>
+          <a:lstStyle/>
+          <a:p>
+            <a:pPr algn="ctr"/>
+            <a:endParaRPr lang="en-US" sz="3600" dirty="0"/>
+          </a:p>
+          <a:p>
+            <a:pPr algn="ctr"/>
+            <a:endParaRPr lang="en-US" sz="3600" dirty="0"/>
+          </a:p>
+          <a:p>
+            <a:pPr algn="ctr"/>
+            <a:r>
+              <a:rPr lang="en-US" sz="3600" dirty="0"/>
+              <a:t>PERFORM LAB-14</a:t>
+            </a:r>
+            <a:endParaRPr lang="en-IN" dirty="0"/>
+          </a:p>
+        </p:txBody>
+      </p:sp>
+    </p:spTree>
+    <p:extLst>
+      <p:ext uri="{BB962C8B-B14F-4D97-AF65-F5344CB8AC3E}">
+        <p14:creationId xmlns:p14="http://schemas.microsoft.com/office/powerpoint/2010/main" val="3379038044"/>
+      </p:ext>
+    </p:extLst>
+  </p:cSld>
+  <p:clrMapOvr>
+    <a:masterClrMapping/>
+  </p:clrMapOvr>
+</p:sld>
+</file>
+
+<file path=ppt/slides/slide39.xml><?xml version="1.0" encoding="utf-8"?>
+<p:sld xmlns:a="http://schemas.openxmlformats.org/drawingml/2006/main" xmlns:r="http://schemas.openxmlformats.org/officeDocument/2006/relationships" xmlns:p="http://schemas.openxmlformats.org/presentationml/2006/main">
+  <p:cSld>
+    <p:spTree>
+      <p:nvGrpSpPr>
+        <p:cNvPr id="1" name=""/>
+        <p:cNvGrpSpPr/>
+        <p:nvPr/>
+      </p:nvGrpSpPr>
+      <p:grpSpPr>
+        <a:xfrm>
+          <a:off x="0" y="0"/>
+          <a:ext cx="0" cy="0"/>
+          <a:chOff x="0" y="0"/>
+          <a:chExt cx="0" cy="0"/>
+        </a:xfrm>
+      </p:grpSpPr>
+      <p:sp>
+        <p:nvSpPr>
+          <p:cNvPr id="2" name="Title 1"/>
+          <p:cNvSpPr>
+            <a:spLocks noGrp="1"/>
+          </p:cNvSpPr>
+          <p:nvPr>
+            <p:ph type="title"/>
+          </p:nvPr>
+        </p:nvSpPr>
+        <p:spPr/>
+        <p:txBody>
+          <a:bodyPr/>
+          <a:lstStyle/>
+          <a:p>
+            <a:r>
+              <a:t>Benefits of Autonomous Data Engineering</a:t>
+            </a:r>
+          </a:p>
+        </p:txBody>
+      </p:sp>
+      <p:sp>
+        <p:nvSpPr>
+          <p:cNvPr id="3" name="Content Placeholder 2"/>
+          <p:cNvSpPr>
+            <a:spLocks noGrp="1"/>
+          </p:cNvSpPr>
+          <p:nvPr>
+            <p:ph idx="1"/>
+          </p:nvPr>
+        </p:nvSpPr>
+        <p:spPr/>
+        <p:txBody>
+          <a:bodyPr/>
+          <a:lstStyle/>
+          <a:p>
+            <a:r>
+              <a:rPr dirty="0"/>
+              <a:t>Reduced downtime</a:t>
+            </a:r>
+            <a:endParaRPr lang="en-US" dirty="0"/>
+          </a:p>
+          <a:p>
+            <a:pPr lvl="1"/>
+            <a:r>
+              <a:rPr lang="en-IN" dirty="0"/>
+              <a:t>Self-healing systems recover faster.</a:t>
+            </a:r>
+            <a:endParaRPr dirty="0"/>
+          </a:p>
+          <a:p>
+            <a:r>
+              <a:rPr dirty="0"/>
+              <a:t>Improved reliability</a:t>
+            </a:r>
+            <a:endParaRPr lang="en-US" dirty="0"/>
+          </a:p>
+          <a:p>
+            <a:pPr lvl="1"/>
+            <a:r>
+              <a:rPr lang="en-IN" dirty="0"/>
+              <a:t>Pipelines become resilient.</a:t>
+            </a:r>
+            <a:endParaRPr dirty="0"/>
+          </a:p>
+          <a:p>
+            <a:r>
+              <a:rPr dirty="0"/>
+              <a:t>Lower operational cost</a:t>
+            </a:r>
+            <a:endParaRPr lang="en-US" dirty="0"/>
+          </a:p>
+          <a:p>
+            <a:pPr lvl="1"/>
+            <a:r>
+              <a:rPr lang="en-IN" dirty="0"/>
+              <a:t>Less manual monitoring.</a:t>
+            </a:r>
+            <a:endParaRPr dirty="0"/>
+          </a:p>
+          <a:p>
+            <a:r>
+              <a:rPr dirty="0"/>
+              <a:t>Enhanced governance</a:t>
+            </a:r>
+            <a:endParaRPr lang="en-US" dirty="0"/>
+          </a:p>
+          <a:p>
+            <a:pPr lvl="1"/>
+            <a:r>
+              <a:rPr lang="en-US" dirty="0"/>
+              <a:t>AI automatically classifies and monitors data.</a:t>
+            </a:r>
+            <a:endParaRPr dirty="0"/>
+          </a:p>
+          <a:p>
+            <a:r>
+              <a:rPr dirty="0"/>
+              <a:t>Scalable AI operations</a:t>
+            </a:r>
+            <a:endParaRPr lang="en-US" dirty="0"/>
+          </a:p>
+          <a:p>
+            <a:pPr lvl="1"/>
+            <a:r>
+              <a:rPr lang="en-US" dirty="0"/>
+              <a:t>Large enterprises can manage thousands of pipelines efficiently.</a:t>
+            </a:r>
+            <a:endParaRPr dirty="0"/>
+          </a:p>
+        </p:txBody>
+      </p:sp>
+    </p:spTree>
+  </p:cSld>
+  <p:clrMapOvr>
+    <a:masterClrMapping/>
+  </p:clrMapOvr>
+</p:sld>
+</file>
+
+<file path=ppt/slides/slide4.xml><?xml version="1.0" encoding="utf-8"?>
+<p:sld xmlns:a="http://schemas.openxmlformats.org/drawingml/2006/main" xmlns:r="http://schemas.openxmlformats.org/officeDocument/2006/relationships" xmlns:p="http://schemas.openxmlformats.org/presentationml/2006/main">
+  <p:cSld>
+    <p:spTree>
+      <p:nvGrpSpPr>
+        <p:cNvPr id="1" name=""/>
+        <p:cNvGrpSpPr/>
+        <p:nvPr/>
+      </p:nvGrpSpPr>
+      <p:grpSpPr>
+        <a:xfrm>
+          <a:off x="0" y="0"/>
+          <a:ext cx="0" cy="0"/>
+          <a:chOff x="0" y="0"/>
+          <a:chExt cx="0" cy="0"/>
+        </a:xfrm>
+      </p:grpSpPr>
+      <p:sp>
+        <p:nvSpPr>
+          <p:cNvPr id="3" name="Content Placeholder 2">
+            <a:extLst>
+              <a:ext uri="{FF2B5EF4-FFF2-40B4-BE49-F238E27FC236}">
+                <a16:creationId xmlns:a16="http://schemas.microsoft.com/office/drawing/2014/main" id="{011FFBB9-FDB9-867D-1B0F-57334B342A6E}"/>
+              </a:ext>
+            </a:extLst>
+          </p:cNvPr>
+          <p:cNvSpPr>
+            <a:spLocks noGrp="1"/>
+          </p:cNvSpPr>
+          <p:nvPr>
+            <p:ph idx="1"/>
+          </p:nvPr>
+        </p:nvSpPr>
+        <p:spPr>
+          <a:xfrm>
+            <a:off x="768096" y="447675"/>
+            <a:ext cx="7290055" cy="6229350"/>
+          </a:xfrm>
+        </p:spPr>
+        <p:txBody>
+          <a:bodyPr>
+            <a:normAutofit fontScale="92500" lnSpcReduction="10000"/>
+          </a:bodyPr>
+          <a:lstStyle/>
+          <a:p>
+            <a:r>
+              <a:rPr lang="en-IN" b="1" dirty="0"/>
+              <a:t>1. Schema Detection</a:t>
+            </a:r>
+          </a:p>
+          <a:p>
+            <a:r>
+              <a:rPr lang="en-IN" dirty="0"/>
+              <a:t>The agent reads incoming files and identifies:</a:t>
+            </a:r>
+          </a:p>
+          <a:p>
+            <a:pPr lvl="1"/>
+            <a:r>
+              <a:rPr lang="en-IN" dirty="0"/>
+              <a:t>Column names </a:t>
+            </a:r>
+          </a:p>
+          <a:p>
+            <a:pPr lvl="1"/>
+            <a:r>
+              <a:rPr lang="en-IN" dirty="0"/>
+              <a:t>Data types </a:t>
+            </a:r>
+          </a:p>
+          <a:p>
+            <a:pPr lvl="1"/>
+            <a:r>
+              <a:rPr lang="en-IN" dirty="0"/>
+              <a:t>Nested structures </a:t>
+            </a:r>
+          </a:p>
+          <a:p>
+            <a:r>
+              <a:rPr lang="en-IN" dirty="0"/>
+              <a:t>Example:</a:t>
+            </a:r>
+          </a:p>
+          <a:p>
+            <a:r>
+              <a:rPr lang="en-IN" dirty="0"/>
+              <a:t>{</a:t>
+            </a:r>
+            <a:br>
+              <a:rPr lang="en-IN" dirty="0"/>
+            </a:br>
+            <a:r>
+              <a:rPr lang="en-IN" dirty="0"/>
+              <a:t> "</a:t>
+            </a:r>
+            <a:r>
+              <a:rPr lang="en-IN" dirty="0" err="1"/>
+              <a:t>customer_id</a:t>
+            </a:r>
+            <a:r>
+              <a:rPr lang="en-IN" dirty="0"/>
+              <a:t>": 101,</a:t>
+            </a:r>
+            <a:br>
+              <a:rPr lang="en-IN" dirty="0"/>
+            </a:br>
+            <a:r>
+              <a:rPr lang="en-IN" dirty="0"/>
+              <a:t> "amount": 5000</a:t>
+            </a:r>
+            <a:br>
+              <a:rPr lang="en-IN" dirty="0"/>
+            </a:br>
+            <a:r>
+              <a:rPr lang="en-IN" dirty="0"/>
+              <a:t>}</a:t>
+            </a:r>
+          </a:p>
+          <a:p>
+            <a:r>
+              <a:rPr lang="en-IN" dirty="0"/>
+              <a:t>AI identifies:</a:t>
+            </a:r>
+          </a:p>
+          <a:p>
+            <a:pPr lvl="1"/>
+            <a:r>
+              <a:rPr lang="en-IN" dirty="0" err="1"/>
+              <a:t>customer_id</a:t>
+            </a:r>
+            <a:r>
+              <a:rPr lang="en-IN" dirty="0"/>
+              <a:t> → integer </a:t>
+            </a:r>
+          </a:p>
+          <a:p>
+            <a:pPr lvl="1"/>
+            <a:r>
+              <a:rPr lang="en-IN" dirty="0"/>
+              <a:t>amount → decimal </a:t>
+            </a:r>
+          </a:p>
+          <a:p>
+            <a:r>
+              <a:rPr lang="en-IN" b="1" dirty="0"/>
+              <a:t>2. Data Ingestion</a:t>
+            </a:r>
+          </a:p>
+          <a:p>
+            <a:r>
+              <a:rPr lang="en-IN" dirty="0"/>
+              <a:t>AI automatically:</a:t>
+            </a:r>
+          </a:p>
+          <a:p>
+            <a:pPr lvl="1"/>
+            <a:r>
+              <a:rPr lang="en-IN" dirty="0"/>
+              <a:t>Loads files </a:t>
+            </a:r>
+          </a:p>
+          <a:p>
+            <a:pPr lvl="1"/>
+            <a:r>
+              <a:rPr lang="en-IN" dirty="0"/>
+              <a:t>Triggers pipelines </a:t>
+            </a:r>
+          </a:p>
+          <a:p>
+            <a:pPr lvl="1"/>
+            <a:r>
+              <a:rPr lang="en-IN" dirty="0"/>
+              <a:t>Stores data into bronze/silver/gold layers </a:t>
+            </a:r>
+          </a:p>
+          <a:p>
+            <a:r>
+              <a:rPr lang="en-IN" dirty="0"/>
+              <a:t>Without manual mapping.</a:t>
+            </a:r>
+          </a:p>
+          <a:p>
+            <a:endParaRPr lang="en-IN" dirty="0"/>
+          </a:p>
+        </p:txBody>
+      </p:sp>
+    </p:spTree>
+    <p:extLst>
+      <p:ext uri="{BB962C8B-B14F-4D97-AF65-F5344CB8AC3E}">
+        <p14:creationId xmlns:p14="http://schemas.microsoft.com/office/powerpoint/2010/main" val="1865268319"/>
+      </p:ext>
+    </p:extLst>
+  </p:cSld>
+  <p:clrMapOvr>
+    <a:masterClrMapping/>
+  </p:clrMapOvr>
+</p:sld>
+</file>
+
+<file path=ppt/slides/slide40.xml><?xml version="1.0" encoding="utf-8"?>
+<p:sld xmlns:a="http://schemas.openxmlformats.org/drawingml/2006/main" xmlns:r="http://schemas.openxmlformats.org/officeDocument/2006/relationships" xmlns:p="http://schemas.openxmlformats.org/presentationml/2006/main">
+  <p:cSld>
+    <p:spTree>
+      <p:nvGrpSpPr>
+        <p:cNvPr id="1" name=""/>
+        <p:cNvGrpSpPr/>
+        <p:nvPr/>
+      </p:nvGrpSpPr>
+      <p:grpSpPr>
+        <a:xfrm>
+          <a:off x="0" y="0"/>
+          <a:ext cx="0" cy="0"/>
+          <a:chOff x="0" y="0"/>
+          <a:chExt cx="0" cy="0"/>
+        </a:xfrm>
+      </p:grpSpPr>
+      <p:sp>
+        <p:nvSpPr>
+          <p:cNvPr id="2" name="Title 1"/>
+          <p:cNvSpPr>
+            <a:spLocks noGrp="1"/>
+          </p:cNvSpPr>
+          <p:nvPr>
+            <p:ph type="title"/>
+          </p:nvPr>
+        </p:nvSpPr>
+        <p:spPr/>
+        <p:txBody>
+          <a:bodyPr/>
+          <a:lstStyle/>
+          <a:p>
+            <a:r>
+              <a:t>Best Practices</a:t>
+            </a:r>
+          </a:p>
+        </p:txBody>
+      </p:sp>
+      <p:sp>
+        <p:nvSpPr>
+          <p:cNvPr id="3" name="Content Placeholder 2"/>
+          <p:cNvSpPr>
+            <a:spLocks noGrp="1"/>
+          </p:cNvSpPr>
+          <p:nvPr>
+            <p:ph idx="1"/>
+          </p:nvPr>
+        </p:nvSpPr>
+        <p:spPr/>
+        <p:txBody>
+          <a:bodyPr>
+            <a:normAutofit lnSpcReduction="10000"/>
+          </a:bodyPr>
+          <a:lstStyle/>
+          <a:p>
+            <a:r>
+              <a:rPr b="1" dirty="0"/>
+              <a:t>Human approval for critical fixes</a:t>
+            </a:r>
+            <a:endParaRPr lang="en-US" b="1" dirty="0"/>
+          </a:p>
+          <a:p>
+            <a:r>
+              <a:rPr lang="en-US" dirty="0"/>
+              <a:t>Do not allow AI to make dangerous changes automatically.</a:t>
+            </a:r>
+          </a:p>
+          <a:p>
+            <a:r>
+              <a:rPr lang="en-US" dirty="0"/>
+              <a:t>Example:</a:t>
+            </a:r>
+          </a:p>
+          <a:p>
+            <a:pPr lvl="1"/>
+            <a:r>
+              <a:rPr lang="en-US" dirty="0"/>
+              <a:t>Schema deletion </a:t>
+            </a:r>
+          </a:p>
+          <a:p>
+            <a:pPr lvl="1"/>
+            <a:r>
+              <a:rPr lang="en-US" dirty="0"/>
+              <a:t>Production overwrite </a:t>
+            </a:r>
+          </a:p>
+          <a:p>
+            <a:r>
+              <a:rPr lang="en-US" dirty="0"/>
+              <a:t>Require approval.</a:t>
+            </a:r>
+            <a:endParaRPr dirty="0"/>
+          </a:p>
+          <a:p>
+            <a:r>
+              <a:rPr b="1" dirty="0"/>
+              <a:t>Audit logging</a:t>
+            </a:r>
+            <a:endParaRPr lang="en-US" b="1" dirty="0"/>
+          </a:p>
+          <a:p>
+            <a:r>
+              <a:rPr lang="en-US" dirty="0"/>
+              <a:t>Track:</a:t>
+            </a:r>
+          </a:p>
+          <a:p>
+            <a:pPr lvl="1"/>
+            <a:r>
+              <a:rPr lang="en-US" dirty="0"/>
+              <a:t>What AI changed </a:t>
+            </a:r>
+          </a:p>
+          <a:p>
+            <a:pPr lvl="1"/>
+            <a:r>
+              <a:rPr lang="en-US" dirty="0"/>
+              <a:t>When </a:t>
+            </a:r>
+          </a:p>
+          <a:p>
+            <a:pPr lvl="1"/>
+            <a:r>
+              <a:rPr lang="en-US" dirty="0"/>
+              <a:t>Why</a:t>
+            </a:r>
+            <a:endParaRPr b="1" dirty="0"/>
+          </a:p>
+          <a:p>
+            <a:endParaRPr dirty="0"/>
+          </a:p>
+        </p:txBody>
+      </p:sp>
+    </p:spTree>
+  </p:cSld>
+  <p:clrMapOvr>
+    <a:masterClrMapping/>
+  </p:clrMapOvr>
+</p:sld>
+</file>
+
+<file path=ppt/slides/slide41.xml><?xml version="1.0" encoding="utf-8"?>
+<p:sld xmlns:a="http://schemas.openxmlformats.org/drawingml/2006/main" xmlns:r="http://schemas.openxmlformats.org/officeDocument/2006/relationships" xmlns:p="http://schemas.openxmlformats.org/presentationml/2006/main">
+  <p:cSld>
+    <p:spTree>
+      <p:nvGrpSpPr>
+        <p:cNvPr id="1" name=""/>
+        <p:cNvGrpSpPr/>
+        <p:nvPr/>
+      </p:nvGrpSpPr>
+      <p:grpSpPr>
+        <a:xfrm>
+          <a:off x="0" y="0"/>
+          <a:ext cx="0" cy="0"/>
+          <a:chOff x="0" y="0"/>
+          <a:chExt cx="0" cy="0"/>
+        </a:xfrm>
+      </p:grpSpPr>
+      <p:sp>
+        <p:nvSpPr>
+          <p:cNvPr id="2" name="Title 1">
+            <a:extLst>
+              <a:ext uri="{FF2B5EF4-FFF2-40B4-BE49-F238E27FC236}">
+                <a16:creationId xmlns:a16="http://schemas.microsoft.com/office/drawing/2014/main" id="{0A9FD6BA-B36D-19DB-D568-9FB14063F50F}"/>
+              </a:ext>
+            </a:extLst>
+          </p:cNvPr>
+          <p:cNvSpPr>
+            <a:spLocks noGrp="1"/>
+          </p:cNvSpPr>
+          <p:nvPr>
+            <p:ph type="title"/>
+          </p:nvPr>
+        </p:nvSpPr>
+        <p:spPr/>
+        <p:txBody>
+          <a:bodyPr/>
+          <a:lstStyle/>
+          <a:p>
+            <a:r>
+              <a:rPr lang="en-US" dirty="0"/>
+              <a:t>CONTD</a:t>
+            </a:r>
+            <a:endParaRPr lang="en-IN" dirty="0"/>
+          </a:p>
+        </p:txBody>
+      </p:sp>
+      <p:sp>
+        <p:nvSpPr>
+          <p:cNvPr id="3" name="Content Placeholder 2">
+            <a:extLst>
+              <a:ext uri="{FF2B5EF4-FFF2-40B4-BE49-F238E27FC236}">
+                <a16:creationId xmlns:a16="http://schemas.microsoft.com/office/drawing/2014/main" id="{97D14C03-00A1-6205-2106-598731D6D1F8}"/>
+              </a:ext>
+            </a:extLst>
+          </p:cNvPr>
+          <p:cNvSpPr>
+            <a:spLocks noGrp="1"/>
+          </p:cNvSpPr>
+          <p:nvPr>
+            <p:ph idx="1"/>
+          </p:nvPr>
+        </p:nvSpPr>
+        <p:spPr/>
+        <p:txBody>
+          <a:bodyPr/>
+          <a:lstStyle/>
+          <a:p>
+            <a:r>
+              <a:rPr lang="en-IN" b="1" dirty="0"/>
+              <a:t>RBAC enforcement</a:t>
+            </a:r>
+          </a:p>
+          <a:p>
+            <a:pPr lvl="1"/>
+            <a:r>
+              <a:rPr lang="en-US" dirty="0"/>
+              <a:t>Use Role-Based Access Control.</a:t>
+            </a:r>
+          </a:p>
+          <a:p>
+            <a:pPr lvl="1"/>
+            <a:r>
+              <a:rPr lang="en-US" dirty="0"/>
+              <a:t>AI should only access permitted systems.</a:t>
+            </a:r>
+            <a:endParaRPr lang="en-IN" dirty="0"/>
+          </a:p>
+          <a:p>
+            <a:r>
+              <a:rPr lang="en-IN" dirty="0"/>
+              <a:t>Continuous AI monitoring</a:t>
+            </a:r>
+          </a:p>
+          <a:p>
+            <a:pPr lvl="1"/>
+            <a:r>
+              <a:rPr lang="en-IN" dirty="0"/>
+              <a:t>Monitor AI </a:t>
+            </a:r>
+            <a:r>
+              <a:rPr lang="en-IN" dirty="0" err="1"/>
+              <a:t>behavior</a:t>
+            </a:r>
+            <a:r>
+              <a:rPr lang="en-IN" dirty="0"/>
+              <a:t> itself.</a:t>
+            </a:r>
+          </a:p>
+          <a:p>
+            <a:r>
+              <a:rPr lang="en-IN" b="1" dirty="0"/>
+              <a:t>Validation checkpoints</a:t>
+            </a:r>
+          </a:p>
+          <a:p>
+            <a:r>
+              <a:rPr lang="en-US" dirty="0"/>
+              <a:t>Even after remediation:</a:t>
+            </a:r>
+          </a:p>
+          <a:p>
+            <a:pPr lvl="1"/>
+            <a:r>
+              <a:rPr lang="en-US" dirty="0"/>
+              <a:t>Revalidate data quality</a:t>
+            </a:r>
+          </a:p>
+          <a:p>
+            <a:pPr lvl="1"/>
+            <a:endParaRPr lang="en-IN" dirty="0"/>
+          </a:p>
+        </p:txBody>
+      </p:sp>
+    </p:spTree>
+    <p:extLst>
+      <p:ext uri="{BB962C8B-B14F-4D97-AF65-F5344CB8AC3E}">
+        <p14:creationId xmlns:p14="http://schemas.microsoft.com/office/powerpoint/2010/main" val="2838872236"/>
+      </p:ext>
+    </p:extLst>
+  </p:cSld>
+  <p:clrMapOvr>
+    <a:masterClrMapping/>
+  </p:clrMapOvr>
+</p:sld>
+</file>
+
+<file path=ppt/slides/slide42.xml><?xml version="1.0" encoding="utf-8"?>
+<p:sld xmlns:a="http://schemas.openxmlformats.org/drawingml/2006/main" xmlns:r="http://schemas.openxmlformats.org/officeDocument/2006/relationships" xmlns:p="http://schemas.openxmlformats.org/presentationml/2006/main">
+  <p:cSld>
+    <p:spTree>
+      <p:nvGrpSpPr>
+        <p:cNvPr id="1" name=""/>
+        <p:cNvGrpSpPr/>
+        <p:nvPr/>
+      </p:nvGrpSpPr>
+      <p:grpSpPr>
+        <a:xfrm>
+          <a:off x="0" y="0"/>
+          <a:ext cx="0" cy="0"/>
+          <a:chOff x="0" y="0"/>
+          <a:chExt cx="0" cy="0"/>
+        </a:xfrm>
+      </p:grpSpPr>
+      <p:sp>
+        <p:nvSpPr>
+          <p:cNvPr id="2" name="Title 1"/>
+          <p:cNvSpPr>
+            <a:spLocks noGrp="1"/>
+          </p:cNvSpPr>
+          <p:nvPr>
+            <p:ph type="title"/>
+          </p:nvPr>
+        </p:nvSpPr>
+        <p:spPr/>
+        <p:txBody>
+          <a:bodyPr/>
+          <a:lstStyle/>
+          <a:p>
+            <a:r>
+              <a:t>Enterprise Use Cases</a:t>
+            </a:r>
+          </a:p>
+        </p:txBody>
+      </p:sp>
+      <p:sp>
+        <p:nvSpPr>
+          <p:cNvPr id="3" name="Content Placeholder 2"/>
+          <p:cNvSpPr>
+            <a:spLocks noGrp="1"/>
+          </p:cNvSpPr>
+          <p:nvPr>
+            <p:ph idx="1"/>
+          </p:nvPr>
+        </p:nvSpPr>
+        <p:spPr/>
+        <p:txBody>
+          <a:bodyPr/>
+          <a:lstStyle/>
+          <a:p>
+            <a:r>
+              <a:rPr dirty="0"/>
+              <a:t>Banking fraud detection</a:t>
+            </a:r>
+            <a:endParaRPr lang="en-US" dirty="0"/>
+          </a:p>
+          <a:p>
+            <a:pPr lvl="1"/>
+            <a:r>
+              <a:rPr lang="en-IN" dirty="0"/>
+              <a:t>AI identifies suspicious transactions.</a:t>
+            </a:r>
+            <a:endParaRPr dirty="0"/>
+          </a:p>
+          <a:p>
+            <a:r>
+              <a:rPr dirty="0"/>
+              <a:t>Healthcare PHI monitoring</a:t>
+            </a:r>
+            <a:endParaRPr lang="en-US" dirty="0"/>
+          </a:p>
+          <a:p>
+            <a:pPr lvl="1"/>
+            <a:r>
+              <a:rPr lang="en-IN" dirty="0"/>
+              <a:t>Protect patient information.</a:t>
+            </a:r>
+            <a:endParaRPr dirty="0"/>
+          </a:p>
+          <a:p>
+            <a:r>
+              <a:rPr dirty="0"/>
+              <a:t>Retail anomaly detection</a:t>
+            </a:r>
+            <a:endParaRPr lang="en-US" dirty="0"/>
+          </a:p>
+          <a:p>
+            <a:pPr lvl="1"/>
+            <a:r>
+              <a:rPr lang="en-IN" dirty="0"/>
+              <a:t>Detect unusual sales patterns.</a:t>
+            </a:r>
+            <a:endParaRPr dirty="0"/>
+          </a:p>
+          <a:p>
+            <a:r>
+              <a:rPr dirty="0"/>
+              <a:t>Insurance claim validation</a:t>
+            </a:r>
+            <a:endParaRPr lang="en-US" dirty="0"/>
+          </a:p>
+          <a:p>
+            <a:pPr lvl="1"/>
+            <a:r>
+              <a:rPr lang="en-US" dirty="0"/>
+              <a:t>Detect fake or inconsistent claims.</a:t>
+            </a:r>
+          </a:p>
+        </p:txBody>
+      </p:sp>
+    </p:spTree>
+  </p:cSld>
+  <p:clrMapOvr>
+    <a:masterClrMapping/>
+  </p:clrMapOvr>
+</p:sld>
+</file>
+
+<file path=ppt/slides/slide43.xml><?xml version="1.0" encoding="utf-8"?>
+<p:sld xmlns:a="http://schemas.openxmlformats.org/drawingml/2006/main" xmlns:r="http://schemas.openxmlformats.org/officeDocument/2006/relationships" xmlns:p="http://schemas.openxmlformats.org/presentationml/2006/main">
+  <p:cSld>
+    <p:spTree>
+      <p:nvGrpSpPr>
+        <p:cNvPr id="1" name=""/>
+        <p:cNvGrpSpPr/>
+        <p:nvPr/>
+      </p:nvGrpSpPr>
+      <p:grpSpPr>
+        <a:xfrm>
+          <a:off x="0" y="0"/>
+          <a:ext cx="0" cy="0"/>
+          <a:chOff x="0" y="0"/>
+          <a:chExt cx="0" cy="0"/>
+        </a:xfrm>
+      </p:grpSpPr>
+      <p:sp>
+        <p:nvSpPr>
+          <p:cNvPr id="2" name="Title 1"/>
+          <p:cNvSpPr>
+            <a:spLocks noGrp="1"/>
+          </p:cNvSpPr>
+          <p:nvPr>
+            <p:ph type="title"/>
+          </p:nvPr>
+        </p:nvSpPr>
+        <p:spPr/>
+        <p:txBody>
+          <a:bodyPr/>
+          <a:lstStyle/>
+          <a:p>
+            <a:r>
+              <a:t>Future of Autonomous Data Platforms</a:t>
+            </a:r>
+          </a:p>
+        </p:txBody>
+      </p:sp>
+      <p:sp>
+        <p:nvSpPr>
+          <p:cNvPr id="3" name="Content Placeholder 2"/>
+          <p:cNvSpPr>
+            <a:spLocks noGrp="1"/>
+          </p:cNvSpPr>
+          <p:nvPr>
+            <p:ph idx="1"/>
+          </p:nvPr>
+        </p:nvSpPr>
+        <p:spPr/>
+        <p:txBody>
+          <a:bodyPr/>
+          <a:lstStyle/>
+          <a:p>
+            <a:r>
+              <a:rPr dirty="0"/>
+              <a:t>AI-native data engineering</a:t>
+            </a:r>
+            <a:endParaRPr lang="en-US" dirty="0"/>
+          </a:p>
+          <a:p>
+            <a:pPr lvl="1"/>
+            <a:r>
+              <a:rPr lang="en-IN" dirty="0"/>
+              <a:t>AI becomes core infrastructure.</a:t>
+            </a:r>
+            <a:endParaRPr dirty="0"/>
+          </a:p>
+          <a:p>
+            <a:r>
+              <a:rPr dirty="0"/>
+              <a:t>Self-healing </a:t>
+            </a:r>
+            <a:r>
+              <a:rPr dirty="0" err="1"/>
+              <a:t>lakehouses</a:t>
+            </a:r>
+            <a:endParaRPr lang="en-US" dirty="0"/>
+          </a:p>
+          <a:p>
+            <a:pPr lvl="1"/>
+            <a:r>
+              <a:rPr lang="en-IN" dirty="0" err="1"/>
+              <a:t>Lakehouses</a:t>
+            </a:r>
+            <a:r>
+              <a:rPr lang="en-IN" dirty="0"/>
+              <a:t> automatically repair themselves.</a:t>
+            </a:r>
+            <a:endParaRPr dirty="0"/>
+          </a:p>
+          <a:p>
+            <a:r>
+              <a:rPr dirty="0"/>
+              <a:t>Autonomous governance</a:t>
+            </a:r>
+            <a:endParaRPr lang="en-US" dirty="0"/>
+          </a:p>
+          <a:p>
+            <a:pPr lvl="1"/>
+            <a:r>
+              <a:rPr lang="en-IN" dirty="0"/>
+              <a:t>AI continuously enforces compliance.</a:t>
+            </a:r>
+            <a:endParaRPr dirty="0"/>
+          </a:p>
+          <a:p>
+            <a:r>
+              <a:rPr dirty="0"/>
+              <a:t>Intelligent observability</a:t>
+            </a:r>
+            <a:endParaRPr lang="en-US" dirty="0"/>
+          </a:p>
+          <a:p>
+            <a:pPr lvl="1"/>
+            <a:r>
+              <a:rPr lang="en-US" dirty="0"/>
+              <a:t>Observability platforms become proactive instead of reactive.</a:t>
+            </a:r>
+            <a:endParaRPr dirty="0"/>
+          </a:p>
+        </p:txBody>
+      </p:sp>
+    </p:spTree>
+  </p:cSld>
+  <p:clrMapOvr>
+    <a:masterClrMapping/>
+  </p:clrMapOvr>
+</p:sld>
+</file>
+
+<file path=ppt/slides/slide44.xml><?xml version="1.0" encoding="utf-8"?>
+<p:sld xmlns:a="http://schemas.openxmlformats.org/drawingml/2006/main" xmlns:r="http://schemas.openxmlformats.org/officeDocument/2006/relationships" xmlns:p="http://schemas.openxmlformats.org/presentationml/2006/main">
+  <p:cSld>
+    <p:spTree>
+      <p:nvGrpSpPr>
+        <p:cNvPr id="1" name=""/>
+        <p:cNvGrpSpPr/>
+        <p:nvPr/>
+      </p:nvGrpSpPr>
+      <p:grpSpPr>
+        <a:xfrm>
+          <a:off x="0" y="0"/>
+          <a:ext cx="0" cy="0"/>
+          <a:chOff x="0" y="0"/>
+          <a:chExt cx="0" cy="0"/>
+        </a:xfrm>
+      </p:grpSpPr>
+      <p:sp>
+        <p:nvSpPr>
+          <p:cNvPr id="3" name="Content Placeholder 2">
+            <a:extLst>
+              <a:ext uri="{FF2B5EF4-FFF2-40B4-BE49-F238E27FC236}">
+                <a16:creationId xmlns:a16="http://schemas.microsoft.com/office/drawing/2014/main" id="{05F647E9-CE14-33AA-CAB2-691F510147AB}"/>
+              </a:ext>
+            </a:extLst>
+          </p:cNvPr>
+          <p:cNvSpPr>
+            <a:spLocks noGrp="1"/>
+          </p:cNvSpPr>
+          <p:nvPr>
+            <p:ph idx="1"/>
+          </p:nvPr>
+        </p:nvSpPr>
+        <p:spPr/>
+        <p:txBody>
+          <a:bodyPr>
+            <a:normAutofit/>
+          </a:bodyPr>
+          <a:lstStyle/>
+          <a:p>
+            <a:pPr algn="ctr"/>
+            <a:endParaRPr lang="en-US" sz="3200" dirty="0"/>
+          </a:p>
+          <a:p>
+            <a:pPr algn="ctr"/>
+            <a:endParaRPr lang="en-US" sz="3200" dirty="0"/>
+          </a:p>
+          <a:p>
+            <a:pPr algn="ctr"/>
+            <a:endParaRPr lang="en-US" sz="3200" dirty="0"/>
+          </a:p>
+          <a:p>
+            <a:pPr algn="ctr"/>
+            <a:r>
+              <a:rPr lang="en-US" sz="3200" dirty="0"/>
+              <a:t>PERFORM LAB-19</a:t>
+            </a:r>
+            <a:endParaRPr lang="en-IN" sz="3200" dirty="0"/>
+          </a:p>
+        </p:txBody>
+      </p:sp>
+    </p:spTree>
+    <p:extLst>
+      <p:ext uri="{BB962C8B-B14F-4D97-AF65-F5344CB8AC3E}">
+        <p14:creationId xmlns:p14="http://schemas.microsoft.com/office/powerpoint/2010/main" val="3738205321"/>
+      </p:ext>
+    </p:extLst>
+  </p:cSld>
+  <p:clrMapOvr>
+    <a:masterClrMapping/>
+  </p:clrMapOvr>
+</p:sld>
+</file>
+
+<file path=ppt/slides/slide5.xml><?xml version="1.0" encoding="utf-8"?>
+<p:sld xmlns:a="http://schemas.openxmlformats.org/drawingml/2006/main" xmlns:r="http://schemas.openxmlformats.org/officeDocument/2006/relationships" xmlns:p="http://schemas.openxmlformats.org/presentationml/2006/main">
+  <p:cSld>
+    <p:spTree>
+      <p:nvGrpSpPr>
+        <p:cNvPr id="1" name=""/>
+        <p:cNvGrpSpPr/>
+        <p:nvPr/>
+      </p:nvGrpSpPr>
+      <p:grpSpPr>
+        <a:xfrm>
+          <a:off x="0" y="0"/>
+          <a:ext cx="0" cy="0"/>
+          <a:chOff x="0" y="0"/>
+          <a:chExt cx="0" cy="0"/>
+        </a:xfrm>
+      </p:grpSpPr>
+      <p:sp>
+        <p:nvSpPr>
+          <p:cNvPr id="3" name="Content Placeholder 2">
+            <a:extLst>
+              <a:ext uri="{FF2B5EF4-FFF2-40B4-BE49-F238E27FC236}">
+                <a16:creationId xmlns:a16="http://schemas.microsoft.com/office/drawing/2014/main" id="{7A7356B0-0356-D72B-9EE5-C6664496B16D}"/>
+              </a:ext>
+            </a:extLst>
+          </p:cNvPr>
+          <p:cNvSpPr>
+            <a:spLocks noGrp="1"/>
+          </p:cNvSpPr>
+          <p:nvPr>
+            <p:ph idx="1"/>
+          </p:nvPr>
+        </p:nvSpPr>
+        <p:spPr>
+          <a:xfrm>
+            <a:off x="768096" y="133350"/>
+            <a:ext cx="7290055" cy="6572250"/>
+          </a:xfrm>
+        </p:spPr>
+        <p:txBody>
+          <a:bodyPr>
+            <a:normAutofit fontScale="92500" lnSpcReduction="10000"/>
+          </a:bodyPr>
+          <a:lstStyle/>
+          <a:p>
+            <a:r>
+              <a:rPr lang="en-US" b="1" dirty="0"/>
+              <a:t>3. Validation</a:t>
+            </a:r>
+          </a:p>
+          <a:p>
+            <a:r>
+              <a:rPr lang="en-US" dirty="0"/>
+              <a:t>Before loading:</a:t>
+            </a:r>
+          </a:p>
+          <a:p>
+            <a:pPr lvl="1"/>
+            <a:r>
+              <a:rPr lang="en-US" dirty="0"/>
+              <a:t>Rules are checked </a:t>
+            </a:r>
+          </a:p>
+          <a:p>
+            <a:pPr lvl="1"/>
+            <a:r>
+              <a:rPr lang="en-US" dirty="0"/>
+              <a:t>Data quality is verified </a:t>
+            </a:r>
+          </a:p>
+          <a:p>
+            <a:r>
+              <a:rPr lang="en-US" dirty="0"/>
+              <a:t>Example:</a:t>
+            </a:r>
+          </a:p>
+          <a:p>
+            <a:pPr lvl="1"/>
+            <a:r>
+              <a:rPr lang="en-US" dirty="0"/>
+              <a:t>Null checks </a:t>
+            </a:r>
+          </a:p>
+          <a:p>
+            <a:pPr lvl="1"/>
+            <a:r>
+              <a:rPr lang="en-US" dirty="0"/>
+              <a:t>Format checks </a:t>
+            </a:r>
+          </a:p>
+          <a:p>
+            <a:pPr lvl="1"/>
+            <a:r>
+              <a:rPr lang="en-US" dirty="0"/>
+              <a:t>Range checks </a:t>
+            </a:r>
+          </a:p>
+          <a:p>
+            <a:r>
+              <a:rPr lang="en-US" b="1" dirty="0"/>
+              <a:t>4. Quarantine Handling</a:t>
+            </a:r>
+          </a:p>
+          <a:p>
+            <a:r>
+              <a:rPr lang="en-US" dirty="0"/>
+              <a:t>Bad records are separated.</a:t>
+            </a:r>
+          </a:p>
+          <a:p>
+            <a:r>
+              <a:rPr lang="en-US" dirty="0"/>
+              <a:t>Instead of failing the whole pipeline:</a:t>
+            </a:r>
+          </a:p>
+          <a:p>
+            <a:pPr lvl="1"/>
+            <a:r>
+              <a:rPr lang="en-US" dirty="0"/>
+              <a:t>Good records continue </a:t>
+            </a:r>
+          </a:p>
+          <a:p>
+            <a:pPr lvl="1"/>
+            <a:r>
+              <a:rPr lang="en-US" dirty="0"/>
+              <a:t>Bad records move to quarantine storage </a:t>
+            </a:r>
+          </a:p>
+          <a:p>
+            <a:r>
+              <a:rPr lang="en-US" b="1" dirty="0"/>
+              <a:t>5. Automated Remediation</a:t>
+            </a:r>
+          </a:p>
+          <a:p>
+            <a:r>
+              <a:rPr lang="en-US" dirty="0"/>
+              <a:t>AI attempts to repair:</a:t>
+            </a:r>
+          </a:p>
+          <a:p>
+            <a:pPr lvl="1"/>
+            <a:r>
+              <a:rPr lang="en-US" dirty="0"/>
+              <a:t>Formatting </a:t>
+            </a:r>
+          </a:p>
+          <a:p>
+            <a:pPr lvl="1"/>
+            <a:r>
+              <a:rPr lang="en-US" dirty="0"/>
+              <a:t>Missing values </a:t>
+            </a:r>
+          </a:p>
+          <a:p>
+            <a:pPr lvl="1"/>
+            <a:r>
+              <a:rPr lang="en-US" dirty="0"/>
+              <a:t>Type mismatches </a:t>
+            </a:r>
+          </a:p>
+          <a:p>
+            <a:r>
+              <a:rPr lang="en-US" dirty="0"/>
+              <a:t>This creates resilient pipelines.</a:t>
+            </a:r>
+          </a:p>
+          <a:p>
+            <a:endParaRPr lang="en-IN" dirty="0"/>
+          </a:p>
+        </p:txBody>
+      </p:sp>
+    </p:spTree>
+    <p:extLst>
+      <p:ext uri="{BB962C8B-B14F-4D97-AF65-F5344CB8AC3E}">
+        <p14:creationId xmlns:p14="http://schemas.microsoft.com/office/powerpoint/2010/main" val="118760584"/>
+      </p:ext>
+    </p:extLst>
+  </p:cSld>
+  <p:clrMapOvr>
+    <a:masterClrMapping/>
+  </p:clrMapOvr>
+</p:sld>
+</file>
+
+<file path=ppt/slides/slide6.xml><?xml version="1.0" encoding="utf-8"?>
+<p:sld xmlns:a="http://schemas.openxmlformats.org/drawingml/2006/main" xmlns:r="http://schemas.openxmlformats.org/officeDocument/2006/relationships" xmlns:p="http://schemas.openxmlformats.org/presentationml/2006/main">
+  <p:cSld>
+    <p:spTree>
+      <p:nvGrpSpPr>
+        <p:cNvPr id="1" name=""/>
+        <p:cNvGrpSpPr/>
+        <p:nvPr/>
+      </p:nvGrpSpPr>
+      <p:grpSpPr>
+        <a:xfrm>
+          <a:off x="0" y="0"/>
+          <a:ext cx="0" cy="0"/>
+          <a:chOff x="0" y="0"/>
+          <a:chExt cx="0" cy="0"/>
+        </a:xfrm>
+      </p:grpSpPr>
+      <p:sp>
+        <p:nvSpPr>
+          <p:cNvPr id="3" name="Content Placeholder 2">
+            <a:extLst>
+              <a:ext uri="{FF2B5EF4-FFF2-40B4-BE49-F238E27FC236}">
+                <a16:creationId xmlns:a16="http://schemas.microsoft.com/office/drawing/2014/main" id="{2CD4CF9E-6A55-1FE9-B4F9-81060010F688}"/>
+              </a:ext>
+            </a:extLst>
+          </p:cNvPr>
+          <p:cNvSpPr>
+            <a:spLocks noGrp="1"/>
+          </p:cNvSpPr>
+          <p:nvPr>
+            <p:ph idx="1"/>
+          </p:nvPr>
+        </p:nvSpPr>
+        <p:spPr/>
+        <p:txBody>
+          <a:bodyPr/>
+          <a:lstStyle/>
+          <a:p>
+            <a:endParaRPr lang="en-US" dirty="0"/>
+          </a:p>
+          <a:p>
+            <a:endParaRPr lang="en-US" dirty="0"/>
+          </a:p>
+          <a:p>
+            <a:endParaRPr lang="en-US" dirty="0"/>
+          </a:p>
+          <a:p>
+            <a:pPr algn="ctr"/>
+            <a:r>
+              <a:rPr lang="en-US" sz="5400" dirty="0"/>
+              <a:t>Perform LAB-1</a:t>
+            </a:r>
+            <a:endParaRPr lang="en-IN" dirty="0"/>
+          </a:p>
+        </p:txBody>
+      </p:sp>
+    </p:spTree>
+    <p:extLst>
+      <p:ext uri="{BB962C8B-B14F-4D97-AF65-F5344CB8AC3E}">
+        <p14:creationId xmlns:p14="http://schemas.microsoft.com/office/powerpoint/2010/main" val="1630294456"/>
+      </p:ext>
+    </p:extLst>
   </p:cSld>
   <p:clrMapOvr>
     <a:masterClrMapping/>
@@ -17577,7 +21438,7 @@
           <a:lstStyle/>
           <a:p>
             <a:r>
-              <a:t>Anomaly Detection Agents</a:t>
+              <a:t>Schema Detection Engine</a:t>
             </a:r>
           </a:p>
         </p:txBody>
@@ -17598,22 +21459,22 @@
           <a:lstStyle/>
           <a:p>
             <a:r>
-              <a:t>Detect unusual patterns</a:t>
-            </a:r>
-          </a:p>
-          <a:p>
-            <a:r>
-              <a:t>Monitor metrics and pipelines</a:t>
-            </a:r>
-          </a:p>
-          <a:p>
-            <a:r>
-              <a:t>Identify spikes and drops</a:t>
-            </a:r>
-          </a:p>
-          <a:p>
-            <a:r>
-              <a:t>Trigger automated actions</a:t>
+              <a:t>Automatically detect columns and data types</a:t>
+            </a:r>
+          </a:p>
+          <a:p>
+            <a:r>
+              <a:t>Handle structured and semi-structured data</a:t>
+            </a:r>
+          </a:p>
+          <a:p>
+            <a:r>
+              <a:t>Detect schema drift</a:t>
+            </a:r>
+          </a:p>
+          <a:p>
+            <a:r>
+              <a:t>Support CSV, JSON, Parquet and Avro</a:t>
             </a:r>
           </a:p>
         </p:txBody>
@@ -17645,28 +21506,13 @@
       </p:grpSpPr>
       <p:sp>
         <p:nvSpPr>
-          <p:cNvPr id="2" name="Title 1"/>
-          <p:cNvSpPr>
-            <a:spLocks noGrp="1"/>
-          </p:cNvSpPr>
-          <p:nvPr>
-            <p:ph type="title"/>
-          </p:nvPr>
-        </p:nvSpPr>
-        <p:spPr/>
-        <p:txBody>
-          <a:bodyPr/>
-          <a:lstStyle/>
-          <a:p>
-            <a:r>
-              <a:t>Auto-Quarantine Workflow</a:t>
-            </a:r>
-          </a:p>
-        </p:txBody>
-      </p:sp>
-      <p:sp>
-        <p:nvSpPr>
-          <p:cNvPr id="3" name="Content Placeholder 2"/>
+          <p:cNvPr id="3" name="Content Placeholder 2">
+            <a:extLst>
+              <a:ext uri="{FF2B5EF4-FFF2-40B4-BE49-F238E27FC236}">
+                <a16:creationId xmlns:a16="http://schemas.microsoft.com/office/drawing/2014/main" id="{83E82271-16A7-FEA6-761B-C60067D30426}"/>
+              </a:ext>
+            </a:extLst>
+          </p:cNvPr>
           <p:cNvSpPr>
             <a:spLocks noGrp="1"/>
           </p:cNvSpPr>
@@ -17674,33 +21520,169 @@
             <p:ph idx="1"/>
           </p:nvPr>
         </p:nvSpPr>
-        <p:spPr/>
+        <p:spPr>
+          <a:xfrm>
+            <a:off x="768096" y="304800"/>
+            <a:ext cx="7290055" cy="6457950"/>
+          </a:xfrm>
+        </p:spPr>
         <p:txBody>
-          <a:bodyPr/>
+          <a:bodyPr>
+            <a:normAutofit fontScale="92500" lnSpcReduction="20000"/>
+          </a:bodyPr>
           <a:lstStyle/>
           <a:p>
             <a:r>
-              <a:t>Detect bad records</a:t>
-            </a:r>
-          </a:p>
-          <a:p>
-            <a:r>
-              <a:t>Isolate suspicious data</a:t>
-            </a:r>
-          </a:p>
-          <a:p>
-            <a:r>
-              <a:t>Store quarantined records</a:t>
-            </a:r>
-          </a:p>
-          <a:p>
-            <a:r>
-              <a:t>Trigger remediation workflows</a:t>
-            </a:r>
+              <a:rPr lang="en-IN" b="1" dirty="0"/>
+              <a:t>Why Important?</a:t>
+            </a:r>
+          </a:p>
+          <a:p>
+            <a:r>
+              <a:rPr lang="en-IN" dirty="0"/>
+              <a:t>In real-world systems:</a:t>
+            </a:r>
+          </a:p>
+          <a:p>
+            <a:pPr lvl="1"/>
+            <a:r>
+              <a:rPr lang="en-IN" dirty="0"/>
+              <a:t>Vendors change formats </a:t>
+            </a:r>
+          </a:p>
+          <a:p>
+            <a:pPr lvl="1"/>
+            <a:r>
+              <a:rPr lang="en-IN" dirty="0"/>
+              <a:t>New columns appear </a:t>
+            </a:r>
+          </a:p>
+          <a:p>
+            <a:pPr lvl="1"/>
+            <a:r>
+              <a:rPr lang="en-IN" dirty="0"/>
+              <a:t>Types change </a:t>
+            </a:r>
+          </a:p>
+          <a:p>
+            <a:r>
+              <a:rPr lang="en-IN" dirty="0"/>
+              <a:t>Manual handling becomes difficult.</a:t>
+            </a:r>
+          </a:p>
+          <a:p>
+            <a:r>
+              <a:rPr lang="en-IN" b="1" dirty="0"/>
+              <a:t>Features</a:t>
+            </a:r>
+          </a:p>
+          <a:p>
+            <a:r>
+              <a:rPr lang="en-IN" b="1" dirty="0"/>
+              <a:t>Automatically Detect Columns and Data Types</a:t>
+            </a:r>
+          </a:p>
+          <a:p>
+            <a:r>
+              <a:rPr lang="en-IN" dirty="0"/>
+              <a:t>AI scans files and predicts:</a:t>
+            </a:r>
+          </a:p>
+          <a:p>
+            <a:pPr lvl="1"/>
+            <a:r>
+              <a:rPr lang="en-IN" dirty="0"/>
+              <a:t>Integer </a:t>
+            </a:r>
+          </a:p>
+          <a:p>
+            <a:pPr lvl="1"/>
+            <a:r>
+              <a:rPr lang="en-IN" dirty="0"/>
+              <a:t>String </a:t>
+            </a:r>
+          </a:p>
+          <a:p>
+            <a:pPr lvl="1"/>
+            <a:r>
+              <a:rPr lang="en-IN" dirty="0"/>
+              <a:t>Date </a:t>
+            </a:r>
+          </a:p>
+          <a:p>
+            <a:pPr lvl="1"/>
+            <a:r>
+              <a:rPr lang="en-IN" dirty="0"/>
+              <a:t>Boolean </a:t>
+            </a:r>
+          </a:p>
+          <a:p>
+            <a:pPr lvl="1"/>
+            <a:r>
+              <a:rPr lang="en-IN" dirty="0"/>
+              <a:t>Nested JSON </a:t>
+            </a:r>
+          </a:p>
+          <a:p>
+            <a:r>
+              <a:rPr lang="en-IN" b="1" dirty="0"/>
+              <a:t>Structured + Semi-Structured Support</a:t>
+            </a:r>
+          </a:p>
+          <a:p>
+            <a:r>
+              <a:rPr lang="en-IN" dirty="0"/>
+              <a:t>Supports:</a:t>
+            </a:r>
+          </a:p>
+          <a:p>
+            <a:pPr lvl="1"/>
+            <a:r>
+              <a:rPr lang="en-IN" dirty="0"/>
+              <a:t>CSV </a:t>
+            </a:r>
+          </a:p>
+          <a:p>
+            <a:pPr lvl="1"/>
+            <a:r>
+              <a:rPr lang="en-IN" dirty="0"/>
+              <a:t>JSON </a:t>
+            </a:r>
+          </a:p>
+          <a:p>
+            <a:pPr lvl="1"/>
+            <a:r>
+              <a:rPr lang="en-IN" dirty="0"/>
+              <a:t>Avro </a:t>
+            </a:r>
+          </a:p>
+          <a:p>
+            <a:pPr lvl="1"/>
+            <a:r>
+              <a:rPr lang="en-IN" dirty="0"/>
+              <a:t>Parquet </a:t>
+            </a:r>
+          </a:p>
+          <a:p>
+            <a:r>
+              <a:rPr lang="en-IN" dirty="0"/>
+              <a:t>Very important in data lakes.</a:t>
+            </a:r>
+          </a:p>
+          <a:p>
+            <a:endParaRPr lang="en-IN" dirty="0"/>
+          </a:p>
+          <a:p>
+            <a:endParaRPr lang="en-IN" dirty="0"/>
           </a:p>
         </p:txBody>
       </p:sp>
     </p:spTree>
+    <p:extLst>
+      <p:ext uri="{BB962C8B-B14F-4D97-AF65-F5344CB8AC3E}">
+        <p14:creationId xmlns:p14="http://schemas.microsoft.com/office/powerpoint/2010/main" val="1690891529"/>
+      </p:ext>
+    </p:extLst>
   </p:cSld>
   <p:clrMapOvr>
     <a:masterClrMapping/>
@@ -17727,7 +21709,13 @@
       </p:grpSpPr>
       <p:sp>
         <p:nvSpPr>
-          <p:cNvPr id="2" name="Title 1"/>
+          <p:cNvPr id="2" name="Title 1">
+            <a:extLst>
+              <a:ext uri="{FF2B5EF4-FFF2-40B4-BE49-F238E27FC236}">
+                <a16:creationId xmlns:a16="http://schemas.microsoft.com/office/drawing/2014/main" id="{1703F17E-97D3-B0F2-72FA-01CBF668AD40}"/>
+              </a:ext>
+            </a:extLst>
+          </p:cNvPr>
           <p:cNvSpPr>
             <a:spLocks noGrp="1"/>
           </p:cNvSpPr>
@@ -17741,14 +21729,22 @@
           <a:lstStyle/>
           <a:p>
             <a:r>
-              <a:t>Automated Remediation</a:t>
-            </a:r>
+              <a:rPr lang="en-US" dirty="0"/>
+              <a:t>CONTD</a:t>
+            </a:r>
+            <a:endParaRPr lang="en-IN" dirty="0"/>
           </a:p>
         </p:txBody>
       </p:sp>
       <p:sp>
         <p:nvSpPr>
-          <p:cNvPr id="3" name="Content Placeholder 2"/>
+          <p:cNvPr id="3" name="Content Placeholder 2">
+            <a:extLst>
+              <a:ext uri="{FF2B5EF4-FFF2-40B4-BE49-F238E27FC236}">
+                <a16:creationId xmlns:a16="http://schemas.microsoft.com/office/drawing/2014/main" id="{4E102C78-CEE7-66A2-EAB6-E4001BBE09B0}"/>
+              </a:ext>
+            </a:extLst>
+          </p:cNvPr>
           <p:cNvSpPr>
             <a:spLocks noGrp="1"/>
           </p:cNvSpPr>
@@ -17762,27 +21758,70 @@
           <a:lstStyle/>
           <a:p>
             <a:r>
-              <a:t>Fix formatting issues</a:t>
-            </a:r>
-          </a:p>
-          <a:p>
-            <a:r>
-              <a:t>Correct mappings</a:t>
-            </a:r>
-          </a:p>
-          <a:p>
-            <a:r>
-              <a:t>Fill missing values</a:t>
-            </a:r>
-          </a:p>
-          <a:p>
-            <a:r>
-              <a:t>Reprocess failed records</a:t>
+              <a:rPr lang="en-IN" b="1" dirty="0"/>
+              <a:t>Detect Schema Drift</a:t>
+            </a:r>
+          </a:p>
+          <a:p>
+            <a:r>
+              <a:rPr lang="en-IN" dirty="0"/>
+              <a:t>Schema drift means:</a:t>
+            </a:r>
+          </a:p>
+          <a:p>
+            <a:pPr lvl="1"/>
+            <a:r>
+              <a:rPr lang="en-IN" dirty="0"/>
+              <a:t>New column added </a:t>
+            </a:r>
+          </a:p>
+          <a:p>
+            <a:pPr lvl="1"/>
+            <a:r>
+              <a:rPr lang="en-IN" dirty="0"/>
+              <a:t>Type changed </a:t>
+            </a:r>
+          </a:p>
+          <a:p>
+            <a:pPr lvl="1"/>
+            <a:r>
+              <a:rPr lang="en-IN" dirty="0"/>
+              <a:t>Column removed </a:t>
+            </a:r>
+          </a:p>
+          <a:p>
+            <a:r>
+              <a:rPr lang="en-IN" dirty="0"/>
+              <a:t>Example:</a:t>
+            </a:r>
+          </a:p>
+          <a:p>
+            <a:r>
+              <a:rPr lang="en-IN" dirty="0"/>
+              <a:t>Old: amount INT</a:t>
+            </a:r>
+            <a:br>
+              <a:rPr lang="en-IN" dirty="0"/>
+            </a:br>
+            <a:r>
+              <a:rPr lang="en-IN" dirty="0"/>
+              <a:t>New: amount STRING</a:t>
+            </a:r>
+          </a:p>
+          <a:p>
+            <a:r>
+              <a:rPr lang="en-IN" dirty="0"/>
+              <a:t>AI detects drift automatically.</a:t>
             </a:r>
           </a:p>
         </p:txBody>
       </p:sp>
     </p:spTree>
+    <p:extLst>
+      <p:ext uri="{BB962C8B-B14F-4D97-AF65-F5344CB8AC3E}">
+        <p14:creationId xmlns:p14="http://schemas.microsoft.com/office/powerpoint/2010/main" val="2387506060"/>
+      </p:ext>
+    </p:extLst>
   </p:cSld>
   <p:clrMapOvr>
     <a:masterClrMapping/>

--- a/Week-3/Day-2/Autonomous_AI_Data_Quality_Self_Healing_Pipelines.pptx
+++ b/Week-3/Day-2/Autonomous_AI_Data_Quality_Self_Healing_Pipelines.pptx
@@ -49,6 +49,7 @@
     <p:sldId id="272" r:id="rId43"/>
     <p:sldId id="273" r:id="rId44"/>
     <p:sldId id="299" r:id="rId45"/>
+    <p:sldId id="300" r:id="rId46"/>
   </p:sldIdLst>
   <p:sldSz cx="9144000" cy="6858000" type="screen4x3"/>
   <p:notesSz cx="6858000" cy="9144000"/>
@@ -16760,6 +16761,14 @@
 <file path=ppt/slides/slide12.xml><?xml version="1.0" encoding="utf-8"?>
 <p:sld xmlns:a="http://schemas.openxmlformats.org/drawingml/2006/main" xmlns:r="http://schemas.openxmlformats.org/officeDocument/2006/relationships" xmlns:p="http://schemas.openxmlformats.org/presentationml/2006/main">
   <p:cSld>
+    <p:bg>
+      <p:bgPr>
+        <a:solidFill>
+          <a:schemeClr val="bg1"/>
+        </a:solidFill>
+        <a:effectLst/>
+      </p:bgPr>
+    </p:bg>
     <p:spTree>
       <p:nvGrpSpPr>
         <p:cNvPr id="1" name=""/>
@@ -16784,9 +16793,16 @@
             <p:ph type="title"/>
           </p:nvPr>
         </p:nvSpPr>
-        <p:spPr/>
+        <p:spPr>
+          <a:xfrm>
+            <a:off x="768096" y="585216"/>
+            <a:ext cx="6013704" cy="1499616"/>
+          </a:xfrm>
+        </p:spPr>
         <p:txBody>
-          <a:bodyPr/>
+          <a:bodyPr>
+            <a:normAutofit/>
+          </a:bodyPr>
           <a:lstStyle/>
           <a:p>
             <a:r>
@@ -16806,9 +16822,16 @@
             <p:ph idx="1"/>
           </p:nvPr>
         </p:nvSpPr>
-        <p:spPr/>
+        <p:spPr>
+          <a:xfrm>
+            <a:off x="768096" y="2286000"/>
+            <a:ext cx="6013703" cy="4023360"/>
+          </a:xfrm>
+        </p:spPr>
         <p:txBody>
-          <a:bodyPr/>
+          <a:bodyPr>
+            <a:normAutofit/>
+          </a:bodyPr>
           <a:lstStyle/>
           <a:p>
             <a:r>
@@ -16829,6 +16852,134 @@
             <a:r>
               <a:t>Automated expectation generation</a:t>
             </a:r>
+          </a:p>
+        </p:txBody>
+      </p:sp>
+      <p:sp>
+        <p:nvSpPr>
+          <p:cNvPr id="8" name="Rectangle 7">
+            <a:extLst>
+              <a:ext uri="{FF2B5EF4-FFF2-40B4-BE49-F238E27FC236}">
+                <a16:creationId xmlns:a16="http://schemas.microsoft.com/office/drawing/2014/main" id="{77D7B666-D5E6-48CE-B26A-FB5E5C34AF90}"/>
+              </a:ext>
+              <a:ext uri="{C183D7F6-B498-43B3-948B-1728B52AA6E4}">
+                <adec:decorative xmlns:adec="http://schemas.microsoft.com/office/drawing/2017/decorative" val="1"/>
+              </a:ext>
+            </a:extLst>
+          </p:cNvPr>
+          <p:cNvSpPr>
+            <a:spLocks noGrp="1" noRot="1" noChangeAspect="1" noMove="1" noResize="1" noEditPoints="1" noAdjustHandles="1" noChangeArrowheads="1" noChangeShapeType="1" noTextEdit="1"/>
+          </p:cNvSpPr>
+          <p:nvPr>
+            <p:extLst>
+              <p:ext uri="{386F3935-93C4-4BCD-93E2-E3B085C9AB24}">
+                <p16:designElem xmlns:p16="http://schemas.microsoft.com/office/powerpoint/2015/main" val="1"/>
+              </p:ext>
+            </p:extLst>
+          </p:nvPr>
+        </p:nvSpPr>
+        <p:spPr>
+          <a:xfrm>
+            <a:off x="7187511" y="325601"/>
+            <a:ext cx="1715190" cy="3908071"/>
+          </a:xfrm>
+          <a:prstGeom prst="rect">
+            <a:avLst/>
+          </a:prstGeom>
+          <a:solidFill>
+            <a:schemeClr val="accent1"/>
+          </a:solidFill>
+          <a:ln>
+            <a:noFill/>
+          </a:ln>
+        </p:spPr>
+        <p:style>
+          <a:lnRef idx="2">
+            <a:schemeClr val="accent1">
+              <a:shade val="50000"/>
+            </a:schemeClr>
+          </a:lnRef>
+          <a:fillRef idx="1">
+            <a:schemeClr val="accent1"/>
+          </a:fillRef>
+          <a:effectRef idx="0">
+            <a:schemeClr val="accent1"/>
+          </a:effectRef>
+          <a:fontRef idx="minor">
+            <a:schemeClr val="lt1"/>
+          </a:fontRef>
+        </p:style>
+        <p:txBody>
+          <a:bodyPr rtlCol="0" anchor="ctr"/>
+          <a:lstStyle/>
+          <a:p>
+            <a:pPr algn="ctr"/>
+            <a:endParaRPr lang="en-US" dirty="0"/>
+          </a:p>
+        </p:txBody>
+      </p:sp>
+      <p:sp>
+        <p:nvSpPr>
+          <p:cNvPr id="10" name="Rectangle 9">
+            <a:extLst>
+              <a:ext uri="{FF2B5EF4-FFF2-40B4-BE49-F238E27FC236}">
+                <a16:creationId xmlns:a16="http://schemas.microsoft.com/office/drawing/2014/main" id="{F6EE670A-A41A-44AD-BC1C-2090365EB5B3}"/>
+              </a:ext>
+              <a:ext uri="{C183D7F6-B498-43B3-948B-1728B52AA6E4}">
+                <adec:decorative xmlns:adec="http://schemas.microsoft.com/office/drawing/2017/decorative" val="1"/>
+              </a:ext>
+            </a:extLst>
+          </p:cNvPr>
+          <p:cNvSpPr>
+            <a:spLocks noGrp="1" noRot="1" noChangeAspect="1" noMove="1" noResize="1" noEditPoints="1" noAdjustHandles="1" noChangeArrowheads="1" noChangeShapeType="1" noTextEdit="1"/>
+          </p:cNvSpPr>
+          <p:nvPr>
+            <p:extLst>
+              <p:ext uri="{386F3935-93C4-4BCD-93E2-E3B085C9AB24}">
+                <p16:designElem xmlns:p16="http://schemas.microsoft.com/office/powerpoint/2015/main" val="1"/>
+              </p:ext>
+            </p:extLst>
+          </p:nvPr>
+        </p:nvSpPr>
+        <p:spPr>
+          <a:xfrm>
+            <a:off x="7187511" y="4394539"/>
+            <a:ext cx="1715190" cy="2029724"/>
+          </a:xfrm>
+          <a:prstGeom prst="rect">
+            <a:avLst/>
+          </a:prstGeom>
+          <a:solidFill>
+            <a:schemeClr val="tx2">
+              <a:alpha val="80000"/>
+            </a:schemeClr>
+          </a:solidFill>
+          <a:ln>
+            <a:noFill/>
+          </a:ln>
+        </p:spPr>
+        <p:style>
+          <a:lnRef idx="2">
+            <a:schemeClr val="accent1">
+              <a:shade val="50000"/>
+            </a:schemeClr>
+          </a:lnRef>
+          <a:fillRef idx="1">
+            <a:schemeClr val="accent1"/>
+          </a:fillRef>
+          <a:effectRef idx="0">
+            <a:schemeClr val="accent1"/>
+          </a:effectRef>
+          <a:fontRef idx="minor">
+            <a:schemeClr val="lt1"/>
+          </a:fontRef>
+        </p:style>
+        <p:txBody>
+          <a:bodyPr rtlCol="0" anchor="ctr"/>
+          <a:lstStyle/>
+          <a:p>
+            <a:pPr algn="ctr"/>
+            <a:endParaRPr lang="en-US"/>
           </a:p>
         </p:txBody>
       </p:sp>
@@ -17181,6 +17332,14 @@
 <file path=ppt/slides/slide15.xml><?xml version="1.0" encoding="utf-8"?>
 <p:sld xmlns:a="http://schemas.openxmlformats.org/drawingml/2006/main" xmlns:r="http://schemas.openxmlformats.org/officeDocument/2006/relationships" xmlns:p="http://schemas.openxmlformats.org/presentationml/2006/main">
   <p:cSld>
+    <p:bg>
+      <p:bgPr>
+        <a:solidFill>
+          <a:schemeClr val="bg1"/>
+        </a:solidFill>
+        <a:effectLst/>
+      </p:bgPr>
+    </p:bg>
     <p:spTree>
       <p:nvGrpSpPr>
         <p:cNvPr id="1" name=""/>
@@ -17205,9 +17364,16 @@
             <p:ph type="title"/>
           </p:nvPr>
         </p:nvSpPr>
-        <p:spPr/>
+        <p:spPr>
+          <a:xfrm>
+            <a:off x="768096" y="585216"/>
+            <a:ext cx="6013704" cy="1499616"/>
+          </a:xfrm>
+        </p:spPr>
         <p:txBody>
-          <a:bodyPr/>
+          <a:bodyPr>
+            <a:normAutofit/>
+          </a:bodyPr>
           <a:lstStyle/>
           <a:p>
             <a:r>
@@ -17227,9 +17393,16 @@
             <p:ph idx="1"/>
           </p:nvPr>
         </p:nvSpPr>
-        <p:spPr/>
+        <p:spPr>
+          <a:xfrm>
+            <a:off x="768096" y="2286000"/>
+            <a:ext cx="6013703" cy="4023360"/>
+          </a:xfrm>
+        </p:spPr>
         <p:txBody>
-          <a:bodyPr/>
+          <a:bodyPr>
+            <a:normAutofit/>
+          </a:bodyPr>
           <a:lstStyle/>
           <a:p>
             <a:r>
@@ -17250,6 +17423,134 @@
             <a:r>
               <a:t>Generate reports and alerts</a:t>
             </a:r>
+          </a:p>
+        </p:txBody>
+      </p:sp>
+      <p:sp>
+        <p:nvSpPr>
+          <p:cNvPr id="8" name="Rectangle 7">
+            <a:extLst>
+              <a:ext uri="{FF2B5EF4-FFF2-40B4-BE49-F238E27FC236}">
+                <a16:creationId xmlns:a16="http://schemas.microsoft.com/office/drawing/2014/main" id="{77D7B666-D5E6-48CE-B26A-FB5E5C34AF90}"/>
+              </a:ext>
+              <a:ext uri="{C183D7F6-B498-43B3-948B-1728B52AA6E4}">
+                <adec:decorative xmlns:adec="http://schemas.microsoft.com/office/drawing/2017/decorative" val="1"/>
+              </a:ext>
+            </a:extLst>
+          </p:cNvPr>
+          <p:cNvSpPr>
+            <a:spLocks noGrp="1" noRot="1" noChangeAspect="1" noMove="1" noResize="1" noEditPoints="1" noAdjustHandles="1" noChangeArrowheads="1" noChangeShapeType="1" noTextEdit="1"/>
+          </p:cNvSpPr>
+          <p:nvPr>
+            <p:extLst>
+              <p:ext uri="{386F3935-93C4-4BCD-93E2-E3B085C9AB24}">
+                <p16:designElem xmlns:p16="http://schemas.microsoft.com/office/powerpoint/2015/main" val="1"/>
+              </p:ext>
+            </p:extLst>
+          </p:nvPr>
+        </p:nvSpPr>
+        <p:spPr>
+          <a:xfrm>
+            <a:off x="7187511" y="325601"/>
+            <a:ext cx="1715190" cy="3908071"/>
+          </a:xfrm>
+          <a:prstGeom prst="rect">
+            <a:avLst/>
+          </a:prstGeom>
+          <a:solidFill>
+            <a:schemeClr val="accent1"/>
+          </a:solidFill>
+          <a:ln>
+            <a:noFill/>
+          </a:ln>
+        </p:spPr>
+        <p:style>
+          <a:lnRef idx="2">
+            <a:schemeClr val="accent1">
+              <a:shade val="50000"/>
+            </a:schemeClr>
+          </a:lnRef>
+          <a:fillRef idx="1">
+            <a:schemeClr val="accent1"/>
+          </a:fillRef>
+          <a:effectRef idx="0">
+            <a:schemeClr val="accent1"/>
+          </a:effectRef>
+          <a:fontRef idx="minor">
+            <a:schemeClr val="lt1"/>
+          </a:fontRef>
+        </p:style>
+        <p:txBody>
+          <a:bodyPr rtlCol="0" anchor="ctr"/>
+          <a:lstStyle/>
+          <a:p>
+            <a:pPr algn="ctr"/>
+            <a:endParaRPr lang="en-US" dirty="0"/>
+          </a:p>
+        </p:txBody>
+      </p:sp>
+      <p:sp>
+        <p:nvSpPr>
+          <p:cNvPr id="10" name="Rectangle 9">
+            <a:extLst>
+              <a:ext uri="{FF2B5EF4-FFF2-40B4-BE49-F238E27FC236}">
+                <a16:creationId xmlns:a16="http://schemas.microsoft.com/office/drawing/2014/main" id="{F6EE670A-A41A-44AD-BC1C-2090365EB5B3}"/>
+              </a:ext>
+              <a:ext uri="{C183D7F6-B498-43B3-948B-1728B52AA6E4}">
+                <adec:decorative xmlns:adec="http://schemas.microsoft.com/office/drawing/2017/decorative" val="1"/>
+              </a:ext>
+            </a:extLst>
+          </p:cNvPr>
+          <p:cNvSpPr>
+            <a:spLocks noGrp="1" noRot="1" noChangeAspect="1" noMove="1" noResize="1" noEditPoints="1" noAdjustHandles="1" noChangeArrowheads="1" noChangeShapeType="1" noTextEdit="1"/>
+          </p:cNvSpPr>
+          <p:nvPr>
+            <p:extLst>
+              <p:ext uri="{386F3935-93C4-4BCD-93E2-E3B085C9AB24}">
+                <p16:designElem xmlns:p16="http://schemas.microsoft.com/office/powerpoint/2015/main" val="1"/>
+              </p:ext>
+            </p:extLst>
+          </p:nvPr>
+        </p:nvSpPr>
+        <p:spPr>
+          <a:xfrm>
+            <a:off x="7187511" y="4394539"/>
+            <a:ext cx="1715190" cy="2029724"/>
+          </a:xfrm>
+          <a:prstGeom prst="rect">
+            <a:avLst/>
+          </a:prstGeom>
+          <a:solidFill>
+            <a:schemeClr val="tx2">
+              <a:alpha val="80000"/>
+            </a:schemeClr>
+          </a:solidFill>
+          <a:ln>
+            <a:noFill/>
+          </a:ln>
+        </p:spPr>
+        <p:style>
+          <a:lnRef idx="2">
+            <a:schemeClr val="accent1">
+              <a:shade val="50000"/>
+            </a:schemeClr>
+          </a:lnRef>
+          <a:fillRef idx="1">
+            <a:schemeClr val="accent1"/>
+          </a:fillRef>
+          <a:effectRef idx="0">
+            <a:schemeClr val="accent1"/>
+          </a:effectRef>
+          <a:fontRef idx="minor">
+            <a:schemeClr val="lt1"/>
+          </a:fontRef>
+        </p:style>
+        <p:txBody>
+          <a:bodyPr rtlCol="0" anchor="ctr"/>
+          <a:lstStyle/>
+          <a:p>
+            <a:pPr algn="ctr"/>
+            <a:endParaRPr lang="en-US"/>
           </a:p>
         </p:txBody>
       </p:sp>
@@ -17264,6 +17565,14 @@
 <file path=ppt/slides/slide16.xml><?xml version="1.0" encoding="utf-8"?>
 <p:sld xmlns:a="http://schemas.openxmlformats.org/drawingml/2006/main" xmlns:r="http://schemas.openxmlformats.org/officeDocument/2006/relationships" xmlns:p="http://schemas.openxmlformats.org/presentationml/2006/main">
   <p:cSld>
+    <p:bg>
+      <p:bgPr>
+        <a:solidFill>
+          <a:srgbClr val="335B74"/>
+        </a:solidFill>
+        <a:effectLst/>
+      </p:bgPr>
+    </p:bg>
     <p:spTree>
       <p:nvGrpSpPr>
         <p:cNvPr id="1" name=""/>
@@ -17280,49 +17589,209 @@
       </p:grpSpPr>
       <p:sp>
         <p:nvSpPr>
-          <p:cNvPr id="3" name="Content Placeholder 2">
-            <a:extLst>
-              <a:ext uri="{FF2B5EF4-FFF2-40B4-BE49-F238E27FC236}">
-                <a16:creationId xmlns:a16="http://schemas.microsoft.com/office/drawing/2014/main" id="{D416A7C0-C825-F8F6-B79E-63A8EAA20892}"/>
-              </a:ext>
-            </a:extLst>
-          </p:cNvPr>
-          <p:cNvSpPr>
-            <a:spLocks noGrp="1"/>
-          </p:cNvSpPr>
-          <p:nvPr>
-            <p:ph idx="1"/>
-          </p:nvPr>
+          <p:cNvPr id="2" name="Circle 1"/>
+          <p:cNvSpPr/>
+          <p:nvPr/>
         </p:nvSpPr>
-        <p:spPr/>
+        <p:spPr>
+          <a:xfrm>
+            <a:off x="6344000" y="0"/>
+            <a:ext cx="2800000" cy="2800000"/>
+          </a:xfrm>
+          <a:prstGeom prst="ellipse">
+            <a:avLst/>
+          </a:prstGeom>
+          <a:solidFill>
+            <a:srgbClr val="27CED7">
+              <a:alpha val="15000"/>
+            </a:srgbClr>
+          </a:solidFill>
+          <a:ln>
+            <a:noFill/>
+          </a:ln>
+        </p:spPr>
         <p:txBody>
-          <a:bodyPr>
-            <a:normAutofit/>
-          </a:bodyPr>
+          <a:bodyPr/>
           <a:lstStyle/>
           <a:p>
+            <a:endParaRPr lang="en-US"/>
+          </a:p>
+        </p:txBody>
+      </p:sp>
+      <p:sp>
+        <p:nvSpPr>
+          <p:cNvPr id="3" name="Circle 2"/>
+          <p:cNvSpPr/>
+          <p:nvPr/>
+        </p:nvSpPr>
+        <p:spPr>
+          <a:xfrm>
+            <a:off x="0" y="4858000"/>
+            <a:ext cx="2000000" cy="2000000"/>
+          </a:xfrm>
+          <a:prstGeom prst="ellipse">
+            <a:avLst/>
+          </a:prstGeom>
+          <a:solidFill>
+            <a:srgbClr val="1CADE4">
+              <a:alpha val="12000"/>
+            </a:srgbClr>
+          </a:solidFill>
+          <a:ln>
+            <a:noFill/>
+          </a:ln>
+        </p:spPr>
+        <p:txBody>
+          <a:bodyPr/>
+          <a:lstStyle/>
+          <a:p>
+            <a:endParaRPr lang="en-US"/>
+          </a:p>
+        </p:txBody>
+      </p:sp>
+      <p:sp>
+        <p:nvSpPr>
+          <p:cNvPr id="4" name="Label"/>
+          <p:cNvSpPr/>
+          <p:nvPr/>
+        </p:nvSpPr>
+        <p:spPr>
+          <a:xfrm>
+            <a:off x="3200000" y="1900000"/>
+            <a:ext cx="2744000" cy="400000"/>
+          </a:xfrm>
+          <a:prstGeom prst="roundRect">
+            <a:avLst>
+              <a:gd name="adj" fmla="val 50000"/>
+            </a:avLst>
+          </a:prstGeom>
+          <a:solidFill>
+            <a:srgbClr val="27CED7"/>
+          </a:solidFill>
+          <a:ln>
+            <a:noFill/>
+          </a:ln>
+        </p:spPr>
+        <p:txBody>
+          <a:bodyPr lIns="91440" tIns="45720" rIns="91440" bIns="45720" anchor="ctr" anchorCtr="1"/>
+          <a:lstStyle/>
+          <a:p>
             <a:pPr algn="ctr"/>
-            <a:endParaRPr lang="en-US" sz="3600" dirty="0"/>
-          </a:p>
+            <a:r>
+              <a:rPr lang="en-US" sz="1600" b="1" spc="300">
+                <a:solidFill>
+                  <a:srgbClr val="FFFFFF"/>
+                </a:solidFill>
+                <a:latin typeface="Calibri"/>
+                <a:cs typeface="Calibri"/>
+              </a:rPr>
+              <a:t>HANDS-ON EXERCISE</a:t>
+            </a:r>
+          </a:p>
+        </p:txBody>
+      </p:sp>
+      <p:sp>
+        <p:nvSpPr>
+          <p:cNvPr id="5" name="MainTitle"/>
+          <p:cNvSpPr/>
+          <p:nvPr/>
+        </p:nvSpPr>
+        <p:spPr>
+          <a:xfrm>
+            <a:off x="1200000" y="2500000"/>
+            <a:ext cx="6744000" cy="900000"/>
+          </a:xfrm>
+          <a:prstGeom prst="rect">
+            <a:avLst/>
+          </a:prstGeom>
+          <a:noFill/>
+          <a:ln>
+            <a:noFill/>
+          </a:ln>
+        </p:spPr>
+        <p:txBody>
+          <a:bodyPr lIns="0" tIns="0" rIns="0" bIns="0" anchor="ctr" anchorCtr="1"/>
+          <a:lstStyle/>
           <a:p>
             <a:pPr algn="ctr"/>
-            <a:endParaRPr lang="en-US" sz="3600" dirty="0"/>
-          </a:p>
+            <a:r>
+              <a:rPr lang="en-US" sz="4800" b="1">
+                <a:solidFill>
+                  <a:srgbClr val="FFFFFF"/>
+                </a:solidFill>
+                <a:latin typeface="Calibri"/>
+                <a:cs typeface="Calibri"/>
+              </a:rPr>
+              <a:t>Lab 2</a:t>
+            </a:r>
+          </a:p>
+        </p:txBody>
+      </p:sp>
+      <p:sp>
+        <p:nvSpPr>
+          <p:cNvPr id="6" name="Subtitle"/>
+          <p:cNvSpPr/>
+          <p:nvPr/>
+        </p:nvSpPr>
+        <p:spPr>
+          <a:xfrm>
+            <a:off x="1800000" y="3500000"/>
+            <a:ext cx="5544000" cy="500000"/>
+          </a:xfrm>
+          <a:prstGeom prst="rect">
+            <a:avLst/>
+          </a:prstGeom>
+          <a:noFill/>
+          <a:ln>
+            <a:noFill/>
+          </a:ln>
+        </p:spPr>
+        <p:txBody>
+          <a:bodyPr lIns="0" tIns="0" rIns="0" bIns="0" anchor="t" anchorCtr="1"/>
+          <a:lstStyle/>
           <a:p>
             <a:pPr algn="ctr"/>
-            <a:endParaRPr lang="en-US" sz="3600" dirty="0"/>
-          </a:p>
-          <a:p>
-            <a:pPr algn="ctr"/>
-            <a:r>
-              <a:rPr lang="en-US" sz="3600" dirty="0"/>
-              <a:t>Perform LAB-2</a:t>
-            </a:r>
-            <a:endParaRPr lang="en-IN" sz="3600" dirty="0"/>
-          </a:p>
-          <a:p>
-            <a:pPr algn="ctr"/>
-            <a:endParaRPr lang="en-IN" sz="3600" dirty="0"/>
+            <a:r>
+              <a:rPr lang="en-US" sz="1800">
+                <a:solidFill>
+                  <a:srgbClr val="DFE3E5"/>
+                </a:solidFill>
+                <a:latin typeface="Calibri"/>
+                <a:cs typeface="Calibri"/>
+              </a:rPr>
+              <a:t>Great Expectations &amp; LLM Integration</a:t>
+            </a:r>
+          </a:p>
+        </p:txBody>
+      </p:sp>
+      <p:sp>
+        <p:nvSpPr>
+          <p:cNvPr id="7" name="BottomAccent"/>
+          <p:cNvSpPr/>
+          <p:nvPr/>
+        </p:nvSpPr>
+        <p:spPr>
+          <a:xfrm>
+            <a:off x="3800000" y="4200000"/>
+            <a:ext cx="1544000" cy="36000"/>
+          </a:xfrm>
+          <a:prstGeom prst="rect">
+            <a:avLst/>
+          </a:prstGeom>
+          <a:solidFill>
+            <a:srgbClr val="27CED7">
+              <a:alpha val="60000"/>
+            </a:srgbClr>
+          </a:solidFill>
+          <a:ln>
+            <a:noFill/>
+          </a:ln>
+        </p:spPr>
+        <p:txBody>
+          <a:bodyPr/>
+          <a:lstStyle/>
+          <a:p>
+            <a:endParaRPr lang="en-US"/>
           </a:p>
         </p:txBody>
       </p:sp>
@@ -17661,6 +18130,14 @@
 <file path=ppt/slides/slide19.xml><?xml version="1.0" encoding="utf-8"?>
 <p:sld xmlns:a="http://schemas.openxmlformats.org/drawingml/2006/main" xmlns:r="http://schemas.openxmlformats.org/officeDocument/2006/relationships" xmlns:p="http://schemas.openxmlformats.org/presentationml/2006/main">
   <p:cSld>
+    <p:bg>
+      <p:bgPr>
+        <a:solidFill>
+          <a:schemeClr val="bg1"/>
+        </a:solidFill>
+        <a:effectLst/>
+      </p:bgPr>
+    </p:bg>
     <p:spTree>
       <p:nvGrpSpPr>
         <p:cNvPr id="1" name=""/>
@@ -17685,9 +18162,16 @@
             <p:ph type="title"/>
           </p:nvPr>
         </p:nvSpPr>
-        <p:spPr/>
+        <p:spPr>
+          <a:xfrm>
+            <a:off x="768096" y="585216"/>
+            <a:ext cx="6013704" cy="1499616"/>
+          </a:xfrm>
+        </p:spPr>
         <p:txBody>
-          <a:bodyPr/>
+          <a:bodyPr>
+            <a:normAutofit/>
+          </a:bodyPr>
           <a:lstStyle/>
           <a:p>
             <a:r>
@@ -17707,9 +18191,16 @@
             <p:ph idx="1"/>
           </p:nvPr>
         </p:nvSpPr>
-        <p:spPr/>
+        <p:spPr>
+          <a:xfrm>
+            <a:off x="768096" y="2286000"/>
+            <a:ext cx="6013703" cy="4023360"/>
+          </a:xfrm>
+        </p:spPr>
         <p:txBody>
-          <a:bodyPr/>
+          <a:bodyPr>
+            <a:normAutofit/>
+          </a:bodyPr>
           <a:lstStyle/>
           <a:p>
             <a:r>
@@ -17730,6 +18221,134 @@
             <a:r>
               <a:t>Trigger automated actions</a:t>
             </a:r>
+          </a:p>
+        </p:txBody>
+      </p:sp>
+      <p:sp>
+        <p:nvSpPr>
+          <p:cNvPr id="8" name="Rectangle 7">
+            <a:extLst>
+              <a:ext uri="{FF2B5EF4-FFF2-40B4-BE49-F238E27FC236}">
+                <a16:creationId xmlns:a16="http://schemas.microsoft.com/office/drawing/2014/main" id="{77D7B666-D5E6-48CE-B26A-FB5E5C34AF90}"/>
+              </a:ext>
+              <a:ext uri="{C183D7F6-B498-43B3-948B-1728B52AA6E4}">
+                <adec:decorative xmlns:adec="http://schemas.microsoft.com/office/drawing/2017/decorative" val="1"/>
+              </a:ext>
+            </a:extLst>
+          </p:cNvPr>
+          <p:cNvSpPr>
+            <a:spLocks noGrp="1" noRot="1" noChangeAspect="1" noMove="1" noResize="1" noEditPoints="1" noAdjustHandles="1" noChangeArrowheads="1" noChangeShapeType="1" noTextEdit="1"/>
+          </p:cNvSpPr>
+          <p:nvPr>
+            <p:extLst>
+              <p:ext uri="{386F3935-93C4-4BCD-93E2-E3B085C9AB24}">
+                <p16:designElem xmlns:p16="http://schemas.microsoft.com/office/powerpoint/2015/main" val="1"/>
+              </p:ext>
+            </p:extLst>
+          </p:nvPr>
+        </p:nvSpPr>
+        <p:spPr>
+          <a:xfrm>
+            <a:off x="7187511" y="325601"/>
+            <a:ext cx="1715190" cy="3908071"/>
+          </a:xfrm>
+          <a:prstGeom prst="rect">
+            <a:avLst/>
+          </a:prstGeom>
+          <a:solidFill>
+            <a:schemeClr val="accent1"/>
+          </a:solidFill>
+          <a:ln>
+            <a:noFill/>
+          </a:ln>
+        </p:spPr>
+        <p:style>
+          <a:lnRef idx="2">
+            <a:schemeClr val="accent1">
+              <a:shade val="50000"/>
+            </a:schemeClr>
+          </a:lnRef>
+          <a:fillRef idx="1">
+            <a:schemeClr val="accent1"/>
+          </a:fillRef>
+          <a:effectRef idx="0">
+            <a:schemeClr val="accent1"/>
+          </a:effectRef>
+          <a:fontRef idx="minor">
+            <a:schemeClr val="lt1"/>
+          </a:fontRef>
+        </p:style>
+        <p:txBody>
+          <a:bodyPr rtlCol="0" anchor="ctr"/>
+          <a:lstStyle/>
+          <a:p>
+            <a:pPr algn="ctr"/>
+            <a:endParaRPr lang="en-US" dirty="0"/>
+          </a:p>
+        </p:txBody>
+      </p:sp>
+      <p:sp>
+        <p:nvSpPr>
+          <p:cNvPr id="10" name="Rectangle 9">
+            <a:extLst>
+              <a:ext uri="{FF2B5EF4-FFF2-40B4-BE49-F238E27FC236}">
+                <a16:creationId xmlns:a16="http://schemas.microsoft.com/office/drawing/2014/main" id="{F6EE670A-A41A-44AD-BC1C-2090365EB5B3}"/>
+              </a:ext>
+              <a:ext uri="{C183D7F6-B498-43B3-948B-1728B52AA6E4}">
+                <adec:decorative xmlns:adec="http://schemas.microsoft.com/office/drawing/2017/decorative" val="1"/>
+              </a:ext>
+            </a:extLst>
+          </p:cNvPr>
+          <p:cNvSpPr>
+            <a:spLocks noGrp="1" noRot="1" noChangeAspect="1" noMove="1" noResize="1" noEditPoints="1" noAdjustHandles="1" noChangeArrowheads="1" noChangeShapeType="1" noTextEdit="1"/>
+          </p:cNvSpPr>
+          <p:nvPr>
+            <p:extLst>
+              <p:ext uri="{386F3935-93C4-4BCD-93E2-E3B085C9AB24}">
+                <p16:designElem xmlns:p16="http://schemas.microsoft.com/office/powerpoint/2015/main" val="1"/>
+              </p:ext>
+            </p:extLst>
+          </p:nvPr>
+        </p:nvSpPr>
+        <p:spPr>
+          <a:xfrm>
+            <a:off x="7187511" y="4394539"/>
+            <a:ext cx="1715190" cy="2029724"/>
+          </a:xfrm>
+          <a:prstGeom prst="rect">
+            <a:avLst/>
+          </a:prstGeom>
+          <a:solidFill>
+            <a:schemeClr val="tx2">
+              <a:alpha val="80000"/>
+            </a:schemeClr>
+          </a:solidFill>
+          <a:ln>
+            <a:noFill/>
+          </a:ln>
+        </p:spPr>
+        <p:style>
+          <a:lnRef idx="2">
+            <a:schemeClr val="accent1">
+              <a:shade val="50000"/>
+            </a:schemeClr>
+          </a:lnRef>
+          <a:fillRef idx="1">
+            <a:schemeClr val="accent1"/>
+          </a:fillRef>
+          <a:effectRef idx="0">
+            <a:schemeClr val="accent1"/>
+          </a:effectRef>
+          <a:fontRef idx="minor">
+            <a:schemeClr val="lt1"/>
+          </a:fontRef>
+        </p:style>
+        <p:txBody>
+          <a:bodyPr rtlCol="0" anchor="ctr"/>
+          <a:lstStyle/>
+          <a:p>
+            <a:pPr algn="ctr"/>
+            <a:endParaRPr lang="en-US"/>
           </a:p>
         </p:txBody>
       </p:sp>
@@ -17831,6 +18450,14 @@
 <file path=ppt/slides/slide20.xml><?xml version="1.0" encoding="utf-8"?>
 <p:sld xmlns:a="http://schemas.openxmlformats.org/drawingml/2006/main" xmlns:r="http://schemas.openxmlformats.org/officeDocument/2006/relationships" xmlns:p="http://schemas.openxmlformats.org/presentationml/2006/main">
   <p:cSld>
+    <p:bg>
+      <p:bgPr>
+        <a:solidFill>
+          <a:srgbClr val="335B74"/>
+        </a:solidFill>
+        <a:effectLst/>
+      </p:bgPr>
+    </p:bg>
     <p:spTree>
       <p:nvGrpSpPr>
         <p:cNvPr id="1" name=""/>
@@ -17847,40 +18474,209 @@
       </p:grpSpPr>
       <p:sp>
         <p:nvSpPr>
-          <p:cNvPr id="3" name="Content Placeholder 2">
-            <a:extLst>
-              <a:ext uri="{FF2B5EF4-FFF2-40B4-BE49-F238E27FC236}">
-                <a16:creationId xmlns:a16="http://schemas.microsoft.com/office/drawing/2014/main" id="{9ABD81BF-9276-9F8F-414E-E0A2B6423347}"/>
-              </a:ext>
-            </a:extLst>
-          </p:cNvPr>
-          <p:cNvSpPr>
-            <a:spLocks noGrp="1"/>
-          </p:cNvSpPr>
-          <p:nvPr>
-            <p:ph idx="1"/>
-          </p:nvPr>
+          <p:cNvPr id="2" name="Circle 1"/>
+          <p:cNvSpPr/>
+          <p:nvPr/>
         </p:nvSpPr>
-        <p:spPr/>
+        <p:spPr>
+          <a:xfrm>
+            <a:off x="6344000" y="0"/>
+            <a:ext cx="2800000" cy="2800000"/>
+          </a:xfrm>
+          <a:prstGeom prst="ellipse">
+            <a:avLst/>
+          </a:prstGeom>
+          <a:solidFill>
+            <a:srgbClr val="27CED7">
+              <a:alpha val="15000"/>
+            </a:srgbClr>
+          </a:solidFill>
+          <a:ln>
+            <a:noFill/>
+          </a:ln>
+        </p:spPr>
         <p:txBody>
           <a:bodyPr/>
           <a:lstStyle/>
           <a:p>
-            <a:endParaRPr lang="en-US" dirty="0"/>
-          </a:p>
-          <a:p>
-            <a:endParaRPr lang="en-US" dirty="0"/>
-          </a:p>
-          <a:p>
-            <a:endParaRPr lang="en-US" dirty="0"/>
-          </a:p>
+            <a:endParaRPr lang="en-US"/>
+          </a:p>
+        </p:txBody>
+      </p:sp>
+      <p:sp>
+        <p:nvSpPr>
+          <p:cNvPr id="3" name="Circle 2"/>
+          <p:cNvSpPr/>
+          <p:nvPr/>
+        </p:nvSpPr>
+        <p:spPr>
+          <a:xfrm>
+            <a:off x="0" y="4858000"/>
+            <a:ext cx="2000000" cy="2000000"/>
+          </a:xfrm>
+          <a:prstGeom prst="ellipse">
+            <a:avLst/>
+          </a:prstGeom>
+          <a:solidFill>
+            <a:srgbClr val="1CADE4">
+              <a:alpha val="12000"/>
+            </a:srgbClr>
+          </a:solidFill>
+          <a:ln>
+            <a:noFill/>
+          </a:ln>
+        </p:spPr>
+        <p:txBody>
+          <a:bodyPr/>
+          <a:lstStyle/>
+          <a:p>
+            <a:endParaRPr lang="en-US"/>
+          </a:p>
+        </p:txBody>
+      </p:sp>
+      <p:sp>
+        <p:nvSpPr>
+          <p:cNvPr id="4" name="Label"/>
+          <p:cNvSpPr/>
+          <p:nvPr/>
+        </p:nvSpPr>
+        <p:spPr>
+          <a:xfrm>
+            <a:off x="3200000" y="1900000"/>
+            <a:ext cx="2744000" cy="400000"/>
+          </a:xfrm>
+          <a:prstGeom prst="roundRect">
+            <a:avLst>
+              <a:gd name="adj" fmla="val 50000"/>
+            </a:avLst>
+          </a:prstGeom>
+          <a:solidFill>
+            <a:srgbClr val="27CED7"/>
+          </a:solidFill>
+          <a:ln>
+            <a:noFill/>
+          </a:ln>
+        </p:spPr>
+        <p:txBody>
+          <a:bodyPr lIns="91440" tIns="45720" rIns="91440" bIns="45720" anchor="ctr" anchorCtr="1"/>
+          <a:lstStyle/>
           <a:p>
             <a:pPr algn="ctr"/>
             <a:r>
-              <a:rPr lang="en-US" sz="4800" dirty="0"/>
-              <a:t>Complete LAB-3,4,5</a:t>
-            </a:r>
-            <a:endParaRPr lang="en-IN" dirty="0"/>
+              <a:rPr lang="en-US" sz="1600" b="1" spc="300">
+                <a:solidFill>
+                  <a:srgbClr val="FFFFFF"/>
+                </a:solidFill>
+                <a:latin typeface="Calibri"/>
+                <a:cs typeface="Calibri"/>
+              </a:rPr>
+              <a:t>HANDS-ON EXERCISE</a:t>
+            </a:r>
+          </a:p>
+        </p:txBody>
+      </p:sp>
+      <p:sp>
+        <p:nvSpPr>
+          <p:cNvPr id="5" name="MainTitle"/>
+          <p:cNvSpPr/>
+          <p:nvPr/>
+        </p:nvSpPr>
+        <p:spPr>
+          <a:xfrm>
+            <a:off x="1200000" y="2500000"/>
+            <a:ext cx="6744000" cy="900000"/>
+          </a:xfrm>
+          <a:prstGeom prst="rect">
+            <a:avLst/>
+          </a:prstGeom>
+          <a:noFill/>
+          <a:ln>
+            <a:noFill/>
+          </a:ln>
+        </p:spPr>
+        <p:txBody>
+          <a:bodyPr lIns="0" tIns="0" rIns="0" bIns="0" anchor="ctr" anchorCtr="1"/>
+          <a:lstStyle/>
+          <a:p>
+            <a:pPr algn="ctr"/>
+            <a:r>
+              <a:rPr lang="en-US" sz="4800" b="1">
+                <a:solidFill>
+                  <a:srgbClr val="FFFFFF"/>
+                </a:solidFill>
+                <a:latin typeface="Calibri"/>
+                <a:cs typeface="Calibri"/>
+              </a:rPr>
+              <a:t>Lab 3, 4 &amp; 5</a:t>
+            </a:r>
+          </a:p>
+        </p:txBody>
+      </p:sp>
+      <p:sp>
+        <p:nvSpPr>
+          <p:cNvPr id="6" name="Subtitle"/>
+          <p:cNvSpPr/>
+          <p:nvPr/>
+        </p:nvSpPr>
+        <p:spPr>
+          <a:xfrm>
+            <a:off x="1800000" y="3500000"/>
+            <a:ext cx="5544000" cy="500000"/>
+          </a:xfrm>
+          <a:prstGeom prst="rect">
+            <a:avLst/>
+          </a:prstGeom>
+          <a:noFill/>
+          <a:ln>
+            <a:noFill/>
+          </a:ln>
+        </p:spPr>
+        <p:txBody>
+          <a:bodyPr lIns="0" tIns="0" rIns="0" bIns="0" anchor="t" anchorCtr="1"/>
+          <a:lstStyle/>
+          <a:p>
+            <a:pPr algn="ctr"/>
+            <a:r>
+              <a:rPr lang="en-US" sz="1800">
+                <a:solidFill>
+                  <a:srgbClr val="DFE3E5"/>
+                </a:solidFill>
+                <a:latin typeface="Calibri"/>
+                <a:cs typeface="Calibri"/>
+              </a:rPr>
+              <a:t>Anomaly Detection Agents</a:t>
+            </a:r>
+          </a:p>
+        </p:txBody>
+      </p:sp>
+      <p:sp>
+        <p:nvSpPr>
+          <p:cNvPr id="7" name="BottomAccent"/>
+          <p:cNvSpPr/>
+          <p:nvPr/>
+        </p:nvSpPr>
+        <p:spPr>
+          <a:xfrm>
+            <a:off x="3800000" y="4200000"/>
+            <a:ext cx="1544000" cy="36000"/>
+          </a:xfrm>
+          <a:prstGeom prst="rect">
+            <a:avLst/>
+          </a:prstGeom>
+          <a:solidFill>
+            <a:srgbClr val="27CED7">
+              <a:alpha val="60000"/>
+            </a:srgbClr>
+          </a:solidFill>
+          <a:ln>
+            <a:noFill/>
+          </a:ln>
+        </p:spPr>
+        <p:txBody>
+          <a:bodyPr/>
+          <a:lstStyle/>
+          <a:p>
+            <a:endParaRPr lang="en-US"/>
           </a:p>
         </p:txBody>
       </p:sp>
@@ -18106,6 +18902,14 @@
 <file path=ppt/slides/slide22.xml><?xml version="1.0" encoding="utf-8"?>
 <p:sld xmlns:a="http://schemas.openxmlformats.org/drawingml/2006/main" xmlns:r="http://schemas.openxmlformats.org/officeDocument/2006/relationships" xmlns:p="http://schemas.openxmlformats.org/presentationml/2006/main">
   <p:cSld>
+    <p:bg>
+      <p:bgPr>
+        <a:solidFill>
+          <a:schemeClr val="bg1"/>
+        </a:solidFill>
+        <a:effectLst/>
+      </p:bgPr>
+    </p:bg>
     <p:spTree>
       <p:nvGrpSpPr>
         <p:cNvPr id="1" name=""/>
@@ -18130,9 +18934,16 @@
             <p:ph type="title"/>
           </p:nvPr>
         </p:nvSpPr>
-        <p:spPr/>
+        <p:spPr>
+          <a:xfrm>
+            <a:off x="768096" y="585216"/>
+            <a:ext cx="6013704" cy="1499616"/>
+          </a:xfrm>
+        </p:spPr>
         <p:txBody>
-          <a:bodyPr/>
+          <a:bodyPr>
+            <a:normAutofit/>
+          </a:bodyPr>
           <a:lstStyle/>
           <a:p>
             <a:r>
@@ -18152,9 +18963,16 @@
             <p:ph idx="1"/>
           </p:nvPr>
         </p:nvSpPr>
-        <p:spPr/>
+        <p:spPr>
+          <a:xfrm>
+            <a:off x="768096" y="2286000"/>
+            <a:ext cx="6013703" cy="4023360"/>
+          </a:xfrm>
+        </p:spPr>
         <p:txBody>
-          <a:bodyPr/>
+          <a:bodyPr>
+            <a:normAutofit/>
+          </a:bodyPr>
           <a:lstStyle/>
           <a:p>
             <a:r>
@@ -18175,6 +18993,134 @@
             <a:r>
               <a:t>Trigger remediation workflows</a:t>
             </a:r>
+          </a:p>
+        </p:txBody>
+      </p:sp>
+      <p:sp>
+        <p:nvSpPr>
+          <p:cNvPr id="8" name="Rectangle 7">
+            <a:extLst>
+              <a:ext uri="{FF2B5EF4-FFF2-40B4-BE49-F238E27FC236}">
+                <a16:creationId xmlns:a16="http://schemas.microsoft.com/office/drawing/2014/main" id="{77D7B666-D5E6-48CE-B26A-FB5E5C34AF90}"/>
+              </a:ext>
+              <a:ext uri="{C183D7F6-B498-43B3-948B-1728B52AA6E4}">
+                <adec:decorative xmlns:adec="http://schemas.microsoft.com/office/drawing/2017/decorative" val="1"/>
+              </a:ext>
+            </a:extLst>
+          </p:cNvPr>
+          <p:cNvSpPr>
+            <a:spLocks noGrp="1" noRot="1" noChangeAspect="1" noMove="1" noResize="1" noEditPoints="1" noAdjustHandles="1" noChangeArrowheads="1" noChangeShapeType="1" noTextEdit="1"/>
+          </p:cNvSpPr>
+          <p:nvPr>
+            <p:extLst>
+              <p:ext uri="{386F3935-93C4-4BCD-93E2-E3B085C9AB24}">
+                <p16:designElem xmlns:p16="http://schemas.microsoft.com/office/powerpoint/2015/main" val="1"/>
+              </p:ext>
+            </p:extLst>
+          </p:nvPr>
+        </p:nvSpPr>
+        <p:spPr>
+          <a:xfrm>
+            <a:off x="7187511" y="325601"/>
+            <a:ext cx="1715190" cy="3908071"/>
+          </a:xfrm>
+          <a:prstGeom prst="rect">
+            <a:avLst/>
+          </a:prstGeom>
+          <a:solidFill>
+            <a:schemeClr val="accent1"/>
+          </a:solidFill>
+          <a:ln>
+            <a:noFill/>
+          </a:ln>
+        </p:spPr>
+        <p:style>
+          <a:lnRef idx="2">
+            <a:schemeClr val="accent1">
+              <a:shade val="50000"/>
+            </a:schemeClr>
+          </a:lnRef>
+          <a:fillRef idx="1">
+            <a:schemeClr val="accent1"/>
+          </a:fillRef>
+          <a:effectRef idx="0">
+            <a:schemeClr val="accent1"/>
+          </a:effectRef>
+          <a:fontRef idx="minor">
+            <a:schemeClr val="lt1"/>
+          </a:fontRef>
+        </p:style>
+        <p:txBody>
+          <a:bodyPr rtlCol="0" anchor="ctr"/>
+          <a:lstStyle/>
+          <a:p>
+            <a:pPr algn="ctr"/>
+            <a:endParaRPr lang="en-US" dirty="0"/>
+          </a:p>
+        </p:txBody>
+      </p:sp>
+      <p:sp>
+        <p:nvSpPr>
+          <p:cNvPr id="10" name="Rectangle 9">
+            <a:extLst>
+              <a:ext uri="{FF2B5EF4-FFF2-40B4-BE49-F238E27FC236}">
+                <a16:creationId xmlns:a16="http://schemas.microsoft.com/office/drawing/2014/main" id="{F6EE670A-A41A-44AD-BC1C-2090365EB5B3}"/>
+              </a:ext>
+              <a:ext uri="{C183D7F6-B498-43B3-948B-1728B52AA6E4}">
+                <adec:decorative xmlns:adec="http://schemas.microsoft.com/office/drawing/2017/decorative" val="1"/>
+              </a:ext>
+            </a:extLst>
+          </p:cNvPr>
+          <p:cNvSpPr>
+            <a:spLocks noGrp="1" noRot="1" noChangeAspect="1" noMove="1" noResize="1" noEditPoints="1" noAdjustHandles="1" noChangeArrowheads="1" noChangeShapeType="1" noTextEdit="1"/>
+          </p:cNvSpPr>
+          <p:nvPr>
+            <p:extLst>
+              <p:ext uri="{386F3935-93C4-4BCD-93E2-E3B085C9AB24}">
+                <p16:designElem xmlns:p16="http://schemas.microsoft.com/office/powerpoint/2015/main" val="1"/>
+              </p:ext>
+            </p:extLst>
+          </p:nvPr>
+        </p:nvSpPr>
+        <p:spPr>
+          <a:xfrm>
+            <a:off x="7187511" y="4394539"/>
+            <a:ext cx="1715190" cy="2029724"/>
+          </a:xfrm>
+          <a:prstGeom prst="rect">
+            <a:avLst/>
+          </a:prstGeom>
+          <a:solidFill>
+            <a:schemeClr val="tx2">
+              <a:alpha val="80000"/>
+            </a:schemeClr>
+          </a:solidFill>
+          <a:ln>
+            <a:noFill/>
+          </a:ln>
+        </p:spPr>
+        <p:style>
+          <a:lnRef idx="2">
+            <a:schemeClr val="accent1">
+              <a:shade val="50000"/>
+            </a:schemeClr>
+          </a:lnRef>
+          <a:fillRef idx="1">
+            <a:schemeClr val="accent1"/>
+          </a:fillRef>
+          <a:effectRef idx="0">
+            <a:schemeClr val="accent1"/>
+          </a:effectRef>
+          <a:fontRef idx="minor">
+            <a:schemeClr val="lt1"/>
+          </a:fontRef>
+        </p:style>
+        <p:txBody>
+          <a:bodyPr rtlCol="0" anchor="ctr"/>
+          <a:lstStyle/>
+          <a:p>
+            <a:pPr algn="ctr"/>
+            <a:endParaRPr lang="en-US"/>
           </a:p>
         </p:txBody>
       </p:sp>
@@ -18480,6 +19426,14 @@
 <file path=ppt/slides/slide25.xml><?xml version="1.0" encoding="utf-8"?>
 <p:sld xmlns:a="http://schemas.openxmlformats.org/drawingml/2006/main" xmlns:r="http://schemas.openxmlformats.org/officeDocument/2006/relationships" xmlns:p="http://schemas.openxmlformats.org/presentationml/2006/main">
   <p:cSld>
+    <p:bg>
+      <p:bgPr>
+        <a:solidFill>
+          <a:schemeClr val="bg1"/>
+        </a:solidFill>
+        <a:effectLst/>
+      </p:bgPr>
+    </p:bg>
     <p:spTree>
       <p:nvGrpSpPr>
         <p:cNvPr id="1" name=""/>
@@ -18504,9 +19458,16 @@
             <p:ph type="title"/>
           </p:nvPr>
         </p:nvSpPr>
-        <p:spPr/>
+        <p:spPr>
+          <a:xfrm>
+            <a:off x="768096" y="585216"/>
+            <a:ext cx="6013704" cy="1499616"/>
+          </a:xfrm>
+        </p:spPr>
         <p:txBody>
-          <a:bodyPr/>
+          <a:bodyPr>
+            <a:normAutofit/>
+          </a:bodyPr>
           <a:lstStyle/>
           <a:p>
             <a:r>
@@ -18526,9 +19487,16 @@
             <p:ph idx="1"/>
           </p:nvPr>
         </p:nvSpPr>
-        <p:spPr/>
+        <p:spPr>
+          <a:xfrm>
+            <a:off x="768096" y="2286000"/>
+            <a:ext cx="6013703" cy="4023360"/>
+          </a:xfrm>
+        </p:spPr>
         <p:txBody>
-          <a:bodyPr/>
+          <a:bodyPr>
+            <a:normAutofit/>
+          </a:bodyPr>
           <a:lstStyle/>
           <a:p>
             <a:r>
@@ -18549,6 +19517,134 @@
             <a:r>
               <a:t>Reprocess failed records</a:t>
             </a:r>
+          </a:p>
+        </p:txBody>
+      </p:sp>
+      <p:sp>
+        <p:nvSpPr>
+          <p:cNvPr id="8" name="Rectangle 7">
+            <a:extLst>
+              <a:ext uri="{FF2B5EF4-FFF2-40B4-BE49-F238E27FC236}">
+                <a16:creationId xmlns:a16="http://schemas.microsoft.com/office/drawing/2014/main" id="{77D7B666-D5E6-48CE-B26A-FB5E5C34AF90}"/>
+              </a:ext>
+              <a:ext uri="{C183D7F6-B498-43B3-948B-1728B52AA6E4}">
+                <adec:decorative xmlns:adec="http://schemas.microsoft.com/office/drawing/2017/decorative" val="1"/>
+              </a:ext>
+            </a:extLst>
+          </p:cNvPr>
+          <p:cNvSpPr>
+            <a:spLocks noGrp="1" noRot="1" noChangeAspect="1" noMove="1" noResize="1" noEditPoints="1" noAdjustHandles="1" noChangeArrowheads="1" noChangeShapeType="1" noTextEdit="1"/>
+          </p:cNvSpPr>
+          <p:nvPr>
+            <p:extLst>
+              <p:ext uri="{386F3935-93C4-4BCD-93E2-E3B085C9AB24}">
+                <p16:designElem xmlns:p16="http://schemas.microsoft.com/office/powerpoint/2015/main" val="1"/>
+              </p:ext>
+            </p:extLst>
+          </p:nvPr>
+        </p:nvSpPr>
+        <p:spPr>
+          <a:xfrm>
+            <a:off x="7187511" y="325601"/>
+            <a:ext cx="1715190" cy="3908071"/>
+          </a:xfrm>
+          <a:prstGeom prst="rect">
+            <a:avLst/>
+          </a:prstGeom>
+          <a:solidFill>
+            <a:schemeClr val="accent1"/>
+          </a:solidFill>
+          <a:ln>
+            <a:noFill/>
+          </a:ln>
+        </p:spPr>
+        <p:style>
+          <a:lnRef idx="2">
+            <a:schemeClr val="accent1">
+              <a:shade val="50000"/>
+            </a:schemeClr>
+          </a:lnRef>
+          <a:fillRef idx="1">
+            <a:schemeClr val="accent1"/>
+          </a:fillRef>
+          <a:effectRef idx="0">
+            <a:schemeClr val="accent1"/>
+          </a:effectRef>
+          <a:fontRef idx="minor">
+            <a:schemeClr val="lt1"/>
+          </a:fontRef>
+        </p:style>
+        <p:txBody>
+          <a:bodyPr rtlCol="0" anchor="ctr"/>
+          <a:lstStyle/>
+          <a:p>
+            <a:pPr algn="ctr"/>
+            <a:endParaRPr lang="en-US" dirty="0"/>
+          </a:p>
+        </p:txBody>
+      </p:sp>
+      <p:sp>
+        <p:nvSpPr>
+          <p:cNvPr id="10" name="Rectangle 9">
+            <a:extLst>
+              <a:ext uri="{FF2B5EF4-FFF2-40B4-BE49-F238E27FC236}">
+                <a16:creationId xmlns:a16="http://schemas.microsoft.com/office/drawing/2014/main" id="{F6EE670A-A41A-44AD-BC1C-2090365EB5B3}"/>
+              </a:ext>
+              <a:ext uri="{C183D7F6-B498-43B3-948B-1728B52AA6E4}">
+                <adec:decorative xmlns:adec="http://schemas.microsoft.com/office/drawing/2017/decorative" val="1"/>
+              </a:ext>
+            </a:extLst>
+          </p:cNvPr>
+          <p:cNvSpPr>
+            <a:spLocks noGrp="1" noRot="1" noChangeAspect="1" noMove="1" noResize="1" noEditPoints="1" noAdjustHandles="1" noChangeArrowheads="1" noChangeShapeType="1" noTextEdit="1"/>
+          </p:cNvSpPr>
+          <p:nvPr>
+            <p:extLst>
+              <p:ext uri="{386F3935-93C4-4BCD-93E2-E3B085C9AB24}">
+                <p16:designElem xmlns:p16="http://schemas.microsoft.com/office/powerpoint/2015/main" val="1"/>
+              </p:ext>
+            </p:extLst>
+          </p:nvPr>
+        </p:nvSpPr>
+        <p:spPr>
+          <a:xfrm>
+            <a:off x="7187511" y="4394539"/>
+            <a:ext cx="1715190" cy="2029724"/>
+          </a:xfrm>
+          <a:prstGeom prst="rect">
+            <a:avLst/>
+          </a:prstGeom>
+          <a:solidFill>
+            <a:schemeClr val="tx2">
+              <a:alpha val="80000"/>
+            </a:schemeClr>
+          </a:solidFill>
+          <a:ln>
+            <a:noFill/>
+          </a:ln>
+        </p:spPr>
+        <p:style>
+          <a:lnRef idx="2">
+            <a:schemeClr val="accent1">
+              <a:shade val="50000"/>
+            </a:schemeClr>
+          </a:lnRef>
+          <a:fillRef idx="1">
+            <a:schemeClr val="accent1"/>
+          </a:fillRef>
+          <a:effectRef idx="0">
+            <a:schemeClr val="accent1"/>
+          </a:effectRef>
+          <a:fontRef idx="minor">
+            <a:schemeClr val="lt1"/>
+          </a:fontRef>
+        </p:style>
+        <p:txBody>
+          <a:bodyPr rtlCol="0" anchor="ctr"/>
+          <a:lstStyle/>
+          <a:p>
+            <a:pPr algn="ctr"/>
+            <a:endParaRPr lang="en-US"/>
           </a:p>
         </p:txBody>
       </p:sp>
@@ -18563,6 +19659,14 @@
 <file path=ppt/slides/slide26.xml><?xml version="1.0" encoding="utf-8"?>
 <p:sld xmlns:a="http://schemas.openxmlformats.org/drawingml/2006/main" xmlns:r="http://schemas.openxmlformats.org/officeDocument/2006/relationships" xmlns:p="http://schemas.openxmlformats.org/presentationml/2006/main">
   <p:cSld>
+    <p:bg>
+      <p:bgPr>
+        <a:solidFill>
+          <a:srgbClr val="335B74"/>
+        </a:solidFill>
+        <a:effectLst/>
+      </p:bgPr>
+    </p:bg>
     <p:spTree>
       <p:nvGrpSpPr>
         <p:cNvPr id="1" name=""/>
@@ -18579,39 +19683,209 @@
       </p:grpSpPr>
       <p:sp>
         <p:nvSpPr>
-          <p:cNvPr id="3" name="Content Placeholder 2">
-            <a:extLst>
-              <a:ext uri="{FF2B5EF4-FFF2-40B4-BE49-F238E27FC236}">
-                <a16:creationId xmlns:a16="http://schemas.microsoft.com/office/drawing/2014/main" id="{BA4FD353-7D0C-803C-9C65-4261EE895043}"/>
-              </a:ext>
-            </a:extLst>
-          </p:cNvPr>
-          <p:cNvSpPr>
-            <a:spLocks noGrp="1"/>
-          </p:cNvSpPr>
-          <p:nvPr>
-            <p:ph idx="1"/>
-          </p:nvPr>
+          <p:cNvPr id="2" name="Circle 1"/>
+          <p:cNvSpPr/>
+          <p:nvPr/>
         </p:nvSpPr>
-        <p:spPr/>
+        <p:spPr>
+          <a:xfrm>
+            <a:off x="6344000" y="0"/>
+            <a:ext cx="2800000" cy="2800000"/>
+          </a:xfrm>
+          <a:prstGeom prst="ellipse">
+            <a:avLst/>
+          </a:prstGeom>
+          <a:solidFill>
+            <a:srgbClr val="27CED7">
+              <a:alpha val="15000"/>
+            </a:srgbClr>
+          </a:solidFill>
+          <a:ln>
+            <a:noFill/>
+          </a:ln>
+        </p:spPr>
         <p:txBody>
           <a:bodyPr/>
           <a:lstStyle/>
           <a:p>
+            <a:endParaRPr lang="en-US"/>
+          </a:p>
+        </p:txBody>
+      </p:sp>
+      <p:sp>
+        <p:nvSpPr>
+          <p:cNvPr id="3" name="Circle 2"/>
+          <p:cNvSpPr/>
+          <p:nvPr/>
+        </p:nvSpPr>
+        <p:spPr>
+          <a:xfrm>
+            <a:off x="0" y="4858000"/>
+            <a:ext cx="2000000" cy="2000000"/>
+          </a:xfrm>
+          <a:prstGeom prst="ellipse">
+            <a:avLst/>
+          </a:prstGeom>
+          <a:solidFill>
+            <a:srgbClr val="1CADE4">
+              <a:alpha val="12000"/>
+            </a:srgbClr>
+          </a:solidFill>
+          <a:ln>
+            <a:noFill/>
+          </a:ln>
+        </p:spPr>
+        <p:txBody>
+          <a:bodyPr/>
+          <a:lstStyle/>
+          <a:p>
+            <a:endParaRPr lang="en-US"/>
+          </a:p>
+        </p:txBody>
+      </p:sp>
+      <p:sp>
+        <p:nvSpPr>
+          <p:cNvPr id="4" name="Label"/>
+          <p:cNvSpPr/>
+          <p:nvPr/>
+        </p:nvSpPr>
+        <p:spPr>
+          <a:xfrm>
+            <a:off x="3200000" y="1900000"/>
+            <a:ext cx="2744000" cy="400000"/>
+          </a:xfrm>
+          <a:prstGeom prst="roundRect">
+            <a:avLst>
+              <a:gd name="adj" fmla="val 50000"/>
+            </a:avLst>
+          </a:prstGeom>
+          <a:solidFill>
+            <a:srgbClr val="27CED7"/>
+          </a:solidFill>
+          <a:ln>
+            <a:noFill/>
+          </a:ln>
+        </p:spPr>
+        <p:txBody>
+          <a:bodyPr lIns="91440" tIns="45720" rIns="91440" bIns="45720" anchor="ctr" anchorCtr="1"/>
+          <a:lstStyle/>
+          <a:p>
             <a:pPr algn="ctr"/>
-            <a:endParaRPr lang="en-US" sz="4000" dirty="0"/>
-          </a:p>
+            <a:r>
+              <a:rPr lang="en-US" sz="1600" b="1" spc="300">
+                <a:solidFill>
+                  <a:srgbClr val="FFFFFF"/>
+                </a:solidFill>
+                <a:latin typeface="Calibri"/>
+                <a:cs typeface="Calibri"/>
+              </a:rPr>
+              <a:t>HANDS-ON EXERCISE</a:t>
+            </a:r>
+          </a:p>
+        </p:txBody>
+      </p:sp>
+      <p:sp>
+        <p:nvSpPr>
+          <p:cNvPr id="5" name="MainTitle"/>
+          <p:cNvSpPr/>
+          <p:nvPr/>
+        </p:nvSpPr>
+        <p:spPr>
+          <a:xfrm>
+            <a:off x="1200000" y="2500000"/>
+            <a:ext cx="6744000" cy="900000"/>
+          </a:xfrm>
+          <a:prstGeom prst="rect">
+            <a:avLst/>
+          </a:prstGeom>
+          <a:noFill/>
+          <a:ln>
+            <a:noFill/>
+          </a:ln>
+        </p:spPr>
+        <p:txBody>
+          <a:bodyPr lIns="0" tIns="0" rIns="0" bIns="0" anchor="ctr" anchorCtr="1"/>
+          <a:lstStyle/>
           <a:p>
             <a:pPr algn="ctr"/>
-            <a:endParaRPr lang="en-US" sz="4000" dirty="0"/>
-          </a:p>
+            <a:r>
+              <a:rPr lang="en-US" sz="4800" b="1">
+                <a:solidFill>
+                  <a:srgbClr val="FFFFFF"/>
+                </a:solidFill>
+                <a:latin typeface="Calibri"/>
+                <a:cs typeface="Calibri"/>
+              </a:rPr>
+              <a:t>Lab 6, 7 &amp; 8</a:t>
+            </a:r>
+          </a:p>
+        </p:txBody>
+      </p:sp>
+      <p:sp>
+        <p:nvSpPr>
+          <p:cNvPr id="6" name="Subtitle"/>
+          <p:cNvSpPr/>
+          <p:nvPr/>
+        </p:nvSpPr>
+        <p:spPr>
+          <a:xfrm>
+            <a:off x="1800000" y="3500000"/>
+            <a:ext cx="5544000" cy="500000"/>
+          </a:xfrm>
+          <a:prstGeom prst="rect">
+            <a:avLst/>
+          </a:prstGeom>
+          <a:noFill/>
+          <a:ln>
+            <a:noFill/>
+          </a:ln>
+        </p:spPr>
+        <p:txBody>
+          <a:bodyPr lIns="0" tIns="0" rIns="0" bIns="0" anchor="t" anchorCtr="1"/>
+          <a:lstStyle/>
           <a:p>
             <a:pPr algn="ctr"/>
             <a:r>
-              <a:rPr lang="en-US" sz="4000" dirty="0"/>
-              <a:t>COMPLETE LAB-6,7,8</a:t>
-            </a:r>
-            <a:endParaRPr lang="en-IN" dirty="0"/>
+              <a:rPr lang="en-US" sz="1800">
+                <a:solidFill>
+                  <a:srgbClr val="DFE3E5"/>
+                </a:solidFill>
+                <a:latin typeface="Calibri"/>
+                <a:cs typeface="Calibri"/>
+              </a:rPr>
+              <a:t>Automated Remediation &amp; Self-Healing Pipelines</a:t>
+            </a:r>
+          </a:p>
+        </p:txBody>
+      </p:sp>
+      <p:sp>
+        <p:nvSpPr>
+          <p:cNvPr id="7" name="BottomAccent"/>
+          <p:cNvSpPr/>
+          <p:nvPr/>
+        </p:nvSpPr>
+        <p:spPr>
+          <a:xfrm>
+            <a:off x="3800000" y="4200000"/>
+            <a:ext cx="1544000" cy="36000"/>
+          </a:xfrm>
+          <a:prstGeom prst="rect">
+            <a:avLst/>
+          </a:prstGeom>
+          <a:solidFill>
+            <a:srgbClr val="27CED7">
+              <a:alpha val="60000"/>
+            </a:srgbClr>
+          </a:solidFill>
+          <a:ln>
+            <a:noFill/>
+          </a:ln>
+        </p:spPr>
+        <p:txBody>
+          <a:bodyPr/>
+          <a:lstStyle/>
+          <a:p>
+            <a:endParaRPr lang="en-US"/>
           </a:p>
         </p:txBody>
       </p:sp>
@@ -18962,6 +20236,14 @@
 <file path=ppt/slides/slide29.xml><?xml version="1.0" encoding="utf-8"?>
 <p:sld xmlns:a="http://schemas.openxmlformats.org/drawingml/2006/main" xmlns:r="http://schemas.openxmlformats.org/officeDocument/2006/relationships" xmlns:p="http://schemas.openxmlformats.org/presentationml/2006/main">
   <p:cSld>
+    <p:bg>
+      <p:bgPr>
+        <a:solidFill>
+          <a:srgbClr val="335B74"/>
+        </a:solidFill>
+        <a:effectLst/>
+      </p:bgPr>
+    </p:bg>
     <p:spTree>
       <p:nvGrpSpPr>
         <p:cNvPr id="1" name=""/>
@@ -18978,40 +20260,209 @@
       </p:grpSpPr>
       <p:sp>
         <p:nvSpPr>
-          <p:cNvPr id="3" name="Content Placeholder 2">
-            <a:extLst>
-              <a:ext uri="{FF2B5EF4-FFF2-40B4-BE49-F238E27FC236}">
-                <a16:creationId xmlns:a16="http://schemas.microsoft.com/office/drawing/2014/main" id="{E8F05E00-52A0-CAD5-CF7A-E29A7C337B57}"/>
-              </a:ext>
-            </a:extLst>
-          </p:cNvPr>
-          <p:cNvSpPr>
-            <a:spLocks noGrp="1"/>
-          </p:cNvSpPr>
-          <p:nvPr>
-            <p:ph idx="1"/>
-          </p:nvPr>
+          <p:cNvPr id="2" name="Circle 1"/>
+          <p:cNvSpPr/>
+          <p:nvPr/>
         </p:nvSpPr>
-        <p:spPr/>
+        <p:spPr>
+          <a:xfrm>
+            <a:off x="6344000" y="0"/>
+            <a:ext cx="2800000" cy="2800000"/>
+          </a:xfrm>
+          <a:prstGeom prst="ellipse">
+            <a:avLst/>
+          </a:prstGeom>
+          <a:solidFill>
+            <a:srgbClr val="27CED7">
+              <a:alpha val="15000"/>
+            </a:srgbClr>
+          </a:solidFill>
+          <a:ln>
+            <a:noFill/>
+          </a:ln>
+        </p:spPr>
         <p:txBody>
           <a:bodyPr/>
           <a:lstStyle/>
           <a:p>
-            <a:endParaRPr lang="en-US" dirty="0"/>
-          </a:p>
-          <a:p>
-            <a:endParaRPr lang="en-US" dirty="0"/>
-          </a:p>
-          <a:p>
-            <a:endParaRPr lang="en-US" dirty="0"/>
-          </a:p>
+            <a:endParaRPr lang="en-US"/>
+          </a:p>
+        </p:txBody>
+      </p:sp>
+      <p:sp>
+        <p:nvSpPr>
+          <p:cNvPr id="3" name="Circle 2"/>
+          <p:cNvSpPr/>
+          <p:nvPr/>
+        </p:nvSpPr>
+        <p:spPr>
+          <a:xfrm>
+            <a:off x="0" y="4858000"/>
+            <a:ext cx="2000000" cy="2000000"/>
+          </a:xfrm>
+          <a:prstGeom prst="ellipse">
+            <a:avLst/>
+          </a:prstGeom>
+          <a:solidFill>
+            <a:srgbClr val="1CADE4">
+              <a:alpha val="12000"/>
+            </a:srgbClr>
+          </a:solidFill>
+          <a:ln>
+            <a:noFill/>
+          </a:ln>
+        </p:spPr>
+        <p:txBody>
+          <a:bodyPr/>
+          <a:lstStyle/>
+          <a:p>
+            <a:endParaRPr lang="en-US"/>
+          </a:p>
+        </p:txBody>
+      </p:sp>
+      <p:sp>
+        <p:nvSpPr>
+          <p:cNvPr id="4" name="Label"/>
+          <p:cNvSpPr/>
+          <p:nvPr/>
+        </p:nvSpPr>
+        <p:spPr>
+          <a:xfrm>
+            <a:off x="3200000" y="1900000"/>
+            <a:ext cx="2744000" cy="400000"/>
+          </a:xfrm>
+          <a:prstGeom prst="roundRect">
+            <a:avLst>
+              <a:gd name="adj" fmla="val 50000"/>
+            </a:avLst>
+          </a:prstGeom>
+          <a:solidFill>
+            <a:srgbClr val="27CED7"/>
+          </a:solidFill>
+          <a:ln>
+            <a:noFill/>
+          </a:ln>
+        </p:spPr>
+        <p:txBody>
+          <a:bodyPr lIns="91440" tIns="45720" rIns="91440" bIns="45720" anchor="ctr" anchorCtr="1"/>
+          <a:lstStyle/>
           <a:p>
             <a:pPr algn="ctr"/>
             <a:r>
-              <a:rPr lang="en-US" sz="4400" dirty="0"/>
-              <a:t>PERFORM LAB-9</a:t>
-            </a:r>
-            <a:endParaRPr lang="en-IN" dirty="0"/>
+              <a:rPr lang="en-US" sz="1600" b="1" spc="300">
+                <a:solidFill>
+                  <a:srgbClr val="FFFFFF"/>
+                </a:solidFill>
+                <a:latin typeface="Calibri"/>
+                <a:cs typeface="Calibri"/>
+              </a:rPr>
+              <a:t>HANDS-ON EXERCISE</a:t>
+            </a:r>
+          </a:p>
+        </p:txBody>
+      </p:sp>
+      <p:sp>
+        <p:nvSpPr>
+          <p:cNvPr id="5" name="MainTitle"/>
+          <p:cNvSpPr/>
+          <p:nvPr/>
+        </p:nvSpPr>
+        <p:spPr>
+          <a:xfrm>
+            <a:off x="1200000" y="2500000"/>
+            <a:ext cx="6744000" cy="900000"/>
+          </a:xfrm>
+          <a:prstGeom prst="rect">
+            <a:avLst/>
+          </a:prstGeom>
+          <a:noFill/>
+          <a:ln>
+            <a:noFill/>
+          </a:ln>
+        </p:spPr>
+        <p:txBody>
+          <a:bodyPr lIns="0" tIns="0" rIns="0" bIns="0" anchor="ctr" anchorCtr="1"/>
+          <a:lstStyle/>
+          <a:p>
+            <a:pPr algn="ctr"/>
+            <a:r>
+              <a:rPr lang="en-US" sz="4800" b="1">
+                <a:solidFill>
+                  <a:srgbClr val="FFFFFF"/>
+                </a:solidFill>
+                <a:latin typeface="Calibri"/>
+                <a:cs typeface="Calibri"/>
+              </a:rPr>
+              <a:t>Lab 9</a:t>
+            </a:r>
+          </a:p>
+        </p:txBody>
+      </p:sp>
+      <p:sp>
+        <p:nvSpPr>
+          <p:cNvPr id="6" name="Subtitle"/>
+          <p:cNvSpPr/>
+          <p:nvPr/>
+        </p:nvSpPr>
+        <p:spPr>
+          <a:xfrm>
+            <a:off x="1800000" y="3500000"/>
+            <a:ext cx="5544000" cy="500000"/>
+          </a:xfrm>
+          <a:prstGeom prst="rect">
+            <a:avLst/>
+          </a:prstGeom>
+          <a:noFill/>
+          <a:ln>
+            <a:noFill/>
+          </a:ln>
+        </p:spPr>
+        <p:txBody>
+          <a:bodyPr lIns="0" tIns="0" rIns="0" bIns="0" anchor="t" anchorCtr="1"/>
+          <a:lstStyle/>
+          <a:p>
+            <a:pPr algn="ctr"/>
+            <a:r>
+              <a:rPr lang="en-US" sz="1800">
+                <a:solidFill>
+                  <a:srgbClr val="DFE3E5"/>
+                </a:solidFill>
+                <a:latin typeface="Calibri"/>
+                <a:cs typeface="Calibri"/>
+              </a:rPr>
+              <a:t>PII Detection &amp; Classification</a:t>
+            </a:r>
+          </a:p>
+        </p:txBody>
+      </p:sp>
+      <p:sp>
+        <p:nvSpPr>
+          <p:cNvPr id="7" name="BottomAccent"/>
+          <p:cNvSpPr/>
+          <p:nvPr/>
+        </p:nvSpPr>
+        <p:spPr>
+          <a:xfrm>
+            <a:off x="3800000" y="4200000"/>
+            <a:ext cx="1544000" cy="36000"/>
+          </a:xfrm>
+          <a:prstGeom prst="rect">
+            <a:avLst/>
+          </a:prstGeom>
+          <a:solidFill>
+            <a:srgbClr val="27CED7">
+              <a:alpha val="60000"/>
+            </a:srgbClr>
+          </a:solidFill>
+          <a:ln>
+            <a:noFill/>
+          </a:ln>
+        </p:spPr>
+        <p:txBody>
+          <a:bodyPr/>
+          <a:lstStyle/>
+          <a:p>
+            <a:endParaRPr lang="en-US"/>
           </a:p>
         </p:txBody>
       </p:sp>
@@ -19588,6 +21039,14 @@
 <file path=ppt/slides/slide33.xml><?xml version="1.0" encoding="utf-8"?>
 <p:sld xmlns:a="http://schemas.openxmlformats.org/drawingml/2006/main" xmlns:r="http://schemas.openxmlformats.org/officeDocument/2006/relationships" xmlns:p="http://schemas.openxmlformats.org/presentationml/2006/main">
   <p:cSld>
+    <p:bg>
+      <p:bgPr>
+        <a:solidFill>
+          <a:srgbClr val="335B74"/>
+        </a:solidFill>
+        <a:effectLst/>
+      </p:bgPr>
+    </p:bg>
     <p:spTree>
       <p:nvGrpSpPr>
         <p:cNvPr id="1" name=""/>
@@ -19604,41 +21063,209 @@
       </p:grpSpPr>
       <p:sp>
         <p:nvSpPr>
-          <p:cNvPr id="3" name="Content Placeholder 2">
-            <a:extLst>
-              <a:ext uri="{FF2B5EF4-FFF2-40B4-BE49-F238E27FC236}">
-                <a16:creationId xmlns:a16="http://schemas.microsoft.com/office/drawing/2014/main" id="{2E851C6A-5214-E5B7-7AB4-E7F21ECE3DAE}"/>
-              </a:ext>
-            </a:extLst>
-          </p:cNvPr>
-          <p:cNvSpPr>
-            <a:spLocks noGrp="1"/>
-          </p:cNvSpPr>
-          <p:nvPr>
-            <p:ph idx="1"/>
-          </p:nvPr>
+          <p:cNvPr id="2" name="Circle 1"/>
+          <p:cNvSpPr/>
+          <p:nvPr/>
         </p:nvSpPr>
-        <p:spPr/>
+        <p:spPr>
+          <a:xfrm>
+            <a:off x="6344000" y="0"/>
+            <a:ext cx="2800000" cy="2800000"/>
+          </a:xfrm>
+          <a:prstGeom prst="ellipse">
+            <a:avLst/>
+          </a:prstGeom>
+          <a:solidFill>
+            <a:srgbClr val="27CED7">
+              <a:alpha val="15000"/>
+            </a:srgbClr>
+          </a:solidFill>
+          <a:ln>
+            <a:noFill/>
+          </a:ln>
+        </p:spPr>
         <p:txBody>
-          <a:bodyPr>
-            <a:normAutofit/>
-          </a:bodyPr>
+          <a:bodyPr/>
           <a:lstStyle/>
           <a:p>
+            <a:endParaRPr lang="en-US"/>
+          </a:p>
+        </p:txBody>
+      </p:sp>
+      <p:sp>
+        <p:nvSpPr>
+          <p:cNvPr id="3" name="Circle 2"/>
+          <p:cNvSpPr/>
+          <p:nvPr/>
+        </p:nvSpPr>
+        <p:spPr>
+          <a:xfrm>
+            <a:off x="0" y="4858000"/>
+            <a:ext cx="2000000" cy="2000000"/>
+          </a:xfrm>
+          <a:prstGeom prst="ellipse">
+            <a:avLst/>
+          </a:prstGeom>
+          <a:solidFill>
+            <a:srgbClr val="1CADE4">
+              <a:alpha val="12000"/>
+            </a:srgbClr>
+          </a:solidFill>
+          <a:ln>
+            <a:noFill/>
+          </a:ln>
+        </p:spPr>
+        <p:txBody>
+          <a:bodyPr/>
+          <a:lstStyle/>
+          <a:p>
+            <a:endParaRPr lang="en-US"/>
+          </a:p>
+        </p:txBody>
+      </p:sp>
+      <p:sp>
+        <p:nvSpPr>
+          <p:cNvPr id="4" name="Label"/>
+          <p:cNvSpPr/>
+          <p:nvPr/>
+        </p:nvSpPr>
+        <p:spPr>
+          <a:xfrm>
+            <a:off x="3200000" y="1900000"/>
+            <a:ext cx="2744000" cy="400000"/>
+          </a:xfrm>
+          <a:prstGeom prst="roundRect">
+            <a:avLst>
+              <a:gd name="adj" fmla="val 50000"/>
+            </a:avLst>
+          </a:prstGeom>
+          <a:solidFill>
+            <a:srgbClr val="27CED7"/>
+          </a:solidFill>
+          <a:ln>
+            <a:noFill/>
+          </a:ln>
+        </p:spPr>
+        <p:txBody>
+          <a:bodyPr lIns="91440" tIns="45720" rIns="91440" bIns="45720" anchor="ctr" anchorCtr="1"/>
+          <a:lstStyle/>
+          <a:p>
             <a:pPr algn="ctr"/>
-            <a:endParaRPr lang="en-US" sz="3600" dirty="0"/>
-          </a:p>
+            <a:r>
+              <a:rPr lang="en-US" sz="1600" b="1" spc="300">
+                <a:solidFill>
+                  <a:srgbClr val="FFFFFF"/>
+                </a:solidFill>
+                <a:latin typeface="Calibri"/>
+                <a:cs typeface="Calibri"/>
+              </a:rPr>
+              <a:t>HANDS-ON EXERCISE</a:t>
+            </a:r>
+          </a:p>
+        </p:txBody>
+      </p:sp>
+      <p:sp>
+        <p:nvSpPr>
+          <p:cNvPr id="5" name="MainTitle"/>
+          <p:cNvSpPr/>
+          <p:nvPr/>
+        </p:nvSpPr>
+        <p:spPr>
+          <a:xfrm>
+            <a:off x="1200000" y="2500000"/>
+            <a:ext cx="6744000" cy="900000"/>
+          </a:xfrm>
+          <a:prstGeom prst="rect">
+            <a:avLst/>
+          </a:prstGeom>
+          <a:noFill/>
+          <a:ln>
+            <a:noFill/>
+          </a:ln>
+        </p:spPr>
+        <p:txBody>
+          <a:bodyPr lIns="0" tIns="0" rIns="0" bIns="0" anchor="ctr" anchorCtr="1"/>
+          <a:lstStyle/>
           <a:p>
             <a:pPr algn="ctr"/>
-            <a:endParaRPr lang="en-US" sz="3600" dirty="0"/>
-          </a:p>
+            <a:r>
+              <a:rPr lang="en-US" sz="4800" b="1">
+                <a:solidFill>
+                  <a:srgbClr val="FFFFFF"/>
+                </a:solidFill>
+                <a:latin typeface="Calibri"/>
+                <a:cs typeface="Calibri"/>
+              </a:rPr>
+              <a:t>Lab 10</a:t>
+            </a:r>
+          </a:p>
+        </p:txBody>
+      </p:sp>
+      <p:sp>
+        <p:nvSpPr>
+          <p:cNvPr id="6" name="Subtitle"/>
+          <p:cNvSpPr/>
+          <p:nvPr/>
+        </p:nvSpPr>
+        <p:spPr>
+          <a:xfrm>
+            <a:off x="1800000" y="3500000"/>
+            <a:ext cx="5544000" cy="500000"/>
+          </a:xfrm>
+          <a:prstGeom prst="rect">
+            <a:avLst/>
+          </a:prstGeom>
+          <a:noFill/>
+          <a:ln>
+            <a:noFill/>
+          </a:ln>
+        </p:spPr>
+        <p:txBody>
+          <a:bodyPr lIns="0" tIns="0" rIns="0" bIns="0" anchor="t" anchorCtr="1"/>
+          <a:lstStyle/>
           <a:p>
             <a:pPr algn="ctr"/>
             <a:r>
-              <a:rPr lang="en-US" sz="3600" dirty="0"/>
-              <a:t>LAB-10</a:t>
-            </a:r>
-            <a:endParaRPr lang="en-IN" sz="3600" dirty="0"/>
+              <a:rPr lang="en-US" sz="1800">
+                <a:solidFill>
+                  <a:srgbClr val="DFE3E5"/>
+                </a:solidFill>
+                <a:latin typeface="Calibri"/>
+                <a:cs typeface="Calibri"/>
+              </a:rPr>
+              <a:t>Self-Healing Pipeline &amp; AI Diagnosis</a:t>
+            </a:r>
+          </a:p>
+        </p:txBody>
+      </p:sp>
+      <p:sp>
+        <p:nvSpPr>
+          <p:cNvPr id="7" name="BottomAccent"/>
+          <p:cNvSpPr/>
+          <p:nvPr/>
+        </p:nvSpPr>
+        <p:spPr>
+          <a:xfrm>
+            <a:off x="3800000" y="4200000"/>
+            <a:ext cx="1544000" cy="36000"/>
+          </a:xfrm>
+          <a:prstGeom prst="rect">
+            <a:avLst/>
+          </a:prstGeom>
+          <a:solidFill>
+            <a:srgbClr val="27CED7">
+              <a:alpha val="60000"/>
+            </a:srgbClr>
+          </a:solidFill>
+          <a:ln>
+            <a:noFill/>
+          </a:ln>
+        </p:spPr>
+        <p:txBody>
+          <a:bodyPr/>
+          <a:lstStyle/>
+          <a:p>
+            <a:endParaRPr lang="en-US"/>
           </a:p>
         </p:txBody>
       </p:sp>
@@ -19939,6 +21566,14 @@
 <file path=ppt/slides/slide36.xml><?xml version="1.0" encoding="utf-8"?>
 <p:sld xmlns:a="http://schemas.openxmlformats.org/drawingml/2006/main" xmlns:r="http://schemas.openxmlformats.org/officeDocument/2006/relationships" xmlns:p="http://schemas.openxmlformats.org/presentationml/2006/main">
   <p:cSld>
+    <p:bg>
+      <p:bgPr>
+        <a:solidFill>
+          <a:srgbClr val="335B74"/>
+        </a:solidFill>
+        <a:effectLst/>
+      </p:bgPr>
+    </p:bg>
     <p:spTree>
       <p:nvGrpSpPr>
         <p:cNvPr id="1" name=""/>
@@ -19955,41 +21590,209 @@
       </p:grpSpPr>
       <p:sp>
         <p:nvSpPr>
-          <p:cNvPr id="3" name="Content Placeholder 2">
-            <a:extLst>
-              <a:ext uri="{FF2B5EF4-FFF2-40B4-BE49-F238E27FC236}">
-                <a16:creationId xmlns:a16="http://schemas.microsoft.com/office/drawing/2014/main" id="{5714BFD6-5BD3-75DE-D051-066026A4B3ED}"/>
-              </a:ext>
-            </a:extLst>
-          </p:cNvPr>
-          <p:cNvSpPr>
-            <a:spLocks noGrp="1"/>
-          </p:cNvSpPr>
-          <p:nvPr>
-            <p:ph idx="1"/>
-          </p:nvPr>
+          <p:cNvPr id="2" name="Circle 1"/>
+          <p:cNvSpPr/>
+          <p:nvPr/>
         </p:nvSpPr>
-        <p:spPr/>
+        <p:spPr>
+          <a:xfrm>
+            <a:off x="6344000" y="0"/>
+            <a:ext cx="2800000" cy="2800000"/>
+          </a:xfrm>
+          <a:prstGeom prst="ellipse">
+            <a:avLst/>
+          </a:prstGeom>
+          <a:solidFill>
+            <a:srgbClr val="27CED7">
+              <a:alpha val="15000"/>
+            </a:srgbClr>
+          </a:solidFill>
+          <a:ln>
+            <a:noFill/>
+          </a:ln>
+        </p:spPr>
         <p:txBody>
-          <a:bodyPr>
-            <a:normAutofit/>
-          </a:bodyPr>
+          <a:bodyPr/>
           <a:lstStyle/>
           <a:p>
+            <a:endParaRPr lang="en-US"/>
+          </a:p>
+        </p:txBody>
+      </p:sp>
+      <p:sp>
+        <p:nvSpPr>
+          <p:cNvPr id="3" name="Circle 2"/>
+          <p:cNvSpPr/>
+          <p:nvPr/>
+        </p:nvSpPr>
+        <p:spPr>
+          <a:xfrm>
+            <a:off x="0" y="4858000"/>
+            <a:ext cx="2000000" cy="2000000"/>
+          </a:xfrm>
+          <a:prstGeom prst="ellipse">
+            <a:avLst/>
+          </a:prstGeom>
+          <a:solidFill>
+            <a:srgbClr val="1CADE4">
+              <a:alpha val="12000"/>
+            </a:srgbClr>
+          </a:solidFill>
+          <a:ln>
+            <a:noFill/>
+          </a:ln>
+        </p:spPr>
+        <p:txBody>
+          <a:bodyPr/>
+          <a:lstStyle/>
+          <a:p>
+            <a:endParaRPr lang="en-US"/>
+          </a:p>
+        </p:txBody>
+      </p:sp>
+      <p:sp>
+        <p:nvSpPr>
+          <p:cNvPr id="4" name="Label"/>
+          <p:cNvSpPr/>
+          <p:nvPr/>
+        </p:nvSpPr>
+        <p:spPr>
+          <a:xfrm>
+            <a:off x="3200000" y="1900000"/>
+            <a:ext cx="2744000" cy="400000"/>
+          </a:xfrm>
+          <a:prstGeom prst="roundRect">
+            <a:avLst>
+              <a:gd name="adj" fmla="val 50000"/>
+            </a:avLst>
+          </a:prstGeom>
+          <a:solidFill>
+            <a:srgbClr val="27CED7"/>
+          </a:solidFill>
+          <a:ln>
+            <a:noFill/>
+          </a:ln>
+        </p:spPr>
+        <p:txBody>
+          <a:bodyPr lIns="91440" tIns="45720" rIns="91440" bIns="45720" anchor="ctr" anchorCtr="1"/>
+          <a:lstStyle/>
+          <a:p>
             <a:pPr algn="ctr"/>
-            <a:endParaRPr lang="en-US" sz="3200" dirty="0"/>
-          </a:p>
+            <a:r>
+              <a:rPr lang="en-US" sz="1600" b="1" spc="300">
+                <a:solidFill>
+                  <a:srgbClr val="FFFFFF"/>
+                </a:solidFill>
+                <a:latin typeface="Calibri"/>
+                <a:cs typeface="Calibri"/>
+              </a:rPr>
+              <a:t>HANDS-ON EXERCISE</a:t>
+            </a:r>
+          </a:p>
+        </p:txBody>
+      </p:sp>
+      <p:sp>
+        <p:nvSpPr>
+          <p:cNvPr id="5" name="MainTitle"/>
+          <p:cNvSpPr/>
+          <p:nvPr/>
+        </p:nvSpPr>
+        <p:spPr>
+          <a:xfrm>
+            <a:off x="1200000" y="2500000"/>
+            <a:ext cx="6744000" cy="900000"/>
+          </a:xfrm>
+          <a:prstGeom prst="rect">
+            <a:avLst/>
+          </a:prstGeom>
+          <a:noFill/>
+          <a:ln>
+            <a:noFill/>
+          </a:ln>
+        </p:spPr>
+        <p:txBody>
+          <a:bodyPr lIns="0" tIns="0" rIns="0" bIns="0" anchor="ctr" anchorCtr="1"/>
+          <a:lstStyle/>
           <a:p>
             <a:pPr algn="ctr"/>
-            <a:endParaRPr lang="en-US" sz="3200" dirty="0"/>
-          </a:p>
+            <a:r>
+              <a:rPr lang="en-US" sz="4800" b="1">
+                <a:solidFill>
+                  <a:srgbClr val="FFFFFF"/>
+                </a:solidFill>
+                <a:latin typeface="Calibri"/>
+                <a:cs typeface="Calibri"/>
+              </a:rPr>
+              <a:t>Lab 11</a:t>
+            </a:r>
+          </a:p>
+        </p:txBody>
+      </p:sp>
+      <p:sp>
+        <p:nvSpPr>
+          <p:cNvPr id="6" name="Subtitle"/>
+          <p:cNvSpPr/>
+          <p:nvPr/>
+        </p:nvSpPr>
+        <p:spPr>
+          <a:xfrm>
+            <a:off x="1800000" y="3500000"/>
+            <a:ext cx="5544000" cy="500000"/>
+          </a:xfrm>
+          <a:prstGeom prst="rect">
+            <a:avLst/>
+          </a:prstGeom>
+          <a:noFill/>
+          <a:ln>
+            <a:noFill/>
+          </a:ln>
+        </p:spPr>
+        <p:txBody>
+          <a:bodyPr lIns="0" tIns="0" rIns="0" bIns="0" anchor="t" anchorCtr="1"/>
+          <a:lstStyle/>
           <a:p>
             <a:pPr algn="ctr"/>
             <a:r>
-              <a:rPr lang="en-US" sz="3200" dirty="0"/>
-              <a:t>PERFORM LAB-11</a:t>
-            </a:r>
-            <a:endParaRPr lang="en-IN" sz="3200" dirty="0"/>
+              <a:rPr lang="en-US" sz="1800">
+                <a:solidFill>
+                  <a:srgbClr val="DFE3E5"/>
+                </a:solidFill>
+                <a:latin typeface="Calibri"/>
+                <a:cs typeface="Calibri"/>
+              </a:rPr>
+              <a:t>LangGraph for Self-Healing</a:t>
+            </a:r>
+          </a:p>
+        </p:txBody>
+      </p:sp>
+      <p:sp>
+        <p:nvSpPr>
+          <p:cNvPr id="7" name="BottomAccent"/>
+          <p:cNvSpPr/>
+          <p:nvPr/>
+        </p:nvSpPr>
+        <p:spPr>
+          <a:xfrm>
+            <a:off x="3800000" y="4200000"/>
+            <a:ext cx="1544000" cy="36000"/>
+          </a:xfrm>
+          <a:prstGeom prst="rect">
+            <a:avLst/>
+          </a:prstGeom>
+          <a:solidFill>
+            <a:srgbClr val="27CED7">
+              <a:alpha val="60000"/>
+            </a:srgbClr>
+          </a:solidFill>
+          <a:ln>
+            <a:noFill/>
+          </a:ln>
+        </p:spPr>
+        <p:txBody>
+          <a:bodyPr/>
+          <a:lstStyle/>
+          <a:p>
+            <a:endParaRPr lang="en-US"/>
           </a:p>
         </p:txBody>
       </p:sp>
@@ -20136,6 +21939,14 @@
 <file path=ppt/slides/slide38.xml><?xml version="1.0" encoding="utf-8"?>
 <p:sld xmlns:a="http://schemas.openxmlformats.org/drawingml/2006/main" xmlns:r="http://schemas.openxmlformats.org/officeDocument/2006/relationships" xmlns:p="http://schemas.openxmlformats.org/presentationml/2006/main">
   <p:cSld>
+    <p:bg>
+      <p:bgPr>
+        <a:solidFill>
+          <a:srgbClr val="335B74"/>
+        </a:solidFill>
+        <a:effectLst/>
+      </p:bgPr>
+    </p:bg>
     <p:spTree>
       <p:nvGrpSpPr>
         <p:cNvPr id="1" name=""/>
@@ -20152,39 +21963,209 @@
       </p:grpSpPr>
       <p:sp>
         <p:nvSpPr>
-          <p:cNvPr id="3" name="Content Placeholder 2">
-            <a:extLst>
-              <a:ext uri="{FF2B5EF4-FFF2-40B4-BE49-F238E27FC236}">
-                <a16:creationId xmlns:a16="http://schemas.microsoft.com/office/drawing/2014/main" id="{C1911BB0-4074-AD78-2622-089FE2C5C5E0}"/>
-              </a:ext>
-            </a:extLst>
-          </p:cNvPr>
-          <p:cNvSpPr>
-            <a:spLocks noGrp="1"/>
-          </p:cNvSpPr>
-          <p:nvPr>
-            <p:ph idx="1"/>
-          </p:nvPr>
+          <p:cNvPr id="2" name="Circle 1"/>
+          <p:cNvSpPr/>
+          <p:nvPr/>
         </p:nvSpPr>
-        <p:spPr/>
+        <p:spPr>
+          <a:xfrm>
+            <a:off x="6344000" y="0"/>
+            <a:ext cx="2800000" cy="2800000"/>
+          </a:xfrm>
+          <a:prstGeom prst="ellipse">
+            <a:avLst/>
+          </a:prstGeom>
+          <a:solidFill>
+            <a:srgbClr val="27CED7">
+              <a:alpha val="15000"/>
+            </a:srgbClr>
+          </a:solidFill>
+          <a:ln>
+            <a:noFill/>
+          </a:ln>
+        </p:spPr>
         <p:txBody>
           <a:bodyPr/>
           <a:lstStyle/>
           <a:p>
+            <a:endParaRPr lang="en-US"/>
+          </a:p>
+        </p:txBody>
+      </p:sp>
+      <p:sp>
+        <p:nvSpPr>
+          <p:cNvPr id="3" name="Circle 2"/>
+          <p:cNvSpPr/>
+          <p:nvPr/>
+        </p:nvSpPr>
+        <p:spPr>
+          <a:xfrm>
+            <a:off x="0" y="4858000"/>
+            <a:ext cx="2000000" cy="2000000"/>
+          </a:xfrm>
+          <a:prstGeom prst="ellipse">
+            <a:avLst/>
+          </a:prstGeom>
+          <a:solidFill>
+            <a:srgbClr val="1CADE4">
+              <a:alpha val="12000"/>
+            </a:srgbClr>
+          </a:solidFill>
+          <a:ln>
+            <a:noFill/>
+          </a:ln>
+        </p:spPr>
+        <p:txBody>
+          <a:bodyPr/>
+          <a:lstStyle/>
+          <a:p>
+            <a:endParaRPr lang="en-US"/>
+          </a:p>
+        </p:txBody>
+      </p:sp>
+      <p:sp>
+        <p:nvSpPr>
+          <p:cNvPr id="4" name="Label"/>
+          <p:cNvSpPr/>
+          <p:nvPr/>
+        </p:nvSpPr>
+        <p:spPr>
+          <a:xfrm>
+            <a:off x="3200000" y="1900000"/>
+            <a:ext cx="2744000" cy="400000"/>
+          </a:xfrm>
+          <a:prstGeom prst="roundRect">
+            <a:avLst>
+              <a:gd name="adj" fmla="val 50000"/>
+            </a:avLst>
+          </a:prstGeom>
+          <a:solidFill>
+            <a:srgbClr val="27CED7"/>
+          </a:solidFill>
+          <a:ln>
+            <a:noFill/>
+          </a:ln>
+        </p:spPr>
+        <p:txBody>
+          <a:bodyPr lIns="91440" tIns="45720" rIns="91440" bIns="45720" anchor="ctr" anchorCtr="1"/>
+          <a:lstStyle/>
+          <a:p>
             <a:pPr algn="ctr"/>
-            <a:endParaRPr lang="en-US" sz="3600" dirty="0"/>
-          </a:p>
+            <a:r>
+              <a:rPr lang="en-US" sz="1600" b="1" spc="300">
+                <a:solidFill>
+                  <a:srgbClr val="FFFFFF"/>
+                </a:solidFill>
+                <a:latin typeface="Calibri"/>
+                <a:cs typeface="Calibri"/>
+              </a:rPr>
+              <a:t>HANDS-ON EXERCISE</a:t>
+            </a:r>
+          </a:p>
+        </p:txBody>
+      </p:sp>
+      <p:sp>
+        <p:nvSpPr>
+          <p:cNvPr id="5" name="MainTitle"/>
+          <p:cNvSpPr/>
+          <p:nvPr/>
+        </p:nvSpPr>
+        <p:spPr>
+          <a:xfrm>
+            <a:off x="1200000" y="2500000"/>
+            <a:ext cx="6744000" cy="900000"/>
+          </a:xfrm>
+          <a:prstGeom prst="rect">
+            <a:avLst/>
+          </a:prstGeom>
+          <a:noFill/>
+          <a:ln>
+            <a:noFill/>
+          </a:ln>
+        </p:spPr>
+        <p:txBody>
+          <a:bodyPr lIns="0" tIns="0" rIns="0" bIns="0" anchor="ctr" anchorCtr="1"/>
+          <a:lstStyle/>
           <a:p>
             <a:pPr algn="ctr"/>
-            <a:endParaRPr lang="en-US" sz="3600" dirty="0"/>
-          </a:p>
+            <a:r>
+              <a:rPr lang="en-US" sz="4800" b="1">
+                <a:solidFill>
+                  <a:srgbClr val="FFFFFF"/>
+                </a:solidFill>
+                <a:latin typeface="Calibri"/>
+                <a:cs typeface="Calibri"/>
+              </a:rPr>
+              <a:t>Lab 14</a:t>
+            </a:r>
+          </a:p>
+        </p:txBody>
+      </p:sp>
+      <p:sp>
+        <p:nvSpPr>
+          <p:cNvPr id="6" name="Subtitle"/>
+          <p:cNvSpPr/>
+          <p:nvPr/>
+        </p:nvSpPr>
+        <p:spPr>
+          <a:xfrm>
+            <a:off x="1800000" y="3500000"/>
+            <a:ext cx="5544000" cy="500000"/>
+          </a:xfrm>
+          <a:prstGeom prst="rect">
+            <a:avLst/>
+          </a:prstGeom>
+          <a:noFill/>
+          <a:ln>
+            <a:noFill/>
+          </a:ln>
+        </p:spPr>
+        <p:txBody>
+          <a:bodyPr lIns="0" tIns="0" rIns="0" bIns="0" anchor="t" anchorCtr="1"/>
+          <a:lstStyle/>
           <a:p>
             <a:pPr algn="ctr"/>
             <a:r>
-              <a:rPr lang="en-US" sz="3600" dirty="0"/>
-              <a:t>PERFORM LAB-14</a:t>
-            </a:r>
-            <a:endParaRPr lang="en-IN" dirty="0"/>
+              <a:rPr lang="en-US" sz="1800">
+                <a:solidFill>
+                  <a:srgbClr val="DFE3E5"/>
+                </a:solidFill>
+                <a:latin typeface="Calibri"/>
+                <a:cs typeface="Calibri"/>
+              </a:rPr>
+              <a:t>Snowflake Cortex Integration</a:t>
+            </a:r>
+          </a:p>
+        </p:txBody>
+      </p:sp>
+      <p:sp>
+        <p:nvSpPr>
+          <p:cNvPr id="7" name="BottomAccent"/>
+          <p:cNvSpPr/>
+          <p:nvPr/>
+        </p:nvSpPr>
+        <p:spPr>
+          <a:xfrm>
+            <a:off x="3800000" y="4200000"/>
+            <a:ext cx="1544000" cy="36000"/>
+          </a:xfrm>
+          <a:prstGeom prst="rect">
+            <a:avLst/>
+          </a:prstGeom>
+          <a:solidFill>
+            <a:srgbClr val="27CED7">
+              <a:alpha val="60000"/>
+            </a:srgbClr>
+          </a:solidFill>
+          <a:ln>
+            <a:noFill/>
+          </a:ln>
+        </p:spPr>
+        <p:txBody>
+          <a:bodyPr/>
+          <a:lstStyle/>
+          <a:p>
+            <a:endParaRPr lang="en-US"/>
           </a:p>
         </p:txBody>
       </p:sp>
@@ -21079,6 +23060,14 @@
 <file path=ppt/slides/slide44.xml><?xml version="1.0" encoding="utf-8"?>
 <p:sld xmlns:a="http://schemas.openxmlformats.org/drawingml/2006/main" xmlns:r="http://schemas.openxmlformats.org/officeDocument/2006/relationships" xmlns:p="http://schemas.openxmlformats.org/presentationml/2006/main">
   <p:cSld>
+    <p:bg>
+      <p:bgPr>
+        <a:solidFill>
+          <a:srgbClr val="335B74"/>
+        </a:solidFill>
+        <a:effectLst/>
+      </p:bgPr>
+    </p:bg>
     <p:spTree>
       <p:nvGrpSpPr>
         <p:cNvPr id="1" name=""/>
@@ -21095,45 +23084,209 @@
       </p:grpSpPr>
       <p:sp>
         <p:nvSpPr>
-          <p:cNvPr id="3" name="Content Placeholder 2">
-            <a:extLst>
-              <a:ext uri="{FF2B5EF4-FFF2-40B4-BE49-F238E27FC236}">
-                <a16:creationId xmlns:a16="http://schemas.microsoft.com/office/drawing/2014/main" id="{05F647E9-CE14-33AA-CAB2-691F510147AB}"/>
-              </a:ext>
-            </a:extLst>
-          </p:cNvPr>
-          <p:cNvSpPr>
-            <a:spLocks noGrp="1"/>
-          </p:cNvSpPr>
-          <p:nvPr>
-            <p:ph idx="1"/>
-          </p:nvPr>
+          <p:cNvPr id="2" name="Circle 1"/>
+          <p:cNvSpPr/>
+          <p:nvPr/>
         </p:nvSpPr>
-        <p:spPr/>
+        <p:spPr>
+          <a:xfrm>
+            <a:off x="6344000" y="0"/>
+            <a:ext cx="2800000" cy="2800000"/>
+          </a:xfrm>
+          <a:prstGeom prst="ellipse">
+            <a:avLst/>
+          </a:prstGeom>
+          <a:solidFill>
+            <a:srgbClr val="27CED7">
+              <a:alpha val="15000"/>
+            </a:srgbClr>
+          </a:solidFill>
+          <a:ln>
+            <a:noFill/>
+          </a:ln>
+        </p:spPr>
         <p:txBody>
-          <a:bodyPr>
-            <a:normAutofit/>
-          </a:bodyPr>
+          <a:bodyPr/>
           <a:lstStyle/>
           <a:p>
+            <a:endParaRPr lang="en-US"/>
+          </a:p>
+        </p:txBody>
+      </p:sp>
+      <p:sp>
+        <p:nvSpPr>
+          <p:cNvPr id="3" name="Circle 2"/>
+          <p:cNvSpPr/>
+          <p:nvPr/>
+        </p:nvSpPr>
+        <p:spPr>
+          <a:xfrm>
+            <a:off x="0" y="4858000"/>
+            <a:ext cx="2000000" cy="2000000"/>
+          </a:xfrm>
+          <a:prstGeom prst="ellipse">
+            <a:avLst/>
+          </a:prstGeom>
+          <a:solidFill>
+            <a:srgbClr val="1CADE4">
+              <a:alpha val="12000"/>
+            </a:srgbClr>
+          </a:solidFill>
+          <a:ln>
+            <a:noFill/>
+          </a:ln>
+        </p:spPr>
+        <p:txBody>
+          <a:bodyPr/>
+          <a:lstStyle/>
+          <a:p>
+            <a:endParaRPr lang="en-US"/>
+          </a:p>
+        </p:txBody>
+      </p:sp>
+      <p:sp>
+        <p:nvSpPr>
+          <p:cNvPr id="4" name="Label"/>
+          <p:cNvSpPr/>
+          <p:nvPr/>
+        </p:nvSpPr>
+        <p:spPr>
+          <a:xfrm>
+            <a:off x="3200000" y="1900000"/>
+            <a:ext cx="2744000" cy="400000"/>
+          </a:xfrm>
+          <a:prstGeom prst="roundRect">
+            <a:avLst>
+              <a:gd name="adj" fmla="val 50000"/>
+            </a:avLst>
+          </a:prstGeom>
+          <a:solidFill>
+            <a:srgbClr val="27CED7"/>
+          </a:solidFill>
+          <a:ln>
+            <a:noFill/>
+          </a:ln>
+        </p:spPr>
+        <p:txBody>
+          <a:bodyPr lIns="91440" tIns="45720" rIns="91440" bIns="45720" anchor="ctr" anchorCtr="1"/>
+          <a:lstStyle/>
+          <a:p>
             <a:pPr algn="ctr"/>
-            <a:endParaRPr lang="en-US" sz="3200" dirty="0"/>
-          </a:p>
+            <a:r>
+              <a:rPr lang="en-US" sz="1600" b="1" spc="300">
+                <a:solidFill>
+                  <a:srgbClr val="FFFFFF"/>
+                </a:solidFill>
+                <a:latin typeface="Calibri"/>
+                <a:cs typeface="Calibri"/>
+              </a:rPr>
+              <a:t>HANDS-ON EXERCISE</a:t>
+            </a:r>
+          </a:p>
+        </p:txBody>
+      </p:sp>
+      <p:sp>
+        <p:nvSpPr>
+          <p:cNvPr id="5" name="MainTitle"/>
+          <p:cNvSpPr/>
+          <p:nvPr/>
+        </p:nvSpPr>
+        <p:spPr>
+          <a:xfrm>
+            <a:off x="1200000" y="2500000"/>
+            <a:ext cx="6744000" cy="900000"/>
+          </a:xfrm>
+          <a:prstGeom prst="rect">
+            <a:avLst/>
+          </a:prstGeom>
+          <a:noFill/>
+          <a:ln>
+            <a:noFill/>
+          </a:ln>
+        </p:spPr>
+        <p:txBody>
+          <a:bodyPr lIns="0" tIns="0" rIns="0" bIns="0" anchor="ctr" anchorCtr="1"/>
+          <a:lstStyle/>
           <a:p>
             <a:pPr algn="ctr"/>
-            <a:endParaRPr lang="en-US" sz="3200" dirty="0"/>
-          </a:p>
+            <a:r>
+              <a:rPr lang="en-US" sz="4800" b="1">
+                <a:solidFill>
+                  <a:srgbClr val="FFFFFF"/>
+                </a:solidFill>
+                <a:latin typeface="Calibri"/>
+                <a:cs typeface="Calibri"/>
+              </a:rPr>
+              <a:t>Lab 19</a:t>
+            </a:r>
+          </a:p>
+        </p:txBody>
+      </p:sp>
+      <p:sp>
+        <p:nvSpPr>
+          <p:cNvPr id="6" name="Subtitle"/>
+          <p:cNvSpPr/>
+          <p:nvPr/>
+        </p:nvSpPr>
+        <p:spPr>
+          <a:xfrm>
+            <a:off x="1800000" y="3500000"/>
+            <a:ext cx="5544000" cy="500000"/>
+          </a:xfrm>
+          <a:prstGeom prst="rect">
+            <a:avLst/>
+          </a:prstGeom>
+          <a:noFill/>
+          <a:ln>
+            <a:noFill/>
+          </a:ln>
+        </p:spPr>
+        <p:txBody>
+          <a:bodyPr lIns="0" tIns="0" rIns="0" bIns="0" anchor="t" anchorCtr="1"/>
+          <a:lstStyle/>
           <a:p>
             <a:pPr algn="ctr"/>
-            <a:endParaRPr lang="en-US" sz="3200" dirty="0"/>
-          </a:p>
-          <a:p>
-            <a:pPr algn="ctr"/>
-            <a:r>
-              <a:rPr lang="en-US" sz="3200" dirty="0"/>
-              <a:t>PERFORM LAB-19</a:t>
-            </a:r>
-            <a:endParaRPr lang="en-IN" sz="3200" dirty="0"/>
+            <a:r>
+              <a:rPr lang="en-US" sz="1800">
+                <a:solidFill>
+                  <a:srgbClr val="DFE3E5"/>
+                </a:solidFill>
+                <a:latin typeface="Calibri"/>
+                <a:cs typeface="Calibri"/>
+              </a:rPr>
+              <a:t>Enterprise Use Cases &amp; Best Practices</a:t>
+            </a:r>
+          </a:p>
+        </p:txBody>
+      </p:sp>
+      <p:sp>
+        <p:nvSpPr>
+          <p:cNvPr id="7" name="BottomAccent"/>
+          <p:cNvSpPr/>
+          <p:nvPr/>
+        </p:nvSpPr>
+        <p:spPr>
+          <a:xfrm>
+            <a:off x="3800000" y="4200000"/>
+            <a:ext cx="1544000" cy="36000"/>
+          </a:xfrm>
+          <a:prstGeom prst="rect">
+            <a:avLst/>
+          </a:prstGeom>
+          <a:solidFill>
+            <a:srgbClr val="27CED7">
+              <a:alpha val="60000"/>
+            </a:srgbClr>
+          </a:solidFill>
+          <a:ln>
+            <a:noFill/>
+          </a:ln>
+        </p:spPr>
+        <p:txBody>
+          <a:bodyPr/>
+          <a:lstStyle/>
+          <a:p>
+            <a:endParaRPr lang="en-US"/>
           </a:p>
         </p:txBody>
       </p:sp>
@@ -21141,6 +23294,242 @@
     <p:extLst>
       <p:ext uri="{BB962C8B-B14F-4D97-AF65-F5344CB8AC3E}">
         <p14:creationId xmlns:p14="http://schemas.microsoft.com/office/powerpoint/2010/main" val="3738205321"/>
+      </p:ext>
+    </p:extLst>
+  </p:cSld>
+  <p:clrMapOvr>
+    <a:masterClrMapping/>
+  </p:clrMapOvr>
+</p:sld>
+</file>
+
+<file path=ppt/slides/slide45.xml><?xml version="1.0" encoding="utf-8"?>
+<p:sld xmlns:a="http://schemas.openxmlformats.org/drawingml/2006/main" xmlns:r="http://schemas.openxmlformats.org/officeDocument/2006/relationships" xmlns:p="http://schemas.openxmlformats.org/presentationml/2006/main">
+  <p:cSld>
+    <p:bg>
+      <p:bgPr>
+        <a:solidFill>
+          <a:srgbClr val="335B74"/>
+        </a:solidFill>
+        <a:effectLst/>
+      </p:bgPr>
+    </p:bg>
+    <p:spTree>
+      <p:nvGrpSpPr>
+        <p:cNvPr id="1" name=""/>
+        <p:cNvGrpSpPr/>
+        <p:nvPr/>
+      </p:nvGrpSpPr>
+      <p:grpSpPr>
+        <a:xfrm>
+          <a:off x="0" y="0"/>
+          <a:ext cx="0" cy="0"/>
+          <a:chOff x="0" y="0"/>
+          <a:chExt cx="0" cy="0"/>
+        </a:xfrm>
+      </p:grpSpPr>
+      <p:sp>
+        <p:nvSpPr>
+          <p:cNvPr id="2" name="Circle 1"/>
+          <p:cNvSpPr/>
+          <p:nvPr/>
+        </p:nvSpPr>
+        <p:spPr>
+          <a:xfrm>
+            <a:off x="6344000" y="0"/>
+            <a:ext cx="2800000" cy="2800000"/>
+          </a:xfrm>
+          <a:prstGeom prst="ellipse">
+            <a:avLst/>
+          </a:prstGeom>
+          <a:solidFill>
+            <a:srgbClr val="27CED7">
+              <a:alpha val="15000"/>
+            </a:srgbClr>
+          </a:solidFill>
+          <a:ln>
+            <a:noFill/>
+          </a:ln>
+        </p:spPr>
+        <p:txBody>
+          <a:bodyPr/>
+          <a:lstStyle/>
+          <a:p>
+            <a:endParaRPr lang="en-US"/>
+          </a:p>
+        </p:txBody>
+      </p:sp>
+      <p:sp>
+        <p:nvSpPr>
+          <p:cNvPr id="3" name="Circle 2"/>
+          <p:cNvSpPr/>
+          <p:nvPr/>
+        </p:nvSpPr>
+        <p:spPr>
+          <a:xfrm>
+            <a:off x="0" y="4858000"/>
+            <a:ext cx="2000000" cy="2000000"/>
+          </a:xfrm>
+          <a:prstGeom prst="ellipse">
+            <a:avLst/>
+          </a:prstGeom>
+          <a:solidFill>
+            <a:srgbClr val="1CADE4">
+              <a:alpha val="12000"/>
+            </a:srgbClr>
+          </a:solidFill>
+          <a:ln>
+            <a:noFill/>
+          </a:ln>
+        </p:spPr>
+        <p:txBody>
+          <a:bodyPr/>
+          <a:lstStyle/>
+          <a:p>
+            <a:endParaRPr lang="en-US"/>
+          </a:p>
+        </p:txBody>
+      </p:sp>
+      <p:sp>
+        <p:nvSpPr>
+          <p:cNvPr id="4" name="Circle 3"/>
+          <p:cNvSpPr/>
+          <p:nvPr/>
+        </p:nvSpPr>
+        <p:spPr>
+          <a:xfrm>
+            <a:off x="7344000" y="5000000"/>
+            <a:ext cx="1800000" cy="1800000"/>
+          </a:xfrm>
+          <a:prstGeom prst="ellipse">
+            <a:avLst/>
+          </a:prstGeom>
+          <a:solidFill>
+            <a:srgbClr val="42BA97">
+              <a:alpha val="10000"/>
+            </a:srgbClr>
+          </a:solidFill>
+          <a:ln>
+            <a:noFill/>
+          </a:ln>
+        </p:spPr>
+        <p:txBody>
+          <a:bodyPr/>
+          <a:lstStyle/>
+          <a:p>
+            <a:endParaRPr lang="en-US"/>
+          </a:p>
+        </p:txBody>
+      </p:sp>
+      <p:sp>
+        <p:nvSpPr>
+          <p:cNvPr id="5" name="ThankYou"/>
+          <p:cNvSpPr/>
+          <p:nvPr/>
+        </p:nvSpPr>
+        <p:spPr>
+          <a:xfrm>
+            <a:off x="1200000" y="1800000"/>
+            <a:ext cx="6744000" cy="1200000"/>
+          </a:xfrm>
+          <a:prstGeom prst="rect">
+            <a:avLst/>
+          </a:prstGeom>
+          <a:noFill/>
+          <a:ln>
+            <a:noFill/>
+          </a:ln>
+        </p:spPr>
+        <p:txBody>
+          <a:bodyPr lIns="0" tIns="0" rIns="0" bIns="0" anchor="ctr" anchorCtr="1"/>
+          <a:lstStyle/>
+          <a:p>
+            <a:pPr algn="ctr"/>
+            <a:r>
+              <a:rPr lang="en-US" sz="5400" b="1">
+                <a:solidFill>
+                  <a:srgbClr val="FFFFFF"/>
+                </a:solidFill>
+                <a:latin typeface="Calibri"/>
+                <a:cs typeface="Calibri"/>
+              </a:rPr>
+              <a:t>Thank You</a:t>
+            </a:r>
+          </a:p>
+        </p:txBody>
+      </p:sp>
+      <p:sp>
+        <p:nvSpPr>
+          <p:cNvPr id="6" name="Divider"/>
+          <p:cNvSpPr/>
+          <p:nvPr/>
+        </p:nvSpPr>
+        <p:spPr>
+          <a:xfrm>
+            <a:off x="3800000" y="3200000"/>
+            <a:ext cx="1544000" cy="36000"/>
+          </a:xfrm>
+          <a:prstGeom prst="rect">
+            <a:avLst/>
+          </a:prstGeom>
+          <a:solidFill>
+            <a:srgbClr val="27CED7">
+              <a:alpha val="60000"/>
+            </a:srgbClr>
+          </a:solidFill>
+          <a:ln>
+            <a:noFill/>
+          </a:ln>
+        </p:spPr>
+        <p:txBody>
+          <a:bodyPr/>
+          <a:lstStyle/>
+          <a:p>
+            <a:endParaRPr lang="en-US"/>
+          </a:p>
+        </p:txBody>
+      </p:sp>
+      <p:sp>
+        <p:nvSpPr>
+          <p:cNvPr id="7" name="QandA"/>
+          <p:cNvSpPr/>
+          <p:nvPr/>
+        </p:nvSpPr>
+        <p:spPr>
+          <a:xfrm>
+            <a:off x="1800000" y="3500000"/>
+            <a:ext cx="5544000" cy="600000"/>
+          </a:xfrm>
+          <a:prstGeom prst="rect">
+            <a:avLst/>
+          </a:prstGeom>
+          <a:noFill/>
+          <a:ln>
+            <a:noFill/>
+          </a:ln>
+        </p:spPr>
+        <p:txBody>
+          <a:bodyPr lIns="0" tIns="0" rIns="0" bIns="0" anchor="t" anchorCtr="1"/>
+          <a:lstStyle/>
+          <a:p>
+            <a:pPr algn="ctr"/>
+            <a:r>
+              <a:rPr lang="en-US" sz="2400">
+                <a:solidFill>
+                  <a:srgbClr val="DFE3E5"/>
+                </a:solidFill>
+                <a:latin typeface="Calibri"/>
+                <a:cs typeface="Calibri"/>
+              </a:rPr>
+              <a:t>Questions &amp; Answers</a:t>
+            </a:r>
+          </a:p>
+        </p:txBody>
+      </p:sp>
+    </p:spTree>
+    <p:extLst>
+      <p:ext uri="{BB962C8B-B14F-4D97-AF65-F5344CB8AC3E}">
+        <p14:creationId xmlns:p14="http://schemas.microsoft.com/office/powerpoint/2010/main" val="2409948848"/>
       </p:ext>
     </p:extLst>
   </p:cSld>
@@ -21339,6 +23728,14 @@
 <file path=ppt/slides/slide6.xml><?xml version="1.0" encoding="utf-8"?>
 <p:sld xmlns:a="http://schemas.openxmlformats.org/drawingml/2006/main" xmlns:r="http://schemas.openxmlformats.org/officeDocument/2006/relationships" xmlns:p="http://schemas.openxmlformats.org/presentationml/2006/main">
   <p:cSld>
+    <p:bg>
+      <p:bgPr>
+        <a:solidFill>
+          <a:srgbClr val="335B74"/>
+        </a:solidFill>
+        <a:effectLst/>
+      </p:bgPr>
+    </p:bg>
     <p:spTree>
       <p:nvGrpSpPr>
         <p:cNvPr id="1" name=""/>
@@ -21355,40 +23752,209 @@
       </p:grpSpPr>
       <p:sp>
         <p:nvSpPr>
-          <p:cNvPr id="3" name="Content Placeholder 2">
-            <a:extLst>
-              <a:ext uri="{FF2B5EF4-FFF2-40B4-BE49-F238E27FC236}">
-                <a16:creationId xmlns:a16="http://schemas.microsoft.com/office/drawing/2014/main" id="{2CD4CF9E-6A55-1FE9-B4F9-81060010F688}"/>
-              </a:ext>
-            </a:extLst>
-          </p:cNvPr>
-          <p:cNvSpPr>
-            <a:spLocks noGrp="1"/>
-          </p:cNvSpPr>
-          <p:nvPr>
-            <p:ph idx="1"/>
-          </p:nvPr>
+          <p:cNvPr id="2" name="Circle 1"/>
+          <p:cNvSpPr/>
+          <p:nvPr/>
         </p:nvSpPr>
-        <p:spPr/>
+        <p:spPr>
+          <a:xfrm>
+            <a:off x="6344000" y="0"/>
+            <a:ext cx="2800000" cy="2800000"/>
+          </a:xfrm>
+          <a:prstGeom prst="ellipse">
+            <a:avLst/>
+          </a:prstGeom>
+          <a:solidFill>
+            <a:srgbClr val="27CED7">
+              <a:alpha val="15000"/>
+            </a:srgbClr>
+          </a:solidFill>
+          <a:ln>
+            <a:noFill/>
+          </a:ln>
+        </p:spPr>
         <p:txBody>
           <a:bodyPr/>
           <a:lstStyle/>
           <a:p>
-            <a:endParaRPr lang="en-US" dirty="0"/>
-          </a:p>
-          <a:p>
-            <a:endParaRPr lang="en-US" dirty="0"/>
-          </a:p>
-          <a:p>
-            <a:endParaRPr lang="en-US" dirty="0"/>
-          </a:p>
+            <a:endParaRPr lang="en-US"/>
+          </a:p>
+        </p:txBody>
+      </p:sp>
+      <p:sp>
+        <p:nvSpPr>
+          <p:cNvPr id="3" name="Circle 2"/>
+          <p:cNvSpPr/>
+          <p:nvPr/>
+        </p:nvSpPr>
+        <p:spPr>
+          <a:xfrm>
+            <a:off x="0" y="4858000"/>
+            <a:ext cx="2000000" cy="2000000"/>
+          </a:xfrm>
+          <a:prstGeom prst="ellipse">
+            <a:avLst/>
+          </a:prstGeom>
+          <a:solidFill>
+            <a:srgbClr val="1CADE4">
+              <a:alpha val="12000"/>
+            </a:srgbClr>
+          </a:solidFill>
+          <a:ln>
+            <a:noFill/>
+          </a:ln>
+        </p:spPr>
+        <p:txBody>
+          <a:bodyPr/>
+          <a:lstStyle/>
+          <a:p>
+            <a:endParaRPr lang="en-US"/>
+          </a:p>
+        </p:txBody>
+      </p:sp>
+      <p:sp>
+        <p:nvSpPr>
+          <p:cNvPr id="4" name="Label"/>
+          <p:cNvSpPr/>
+          <p:nvPr/>
+        </p:nvSpPr>
+        <p:spPr>
+          <a:xfrm>
+            <a:off x="3200000" y="1900000"/>
+            <a:ext cx="2744000" cy="400000"/>
+          </a:xfrm>
+          <a:prstGeom prst="roundRect">
+            <a:avLst>
+              <a:gd name="adj" fmla="val 50000"/>
+            </a:avLst>
+          </a:prstGeom>
+          <a:solidFill>
+            <a:srgbClr val="27CED7"/>
+          </a:solidFill>
+          <a:ln>
+            <a:noFill/>
+          </a:ln>
+        </p:spPr>
+        <p:txBody>
+          <a:bodyPr lIns="91440" tIns="45720" rIns="91440" bIns="45720" anchor="ctr" anchorCtr="1"/>
+          <a:lstStyle/>
           <a:p>
             <a:pPr algn="ctr"/>
             <a:r>
-              <a:rPr lang="en-US" sz="5400" dirty="0"/>
-              <a:t>Perform LAB-1</a:t>
-            </a:r>
-            <a:endParaRPr lang="en-IN" dirty="0"/>
+              <a:rPr lang="en-US" sz="1600" b="1" spc="300">
+                <a:solidFill>
+                  <a:srgbClr val="FFFFFF"/>
+                </a:solidFill>
+                <a:latin typeface="Calibri"/>
+                <a:cs typeface="Calibri"/>
+              </a:rPr>
+              <a:t>HANDS-ON EXERCISE</a:t>
+            </a:r>
+          </a:p>
+        </p:txBody>
+      </p:sp>
+      <p:sp>
+        <p:nvSpPr>
+          <p:cNvPr id="5" name="MainTitle"/>
+          <p:cNvSpPr/>
+          <p:nvPr/>
+        </p:nvSpPr>
+        <p:spPr>
+          <a:xfrm>
+            <a:off x="1200000" y="2500000"/>
+            <a:ext cx="6744000" cy="900000"/>
+          </a:xfrm>
+          <a:prstGeom prst="rect">
+            <a:avLst/>
+          </a:prstGeom>
+          <a:noFill/>
+          <a:ln>
+            <a:noFill/>
+          </a:ln>
+        </p:spPr>
+        <p:txBody>
+          <a:bodyPr lIns="0" tIns="0" rIns="0" bIns="0" anchor="ctr" anchorCtr="1"/>
+          <a:lstStyle/>
+          <a:p>
+            <a:pPr algn="ctr"/>
+            <a:r>
+              <a:rPr lang="en-US" sz="4800" b="1">
+                <a:solidFill>
+                  <a:srgbClr val="FFFFFF"/>
+                </a:solidFill>
+                <a:latin typeface="Calibri"/>
+                <a:cs typeface="Calibri"/>
+              </a:rPr>
+              <a:t>Lab 1</a:t>
+            </a:r>
+          </a:p>
+        </p:txBody>
+      </p:sp>
+      <p:sp>
+        <p:nvSpPr>
+          <p:cNvPr id="6" name="Subtitle"/>
+          <p:cNvSpPr/>
+          <p:nvPr/>
+        </p:nvSpPr>
+        <p:spPr>
+          <a:xfrm>
+            <a:off x="1800000" y="3500000"/>
+            <a:ext cx="5544000" cy="500000"/>
+          </a:xfrm>
+          <a:prstGeom prst="rect">
+            <a:avLst/>
+          </a:prstGeom>
+          <a:noFill/>
+          <a:ln>
+            <a:noFill/>
+          </a:ln>
+        </p:spPr>
+        <p:txBody>
+          <a:bodyPr lIns="0" tIns="0" rIns="0" bIns="0" anchor="t" anchorCtr="1"/>
+          <a:lstStyle/>
+          <a:p>
+            <a:pPr algn="ctr"/>
+            <a:r>
+              <a:rPr lang="en-US" sz="1800">
+                <a:solidFill>
+                  <a:srgbClr val="DFE3E5"/>
+                </a:solidFill>
+                <a:latin typeface="Calibri"/>
+                <a:cs typeface="Calibri"/>
+              </a:rPr>
+              <a:t>Autonomous Ingestion Agent</a:t>
+            </a:r>
+          </a:p>
+        </p:txBody>
+      </p:sp>
+      <p:sp>
+        <p:nvSpPr>
+          <p:cNvPr id="7" name="BottomAccent"/>
+          <p:cNvSpPr/>
+          <p:nvPr/>
+        </p:nvSpPr>
+        <p:spPr>
+          <a:xfrm>
+            <a:off x="3800000" y="4200000"/>
+            <a:ext cx="1544000" cy="36000"/>
+          </a:xfrm>
+          <a:prstGeom prst="rect">
+            <a:avLst/>
+          </a:prstGeom>
+          <a:solidFill>
+            <a:srgbClr val="27CED7">
+              <a:alpha val="60000"/>
+            </a:srgbClr>
+          </a:solidFill>
+          <a:ln>
+            <a:noFill/>
+          </a:ln>
+        </p:spPr>
+        <p:txBody>
+          <a:bodyPr/>
+          <a:lstStyle/>
+          <a:p>
+            <a:endParaRPr lang="en-US"/>
           </a:p>
         </p:txBody>
       </p:sp>
@@ -22095,4 +24661,26 @@
     </a:ext>
   </a:extLst>
 </a:theme>
+</file>
+
+<file path=ppt/webextensions/taskpanes.xml><?xml version="1.0" encoding="utf-8"?>
+<wetp:taskpanes xmlns:wetp="http://schemas.microsoft.com/office/webextensions/taskpanes/2010/11">
+  <wetp:taskpane dockstate="right" visibility="0" width="438" row="2">
+    <wetp:webextensionref xmlns:r="http://schemas.openxmlformats.org/officeDocument/2006/relationships" r:id="rId1"/>
+  </wetp:taskpane>
+</wetp:taskpanes>
+</file>
+
+<file path=ppt/webextensions/webextension1.xml><?xml version="1.0" encoding="utf-8"?>
+<we:webextension xmlns:we="http://schemas.microsoft.com/office/webextensions/webextension/2010/11" id="{6CE7B985-34B4-4A9E-AE5A-7781CFE3E2ED}">
+  <we:reference id="wa200010001" version="1.0.0.1" store="en-US" storeType="OMEX"/>
+  <we:alternateReferences>
+    <we:reference id="WA200010001" version="1.0.0.1" store="WA200010001" storeType="OMEX"/>
+  </we:alternateReferences>
+  <we:properties>
+    <we:property name="claude.fileId" value="&quot;f9bb13e3-9ced-4b82-852c-a7a0b0147ed7&quot;"/>
+  </we:properties>
+  <we:bindings/>
+  <we:snapshot xmlns:r="http://schemas.openxmlformats.org/officeDocument/2006/relationships"/>
+</we:webextension>
 </file>